--- a/CMSIS/DoxyGen/Zone/src/images/CMSIS_Zone.pptx
+++ b/CMSIS/DoxyGen/Zone/src/images/CMSIS_Zone.pptx
@@ -5,21 +5,20 @@
     <p:sldMasterId id="2147483726" r:id="rId5"/>
   </p:sldMasterIdLst>
   <p:notesMasterIdLst>
-    <p:notesMasterId r:id="rId15"/>
+    <p:notesMasterId r:id="rId14"/>
   </p:notesMasterIdLst>
   <p:handoutMasterIdLst>
-    <p:handoutMasterId r:id="rId16"/>
+    <p:handoutMasterId r:id="rId15"/>
   </p:handoutMasterIdLst>
   <p:sldIdLst>
     <p:sldId id="369" r:id="rId6"/>
     <p:sldId id="375" r:id="rId7"/>
     <p:sldId id="373" r:id="rId8"/>
-    <p:sldId id="3171" r:id="rId9"/>
-    <p:sldId id="377" r:id="rId10"/>
-    <p:sldId id="378" r:id="rId11"/>
-    <p:sldId id="374" r:id="rId12"/>
-    <p:sldId id="376" r:id="rId13"/>
-    <p:sldId id="379" r:id="rId14"/>
+    <p:sldId id="377" r:id="rId9"/>
+    <p:sldId id="378" r:id="rId10"/>
+    <p:sldId id="374" r:id="rId11"/>
+    <p:sldId id="376" r:id="rId12"/>
+    <p:sldId id="379" r:id="rId13"/>
   </p:sldIdLst>
   <p:sldSz cx="9144000" cy="5143500" type="screen16x9"/>
   <p:notesSz cx="6858000" cy="9144000"/>
@@ -254,7 +253,7 @@
               <a:rPr lang="en-US" smtClean="0">
                 <a:latin typeface="Gill Sans MT"/>
               </a:rPr>
-              <a:t>9/2/2019</a:t>
+              <a:t>2019-07-04</a:t>
             </a:fld>
             <a:endParaRPr lang="en-US" dirty="0">
               <a:latin typeface="Gill Sans MT"/>
@@ -433,7 +432,7 @@
             <a:fld id="{49FE4451-D2A5-554E-B842-8C4F3752E2A4}" type="datetimeFigureOut">
               <a:rPr lang="en-US" smtClean="0"/>
               <a:pPr/>
-              <a:t>9/2/2019</a:t>
+              <a:t>2019-07-04</a:t>
             </a:fld>
             <a:endParaRPr lang="en-US" dirty="0"/>
           </a:p>
@@ -1061,30 +1060,7 @@
           <a:bodyPr/>
           <a:lstStyle/>
           <a:p>
-            <a:pPr marL="0" marR="0" lvl="0" indent="0" algn="l" defTabSz="914400" rtl="0" eaLnBrk="0" fontAlgn="base" latinLnBrk="0" hangingPunct="0">
-              <a:lnSpc>
-                <a:spcPct val="100000"/>
-              </a:lnSpc>
-              <a:spcBef>
-                <a:spcPct val="30000"/>
-              </a:spcBef>
-              <a:spcAft>
-                <a:spcPct val="0"/>
-              </a:spcAft>
-              <a:buClrTx/>
-              <a:buSzTx/>
-              <a:buFontTx/>
-              <a:buNone/>
-              <a:tabLst/>
-              <a:defRPr/>
-            </a:pPr>
-            <a:r>
-              <a:rPr lang="en-US" dirty="0"/>
-              <a:t>Walk thru slide</a:t>
-            </a:r>
-          </a:p>
-          <a:p>
-            <a:endParaRPr lang="en-GB" dirty="0"/>
+            <a:endParaRPr lang="en-US" baseline="0" dirty="0"/>
           </a:p>
         </p:txBody>
       </p:sp>
@@ -1095,7 +1071,7 @@
             <a:spLocks noGrp="1"/>
           </p:cNvSpPr>
           <p:nvPr>
-            <p:ph type="sldNum" sz="quarter" idx="5"/>
+            <p:ph type="sldNum" sz="quarter" idx="10"/>
           </p:nvPr>
         </p:nvSpPr>
         <p:spPr/>
@@ -1103,24 +1079,18 @@
           <a:bodyPr/>
           <a:lstStyle/>
           <a:p>
-            <a:pPr>
-              <a:defRPr/>
-            </a:pPr>
-            <a:fld id="{7EFC29AE-2DE4-804C-87C9-5C71C5FB830F}" type="slidenum">
-              <a:rPr lang="en-US" altLang="en-US" smtClean="0"/>
-              <a:pPr>
-                <a:defRPr/>
-              </a:pPr>
+            <a:fld id="{15C21F19-84A7-D347-9BFC-DB9F02D4494D}" type="slidenum">
+              <a:rPr lang="en-US" smtClean="0"/>
               <a:t>4</a:t>
             </a:fld>
-            <a:endParaRPr lang="en-US" altLang="en-US"/>
+            <a:endParaRPr lang="en-US"/>
           </a:p>
         </p:txBody>
       </p:sp>
     </p:spTree>
     <p:extLst>
       <p:ext uri="{BB962C8B-B14F-4D97-AF65-F5344CB8AC3E}">
-        <p14:creationId xmlns:p14="http://schemas.microsoft.com/office/powerpoint/2010/main" val="2518343897"/>
+        <p14:creationId xmlns:p14="http://schemas.microsoft.com/office/powerpoint/2010/main" val="201014760"/>
       </p:ext>
     </p:extLst>
   </p:cSld>
@@ -1204,7 +1174,7 @@
     </p:spTree>
     <p:extLst>
       <p:ext uri="{BB962C8B-B14F-4D97-AF65-F5344CB8AC3E}">
-        <p14:creationId xmlns:p14="http://schemas.microsoft.com/office/powerpoint/2010/main" val="201014760"/>
+        <p14:creationId xmlns:p14="http://schemas.microsoft.com/office/powerpoint/2010/main" val="1809386468"/>
       </p:ext>
     </p:extLst>
   </p:cSld>
@@ -1288,7 +1258,7 @@
     </p:spTree>
     <p:extLst>
       <p:ext uri="{BB962C8B-B14F-4D97-AF65-F5344CB8AC3E}">
-        <p14:creationId xmlns:p14="http://schemas.microsoft.com/office/powerpoint/2010/main" val="1809386468"/>
+        <p14:creationId xmlns:p14="http://schemas.microsoft.com/office/powerpoint/2010/main" val="201014760"/>
       </p:ext>
     </p:extLst>
   </p:cSld>
@@ -1364,90 +1334,6 @@
             <a:fld id="{15C21F19-84A7-D347-9BFC-DB9F02D4494D}" type="slidenum">
               <a:rPr lang="en-US" smtClean="0"/>
               <a:t>7</a:t>
-            </a:fld>
-            <a:endParaRPr lang="en-US"/>
-          </a:p>
-        </p:txBody>
-      </p:sp>
-    </p:spTree>
-    <p:extLst>
-      <p:ext uri="{BB962C8B-B14F-4D97-AF65-F5344CB8AC3E}">
-        <p14:creationId xmlns:p14="http://schemas.microsoft.com/office/powerpoint/2010/main" val="201014760"/>
-      </p:ext>
-    </p:extLst>
-  </p:cSld>
-  <p:clrMapOvr>
-    <a:masterClrMapping/>
-  </p:clrMapOvr>
-</p:notes>
-</file>
-
-<file path=ppt/notesSlides/notesSlide7.xml><?xml version="1.0" encoding="utf-8"?>
-<p:notes xmlns:a="http://schemas.openxmlformats.org/drawingml/2006/main" xmlns:r="http://schemas.openxmlformats.org/officeDocument/2006/relationships" xmlns:p="http://schemas.openxmlformats.org/presentationml/2006/main">
-  <p:cSld>
-    <p:spTree>
-      <p:nvGrpSpPr>
-        <p:cNvPr id="1" name=""/>
-        <p:cNvGrpSpPr/>
-        <p:nvPr/>
-      </p:nvGrpSpPr>
-      <p:grpSpPr>
-        <a:xfrm>
-          <a:off x="0" y="0"/>
-          <a:ext cx="0" cy="0"/>
-          <a:chOff x="0" y="0"/>
-          <a:chExt cx="0" cy="0"/>
-        </a:xfrm>
-      </p:grpSpPr>
-      <p:sp>
-        <p:nvSpPr>
-          <p:cNvPr id="2" name="Slide Image Placeholder 1"/>
-          <p:cNvSpPr>
-            <a:spLocks noGrp="1" noRot="1" noChangeAspect="1"/>
-          </p:cNvSpPr>
-          <p:nvPr>
-            <p:ph type="sldImg"/>
-          </p:nvPr>
-        </p:nvSpPr>
-        <p:spPr/>
-      </p:sp>
-      <p:sp>
-        <p:nvSpPr>
-          <p:cNvPr id="3" name="Notes Placeholder 2"/>
-          <p:cNvSpPr>
-            <a:spLocks noGrp="1"/>
-          </p:cNvSpPr>
-          <p:nvPr>
-            <p:ph type="body" idx="1"/>
-          </p:nvPr>
-        </p:nvSpPr>
-        <p:spPr/>
-        <p:txBody>
-          <a:bodyPr/>
-          <a:lstStyle/>
-          <a:p>
-            <a:endParaRPr lang="en-US" baseline="0" dirty="0"/>
-          </a:p>
-        </p:txBody>
-      </p:sp>
-      <p:sp>
-        <p:nvSpPr>
-          <p:cNvPr id="4" name="Slide Number Placeholder 3"/>
-          <p:cNvSpPr>
-            <a:spLocks noGrp="1"/>
-          </p:cNvSpPr>
-          <p:nvPr>
-            <p:ph type="sldNum" sz="quarter" idx="10"/>
-          </p:nvPr>
-        </p:nvSpPr>
-        <p:spPr/>
-        <p:txBody>
-          <a:bodyPr/>
-          <a:lstStyle/>
-          <a:p>
-            <a:fld id="{15C21F19-84A7-D347-9BFC-DB9F02D4494D}" type="slidenum">
-              <a:rPr lang="en-US" smtClean="0"/>
-              <a:t>8</a:t>
             </a:fld>
             <a:endParaRPr lang="en-US"/>
           </a:p>
@@ -5228,240 +5114,6 @@
 </p:sldLayout>
 </file>
 
-<file path=ppt/slideLayouts/slideLayout21.xml><?xml version="1.0" encoding="utf-8"?>
-<p:sldLayout xmlns:a="http://schemas.openxmlformats.org/drawingml/2006/main" xmlns:r="http://schemas.openxmlformats.org/officeDocument/2006/relationships" xmlns:p="http://schemas.openxmlformats.org/presentationml/2006/main" userDrawn="1">
-  <p:cSld name="1 Column Slide with TOP level Bullet">
-    <p:spTree>
-      <p:nvGrpSpPr>
-        <p:cNvPr id="1" name=""/>
-        <p:cNvGrpSpPr/>
-        <p:nvPr/>
-      </p:nvGrpSpPr>
-      <p:grpSpPr>
-        <a:xfrm>
-          <a:off x="0" y="0"/>
-          <a:ext cx="0" cy="0"/>
-          <a:chOff x="0" y="0"/>
-          <a:chExt cx="0" cy="0"/>
-        </a:xfrm>
-      </p:grpSpPr>
-      <p:sp>
-        <p:nvSpPr>
-          <p:cNvPr id="2" name="Title 1"/>
-          <p:cNvSpPr>
-            <a:spLocks noGrp="1"/>
-          </p:cNvSpPr>
-          <p:nvPr>
-            <p:ph type="title" hasCustomPrompt="1"/>
-          </p:nvPr>
-        </p:nvSpPr>
-        <p:spPr>
-          <a:xfrm>
-            <a:off x="359569" y="357188"/>
-            <a:ext cx="8424863" cy="410369"/>
-          </a:xfrm>
-        </p:spPr>
-        <p:txBody>
-          <a:bodyPr anchor="t"/>
-          <a:lstStyle>
-            <a:lvl1pPr>
-              <a:defRPr b="0"/>
-            </a:lvl1pPr>
-          </a:lstStyle>
-          <a:p>
-            <a:r>
-              <a:rPr lang="en-US"/>
-              <a:t>Click to Edit Master Title Style</a:t>
-            </a:r>
-          </a:p>
-        </p:txBody>
-      </p:sp>
-      <p:sp>
-        <p:nvSpPr>
-          <p:cNvPr id="4" name="Text Placeholder 2"/>
-          <p:cNvSpPr>
-            <a:spLocks noGrp="1"/>
-          </p:cNvSpPr>
-          <p:nvPr>
-            <p:ph idx="1" hasCustomPrompt="1"/>
-          </p:nvPr>
-        </p:nvSpPr>
-        <p:spPr>
-          <a:xfrm>
-            <a:off x="359569" y="878334"/>
-            <a:ext cx="8424863" cy="3064669"/>
-          </a:xfrm>
-          <a:prstGeom prst="rect">
-            <a:avLst/>
-          </a:prstGeom>
-        </p:spPr>
-        <p:txBody>
-          <a:bodyPr/>
-          <a:lstStyle>
-            <a:lvl1pPr marL="257175" indent="-257175">
-              <a:lnSpc>
-                <a:spcPct val="100000"/>
-              </a:lnSpc>
-              <a:spcBef>
-                <a:spcPts val="450"/>
-              </a:spcBef>
-              <a:spcAft>
-                <a:spcPts val="0"/>
-              </a:spcAft>
-              <a:buClr>
-                <a:schemeClr val="accent1"/>
-              </a:buClr>
-              <a:buFont typeface="Arial" charset="0"/>
-              <a:buChar char="•"/>
-              <a:defRPr sz="1800">
-                <a:solidFill>
-                  <a:schemeClr val="tx2"/>
-                </a:solidFill>
-              </a:defRPr>
-            </a:lvl1pPr>
-            <a:lvl2pPr marL="504587">
-              <a:lnSpc>
-                <a:spcPct val="100000"/>
-              </a:lnSpc>
-              <a:spcAft>
-                <a:spcPts val="0"/>
-              </a:spcAft>
-              <a:defRPr sz="1500">
-                <a:solidFill>
-                  <a:schemeClr val="tx2"/>
-                </a:solidFill>
-              </a:defRPr>
-            </a:lvl2pPr>
-            <a:lvl3pPr marL="710327">
-              <a:lnSpc>
-                <a:spcPct val="100000"/>
-              </a:lnSpc>
-              <a:spcAft>
-                <a:spcPts val="0"/>
-              </a:spcAft>
-              <a:defRPr sz="1350">
-                <a:solidFill>
-                  <a:schemeClr val="tx2"/>
-                </a:solidFill>
-              </a:defRPr>
-            </a:lvl3pPr>
-            <a:lvl4pPr marL="969884">
-              <a:lnSpc>
-                <a:spcPct val="100000"/>
-              </a:lnSpc>
-              <a:spcAft>
-                <a:spcPts val="0"/>
-              </a:spcAft>
-              <a:defRPr sz="1350">
-                <a:solidFill>
-                  <a:schemeClr val="tx2"/>
-                </a:solidFill>
-              </a:defRPr>
-            </a:lvl4pPr>
-            <a:lvl5pPr marL="1138952">
-              <a:lnSpc>
-                <a:spcPct val="100000"/>
-              </a:lnSpc>
-              <a:spcAft>
-                <a:spcPts val="0"/>
-              </a:spcAft>
-              <a:defRPr sz="1350">
-                <a:solidFill>
-                  <a:schemeClr val="tx2"/>
-                </a:solidFill>
-              </a:defRPr>
-            </a:lvl5pPr>
-            <a:lvl6pPr>
-              <a:defRPr>
-                <a:solidFill>
-                  <a:schemeClr val="tx2"/>
-                </a:solidFill>
-              </a:defRPr>
-            </a:lvl6pPr>
-            <a:lvl7pPr>
-              <a:defRPr>
-                <a:solidFill>
-                  <a:schemeClr val="tx2"/>
-                </a:solidFill>
-              </a:defRPr>
-            </a:lvl7pPr>
-            <a:lvl8pPr>
-              <a:defRPr>
-                <a:solidFill>
-                  <a:schemeClr val="tx2"/>
-                </a:solidFill>
-              </a:defRPr>
-            </a:lvl8pPr>
-            <a:lvl9pPr>
-              <a:defRPr>
-                <a:solidFill>
-                  <a:schemeClr val="tx2"/>
-                </a:solidFill>
-              </a:defRPr>
-            </a:lvl9pPr>
-          </a:lstStyle>
-          <a:p>
-            <a:pPr lvl="0"/>
-            <a:r>
-              <a:rPr lang="en-US" noProof="0"/>
-              <a:t>Click to edit Master text styles with Top Level Bullet</a:t>
-            </a:r>
-          </a:p>
-          <a:p>
-            <a:pPr lvl="1"/>
-            <a:r>
-              <a:rPr lang="en-US" noProof="0"/>
-              <a:t>Second level</a:t>
-            </a:r>
-          </a:p>
-          <a:p>
-            <a:pPr lvl="2"/>
-            <a:r>
-              <a:rPr lang="en-US" noProof="0"/>
-              <a:t>Third level</a:t>
-            </a:r>
-          </a:p>
-          <a:p>
-            <a:pPr lvl="3"/>
-            <a:r>
-              <a:rPr lang="en-US" noProof="0"/>
-              <a:t>Fourth level</a:t>
-            </a:r>
-          </a:p>
-          <a:p>
-            <a:pPr lvl="4"/>
-            <a:r>
-              <a:rPr lang="en-US" noProof="0"/>
-              <a:t>Fifth level</a:t>
-            </a:r>
-          </a:p>
-        </p:txBody>
-      </p:sp>
-    </p:spTree>
-    <p:extLst>
-      <p:ext uri="{BB962C8B-B14F-4D97-AF65-F5344CB8AC3E}">
-        <p14:creationId xmlns:p14="http://schemas.microsoft.com/office/powerpoint/2010/main" val="2777407011"/>
-      </p:ext>
-    </p:extLst>
-  </p:cSld>
-  <p:clrMapOvr>
-    <a:masterClrMapping/>
-  </p:clrMapOvr>
-  <mc:AlternateContent xmlns:mc="http://schemas.openxmlformats.org/markup-compatibility/2006" xmlns:p14="http://schemas.microsoft.com/office/powerpoint/2010/main">
-    <mc:Choice Requires="p14">
-      <p:transition spd="med" p14:dur="700">
-        <p:fade/>
-      </p:transition>
-    </mc:Choice>
-    <mc:Fallback xmlns="">
-      <p:transition spd="med">
-        <p:fade/>
-      </p:transition>
-    </mc:Fallback>
-  </mc:AlternateContent>
-</p:sldLayout>
-</file>
-
 <file path=ppt/slideLayouts/slideLayout3.xml><?xml version="1.0" encoding="utf-8"?>
 <p:sldLayout xmlns:a="http://schemas.openxmlformats.org/drawingml/2006/main" xmlns:r="http://schemas.openxmlformats.org/officeDocument/2006/relationships" xmlns:p="http://schemas.openxmlformats.org/presentationml/2006/main" preserve="1" userDrawn="1">
   <p:cSld name="1 Column Slide">
@@ -7475,7 +7127,7 @@
           <p:nvPr/>
         </p:nvPicPr>
         <p:blipFill>
-          <a:blip r:embed="rId23" cstate="print">
+          <a:blip r:embed="rId22" cstate="print">
             <a:extLst>
               <a:ext uri="{28A0092B-C50C-407E-A947-70E740481C1C}">
                 <a14:useLocalDpi xmlns:a14="http://schemas.microsoft.com/office/drawing/2010/main"/>
@@ -7895,7 +7547,6 @@
     <p:sldLayoutId id="2147483744" r:id="rId18"/>
     <p:sldLayoutId id="2147483745" r:id="rId19"/>
     <p:sldLayoutId id="2147483746" r:id="rId20"/>
-    <p:sldLayoutId id="2147483747" r:id="rId21"/>
   </p:sldLayoutIdLst>
   <p:hf sldNum="0" hdr="0" ftr="0" dt="0"/>
   <p:txStyles>
@@ -16301,5034 +15952,6 @@
       </p:grpSpPr>
       <p:sp>
         <p:nvSpPr>
-          <p:cNvPr id="176" name="Rectangle 175">
-            <a:extLst>
-              <a:ext uri="{FF2B5EF4-FFF2-40B4-BE49-F238E27FC236}">
-                <a16:creationId xmlns:a16="http://schemas.microsoft.com/office/drawing/2014/main" id="{18E8C895-6B13-4EE0-AD2A-7F5FEA84D24D}"/>
-              </a:ext>
-            </a:extLst>
-          </p:cNvPr>
-          <p:cNvSpPr/>
-          <p:nvPr/>
-        </p:nvSpPr>
-        <p:spPr>
-          <a:xfrm>
-            <a:off x="4867455" y="1172438"/>
-            <a:ext cx="4020541" cy="2919939"/>
-          </a:xfrm>
-          <a:prstGeom prst="rect">
-            <a:avLst/>
-          </a:prstGeom>
-          <a:solidFill>
-            <a:schemeClr val="bg2"/>
-          </a:solidFill>
-          <a:ln w="28575">
-            <a:solidFill>
-              <a:schemeClr val="accent1">
-                <a:lumMod val="50000"/>
-              </a:schemeClr>
-            </a:solidFill>
-          </a:ln>
-        </p:spPr>
-        <p:style>
-          <a:lnRef idx="2">
-            <a:schemeClr val="accent1">
-              <a:shade val="50000"/>
-            </a:schemeClr>
-          </a:lnRef>
-          <a:fillRef idx="1">
-            <a:schemeClr val="accent1"/>
-          </a:fillRef>
-          <a:effectRef idx="0">
-            <a:schemeClr val="accent1"/>
-          </a:effectRef>
-          <a:fontRef idx="minor">
-            <a:schemeClr val="lt1"/>
-          </a:fontRef>
-        </p:style>
-        <p:txBody>
-          <a:bodyPr rtlCol="0" anchor="t"/>
-          <a:lstStyle/>
-          <a:p>
-            <a:pPr algn="r"/>
-            <a:endParaRPr lang="en-GB" sz="1500" b="1">
-              <a:solidFill>
-                <a:srgbClr val="FF0000"/>
-              </a:solidFill>
-            </a:endParaRPr>
-          </a:p>
-        </p:txBody>
-      </p:sp>
-      <p:sp>
-        <p:nvSpPr>
-          <p:cNvPr id="6" name="Rectangle 5">
-            <a:extLst>
-              <a:ext uri="{FF2B5EF4-FFF2-40B4-BE49-F238E27FC236}">
-                <a16:creationId xmlns:a16="http://schemas.microsoft.com/office/drawing/2014/main" id="{EE51308B-625C-4465-A250-D4850BD13476}"/>
-              </a:ext>
-            </a:extLst>
-          </p:cNvPr>
-          <p:cNvSpPr/>
-          <p:nvPr/>
-        </p:nvSpPr>
-        <p:spPr>
-          <a:xfrm>
-            <a:off x="359569" y="1408127"/>
-            <a:ext cx="4020541" cy="2867477"/>
-          </a:xfrm>
-          <a:prstGeom prst="rect">
-            <a:avLst/>
-          </a:prstGeom>
-          <a:solidFill>
-            <a:schemeClr val="bg2"/>
-          </a:solidFill>
-          <a:ln w="28575">
-            <a:solidFill>
-              <a:schemeClr val="accent1">
-                <a:lumMod val="50000"/>
-              </a:schemeClr>
-            </a:solidFill>
-          </a:ln>
-        </p:spPr>
-        <p:style>
-          <a:lnRef idx="2">
-            <a:schemeClr val="accent1">
-              <a:shade val="50000"/>
-            </a:schemeClr>
-          </a:lnRef>
-          <a:fillRef idx="1">
-            <a:schemeClr val="accent1"/>
-          </a:fillRef>
-          <a:effectRef idx="0">
-            <a:schemeClr val="accent1"/>
-          </a:effectRef>
-          <a:fontRef idx="minor">
-            <a:schemeClr val="lt1"/>
-          </a:fontRef>
-        </p:style>
-        <p:txBody>
-          <a:bodyPr rtlCol="0" anchor="t"/>
-          <a:lstStyle/>
-          <a:p>
-            <a:pPr algn="r"/>
-            <a:endParaRPr lang="en-GB" sz="1500" b="1">
-              <a:solidFill>
-                <a:srgbClr val="FF0000"/>
-              </a:solidFill>
-            </a:endParaRPr>
-          </a:p>
-        </p:txBody>
-      </p:sp>
-      <p:sp>
-        <p:nvSpPr>
-          <p:cNvPr id="2" name="Title 1"/>
-          <p:cNvSpPr>
-            <a:spLocks noGrp="1"/>
-          </p:cNvSpPr>
-          <p:nvPr>
-            <p:ph type="title"/>
-          </p:nvPr>
-        </p:nvSpPr>
-        <p:spPr/>
-        <p:txBody>
-          <a:bodyPr/>
-          <a:lstStyle/>
-          <a:p>
-            <a:r>
-              <a:rPr lang="en-US"/>
-              <a:t>CMSIS-Zone – Configuration Steps - Example</a:t>
-            </a:r>
-          </a:p>
-        </p:txBody>
-      </p:sp>
-      <p:sp>
-        <p:nvSpPr>
-          <p:cNvPr id="13" name="Text Placeholder 12">
-            <a:extLst>
-              <a:ext uri="{FF2B5EF4-FFF2-40B4-BE49-F238E27FC236}">
-                <a16:creationId xmlns:a16="http://schemas.microsoft.com/office/drawing/2014/main" id="{80D082FD-0DCC-2942-B6F1-EB062EF57D52}"/>
-              </a:ext>
-            </a:extLst>
-          </p:cNvPr>
-          <p:cNvSpPr>
-            <a:spLocks noGrp="1"/>
-          </p:cNvSpPr>
-          <p:nvPr>
-            <p:ph idx="1"/>
-          </p:nvPr>
-        </p:nvSpPr>
-        <p:spPr>
-          <a:xfrm>
-            <a:off x="359569" y="794903"/>
-            <a:ext cx="8424863" cy="336803"/>
-          </a:xfrm>
-        </p:spPr>
-        <p:txBody>
-          <a:bodyPr vert="horz" lIns="0" tIns="0" rIns="0" bIns="0" rtlCol="0" anchor="t">
-            <a:noAutofit/>
-          </a:bodyPr>
-          <a:lstStyle/>
-          <a:p>
-            <a:r>
-              <a:rPr lang="en-GB" sz="1500">
-                <a:ea typeface="ＭＳ Ｐゴシック"/>
-              </a:rPr>
-              <a:t>Step 1: split the multi-processor system into single processor sub-systems</a:t>
-            </a:r>
-            <a:endParaRPr lang="en-US" sz="1500">
-              <a:ea typeface="ＭＳ Ｐゴシック"/>
-            </a:endParaRPr>
-          </a:p>
-        </p:txBody>
-      </p:sp>
-      <p:sp>
-        <p:nvSpPr>
-          <p:cNvPr id="37" name="Rectangle 36"/>
-          <p:cNvSpPr/>
-          <p:nvPr/>
-        </p:nvSpPr>
-        <p:spPr>
-          <a:xfrm rot="16200000">
-            <a:off x="1438141" y="1969334"/>
-            <a:ext cx="810000" cy="270000"/>
-          </a:xfrm>
-          <a:prstGeom prst="rect">
-            <a:avLst/>
-          </a:prstGeom>
-          <a:solidFill>
-            <a:schemeClr val="accent1"/>
-          </a:solidFill>
-          <a:ln w="19050" cmpd="sng">
-            <a:noFill/>
-          </a:ln>
-          <a:effectLst/>
-        </p:spPr>
-        <p:style>
-          <a:lnRef idx="1">
-            <a:schemeClr val="accent1"/>
-          </a:lnRef>
-          <a:fillRef idx="3">
-            <a:schemeClr val="accent1"/>
-          </a:fillRef>
-          <a:effectRef idx="2">
-            <a:schemeClr val="accent1"/>
-          </a:effectRef>
-          <a:fontRef idx="minor">
-            <a:schemeClr val="lt1"/>
-          </a:fontRef>
-        </p:style>
-        <p:txBody>
-          <a:bodyPr lIns="0" tIns="35100" rIns="0" bIns="35100" rtlCol="0" anchor="ctr"/>
-          <a:lstStyle/>
-          <a:p>
-            <a:pPr algn="ctr" defTabSz="685800" eaLnBrk="0" fontAlgn="base" hangingPunct="0">
-              <a:lnSpc>
-                <a:spcPct val="80000"/>
-              </a:lnSpc>
-              <a:spcBef>
-                <a:spcPct val="0"/>
-              </a:spcBef>
-              <a:spcAft>
-                <a:spcPct val="0"/>
-              </a:spcAft>
-              <a:defRPr/>
-            </a:pPr>
-            <a:r>
-              <a:rPr lang="en-US" sz="1350">
-                <a:solidFill>
-                  <a:prstClr val="white"/>
-                </a:solidFill>
-                <a:latin typeface="Calibri"/>
-                <a:cs typeface="Calibri"/>
-              </a:rPr>
-              <a:t>SAU</a:t>
-            </a:r>
-          </a:p>
-        </p:txBody>
-      </p:sp>
-      <p:sp>
-        <p:nvSpPr>
-          <p:cNvPr id="145" name="Rectangle 144">
-            <a:extLst>
-              <a:ext uri="{FF2B5EF4-FFF2-40B4-BE49-F238E27FC236}">
-                <a16:creationId xmlns:a16="http://schemas.microsoft.com/office/drawing/2014/main" id="{91AC5636-85B4-4D00-AE52-96AB351C2B52}"/>
-              </a:ext>
-            </a:extLst>
-          </p:cNvPr>
-          <p:cNvSpPr/>
-          <p:nvPr/>
-        </p:nvSpPr>
-        <p:spPr>
-          <a:xfrm>
-            <a:off x="525706" y="3527385"/>
-            <a:ext cx="567000" cy="652810"/>
-          </a:xfrm>
-          <a:prstGeom prst="rect">
-            <a:avLst/>
-          </a:prstGeom>
-          <a:solidFill>
-            <a:schemeClr val="accent1">
-              <a:lumMod val="50000"/>
-            </a:schemeClr>
-          </a:solidFill>
-          <a:ln>
-            <a:noFill/>
-          </a:ln>
-          <a:effectLst/>
-        </p:spPr>
-        <p:style>
-          <a:lnRef idx="1">
-            <a:schemeClr val="accent1"/>
-          </a:lnRef>
-          <a:fillRef idx="3">
-            <a:schemeClr val="accent1"/>
-          </a:fillRef>
-          <a:effectRef idx="2">
-            <a:schemeClr val="accent1"/>
-          </a:effectRef>
-          <a:fontRef idx="minor">
-            <a:schemeClr val="lt1"/>
-          </a:fontRef>
-        </p:style>
-        <p:txBody>
-          <a:bodyPr lIns="0" rIns="0" rtlCol="0" anchor="t"/>
-          <a:lstStyle/>
-          <a:p>
-            <a:pPr algn="ctr" defTabSz="685800" eaLnBrk="0" fontAlgn="base" hangingPunct="0">
-              <a:lnSpc>
-                <a:spcPct val="80000"/>
-              </a:lnSpc>
-              <a:spcBef>
-                <a:spcPct val="0"/>
-              </a:spcBef>
-              <a:spcAft>
-                <a:spcPct val="0"/>
-              </a:spcAft>
-              <a:defRPr/>
-            </a:pPr>
-            <a:r>
-              <a:rPr lang="en-US" sz="1350">
-                <a:solidFill>
-                  <a:srgbClr val="E5ECEB"/>
-                </a:solidFill>
-                <a:latin typeface="Calibri"/>
-                <a:cs typeface="Calibri"/>
-              </a:rPr>
-              <a:t>SRAM</a:t>
-            </a:r>
-          </a:p>
-        </p:txBody>
-      </p:sp>
-      <p:cxnSp>
-        <p:nvCxnSpPr>
-          <p:cNvPr id="217" name="Straight Connector 216">
-            <a:extLst>
-              <a:ext uri="{FF2B5EF4-FFF2-40B4-BE49-F238E27FC236}">
-                <a16:creationId xmlns:a16="http://schemas.microsoft.com/office/drawing/2014/main" id="{E5580189-F80C-4499-8769-DBF24B8313BA}"/>
-              </a:ext>
-            </a:extLst>
-          </p:cNvPr>
-          <p:cNvCxnSpPr>
-            <a:cxnSpLocks/>
-            <a:endCxn id="145" idx="0"/>
-          </p:cNvCxnSpPr>
-          <p:nvPr/>
-        </p:nvCxnSpPr>
-        <p:spPr>
-          <a:xfrm flipH="1">
-            <a:off x="809206" y="2752578"/>
-            <a:ext cx="0" cy="774808"/>
-          </a:xfrm>
-          <a:prstGeom prst="line">
-            <a:avLst/>
-          </a:prstGeom>
-          <a:ln w="28575">
-            <a:solidFill>
-              <a:schemeClr val="accent6">
-                <a:lumMod val="75000"/>
-              </a:schemeClr>
-            </a:solidFill>
-            <a:headEnd type="none" w="med" len="med"/>
-            <a:tailEnd type="none" w="med" len="med"/>
-          </a:ln>
-          <a:effectLst/>
-        </p:spPr>
-        <p:style>
-          <a:lnRef idx="2">
-            <a:schemeClr val="accent1"/>
-          </a:lnRef>
-          <a:fillRef idx="0">
-            <a:schemeClr val="accent1"/>
-          </a:fillRef>
-          <a:effectRef idx="1">
-            <a:schemeClr val="accent1"/>
-          </a:effectRef>
-          <a:fontRef idx="minor">
-            <a:schemeClr val="tx1"/>
-          </a:fontRef>
-        </p:style>
-      </p:cxnSp>
-      <p:sp>
-        <p:nvSpPr>
-          <p:cNvPr id="88" name="Rectangle 87">
-            <a:extLst>
-              <a:ext uri="{FF2B5EF4-FFF2-40B4-BE49-F238E27FC236}">
-                <a16:creationId xmlns:a16="http://schemas.microsoft.com/office/drawing/2014/main" id="{4A020117-0912-4CF4-8B9B-58A957C17EDD}"/>
-              </a:ext>
-            </a:extLst>
-          </p:cNvPr>
-          <p:cNvSpPr/>
-          <p:nvPr/>
-        </p:nvSpPr>
-        <p:spPr>
-          <a:xfrm>
-            <a:off x="525706" y="3013382"/>
-            <a:ext cx="567000" cy="270000"/>
-          </a:xfrm>
-          <a:prstGeom prst="rect">
-            <a:avLst/>
-          </a:prstGeom>
-          <a:solidFill>
-            <a:schemeClr val="accent1"/>
-          </a:solidFill>
-          <a:ln w="19050" cmpd="sng">
-            <a:noFill/>
-          </a:ln>
-          <a:effectLst/>
-        </p:spPr>
-        <p:style>
-          <a:lnRef idx="1">
-            <a:schemeClr val="accent1"/>
-          </a:lnRef>
-          <a:fillRef idx="3">
-            <a:schemeClr val="accent1"/>
-          </a:fillRef>
-          <a:effectRef idx="2">
-            <a:schemeClr val="accent1"/>
-          </a:effectRef>
-          <a:fontRef idx="minor">
-            <a:schemeClr val="lt1"/>
-          </a:fontRef>
-        </p:style>
-        <p:txBody>
-          <a:bodyPr wrap="none" lIns="0" tIns="35100" rIns="0" rtlCol="0" anchor="ctr"/>
-          <a:lstStyle/>
-          <a:p>
-            <a:pPr algn="ctr" defTabSz="685800" eaLnBrk="0" fontAlgn="base" hangingPunct="0">
-              <a:lnSpc>
-                <a:spcPct val="80000"/>
-              </a:lnSpc>
-              <a:spcBef>
-                <a:spcPct val="0"/>
-              </a:spcBef>
-              <a:spcAft>
-                <a:spcPct val="0"/>
-              </a:spcAft>
-              <a:defRPr/>
-            </a:pPr>
-            <a:r>
-              <a:rPr lang="en-US" sz="1350">
-                <a:solidFill>
-                  <a:prstClr val="white"/>
-                </a:solidFill>
-                <a:latin typeface="Calibri"/>
-                <a:cs typeface="Calibri"/>
-              </a:rPr>
-              <a:t>MPC</a:t>
-            </a:r>
-            <a:endParaRPr lang="en-US" sz="825">
-              <a:solidFill>
-                <a:prstClr val="white"/>
-              </a:solidFill>
-              <a:latin typeface="Calibri"/>
-              <a:cs typeface="Calibri"/>
-            </a:endParaRPr>
-          </a:p>
-        </p:txBody>
-      </p:sp>
-      <p:cxnSp>
-        <p:nvCxnSpPr>
-          <p:cNvPr id="102" name="Straight Connector 101">
-            <a:extLst>
-              <a:ext uri="{FF2B5EF4-FFF2-40B4-BE49-F238E27FC236}">
-                <a16:creationId xmlns:a16="http://schemas.microsoft.com/office/drawing/2014/main" id="{6F0B4EA7-BB13-4A48-A5F1-0D18B2F8AB70}"/>
-              </a:ext>
-            </a:extLst>
-          </p:cNvPr>
-          <p:cNvCxnSpPr>
-            <a:cxnSpLocks/>
-          </p:cNvCxnSpPr>
-          <p:nvPr/>
-        </p:nvCxnSpPr>
-        <p:spPr>
-          <a:xfrm flipV="1">
-            <a:off x="1051777" y="2307057"/>
-            <a:ext cx="0" cy="472097"/>
-          </a:xfrm>
-          <a:prstGeom prst="line">
-            <a:avLst/>
-          </a:prstGeom>
-          <a:ln w="28575">
-            <a:solidFill>
-              <a:schemeClr val="accent6">
-                <a:lumMod val="75000"/>
-              </a:schemeClr>
-            </a:solidFill>
-            <a:headEnd type="none" w="med" len="med"/>
-            <a:tailEnd type="none" w="med" len="med"/>
-          </a:ln>
-          <a:effectLst/>
-        </p:spPr>
-        <p:style>
-          <a:lnRef idx="2">
-            <a:schemeClr val="accent1"/>
-          </a:lnRef>
-          <a:fillRef idx="0">
-            <a:schemeClr val="accent1"/>
-          </a:fillRef>
-          <a:effectRef idx="1">
-            <a:schemeClr val="accent1"/>
-          </a:effectRef>
-          <a:fontRef idx="minor">
-            <a:schemeClr val="tx1"/>
-          </a:fontRef>
-        </p:style>
-      </p:cxnSp>
-      <p:cxnSp>
-        <p:nvCxnSpPr>
-          <p:cNvPr id="103" name="Straight Connector 102">
-            <a:extLst>
-              <a:ext uri="{FF2B5EF4-FFF2-40B4-BE49-F238E27FC236}">
-                <a16:creationId xmlns:a16="http://schemas.microsoft.com/office/drawing/2014/main" id="{CFD8E10B-5F4D-4565-AF58-0D25F0317773}"/>
-              </a:ext>
-            </a:extLst>
-          </p:cNvPr>
-          <p:cNvCxnSpPr>
-            <a:cxnSpLocks/>
-            <a:stCxn id="37" idx="0"/>
-            <a:endCxn id="49" idx="3"/>
-          </p:cNvCxnSpPr>
-          <p:nvPr/>
-        </p:nvCxnSpPr>
-        <p:spPr>
-          <a:xfrm flipH="1">
-            <a:off x="1569143" y="2104334"/>
-            <a:ext cx="138998" cy="0"/>
-          </a:xfrm>
-          <a:prstGeom prst="line">
-            <a:avLst/>
-          </a:prstGeom>
-          <a:ln w="28575">
-            <a:solidFill>
-              <a:schemeClr val="accent6">
-                <a:lumMod val="75000"/>
-              </a:schemeClr>
-            </a:solidFill>
-            <a:headEnd type="none" w="med" len="med"/>
-            <a:tailEnd type="none" w="med" len="med"/>
-          </a:ln>
-          <a:effectLst/>
-        </p:spPr>
-        <p:style>
-          <a:lnRef idx="2">
-            <a:schemeClr val="accent1"/>
-          </a:lnRef>
-          <a:fillRef idx="0">
-            <a:schemeClr val="accent1"/>
-          </a:fillRef>
-          <a:effectRef idx="1">
-            <a:schemeClr val="accent1"/>
-          </a:effectRef>
-          <a:fontRef idx="minor">
-            <a:schemeClr val="tx1"/>
-          </a:fontRef>
-        </p:style>
-      </p:cxnSp>
-      <p:sp>
-        <p:nvSpPr>
-          <p:cNvPr id="49" name="Rectangle 48">
-            <a:extLst>
-              <a:ext uri="{FF2B5EF4-FFF2-40B4-BE49-F238E27FC236}">
-                <a16:creationId xmlns:a16="http://schemas.microsoft.com/office/drawing/2014/main" id="{E4742213-CC9F-4CBE-B508-43AE798D4DE3}"/>
-              </a:ext>
-            </a:extLst>
-          </p:cNvPr>
-          <p:cNvSpPr/>
-          <p:nvPr/>
-        </p:nvSpPr>
-        <p:spPr>
-          <a:xfrm>
-            <a:off x="525706" y="1699334"/>
-            <a:ext cx="1043438" cy="810000"/>
-          </a:xfrm>
-          <a:prstGeom prst="rect">
-            <a:avLst/>
-          </a:prstGeom>
-          <a:solidFill>
-            <a:schemeClr val="accent1">
-              <a:lumMod val="50000"/>
-            </a:schemeClr>
-          </a:solidFill>
-          <a:ln>
-            <a:noFill/>
-          </a:ln>
-          <a:effectLst/>
-        </p:spPr>
-        <p:style>
-          <a:lnRef idx="1">
-            <a:schemeClr val="accent1"/>
-          </a:lnRef>
-          <a:fillRef idx="3">
-            <a:schemeClr val="accent1"/>
-          </a:fillRef>
-          <a:effectRef idx="2">
-            <a:schemeClr val="accent1"/>
-          </a:effectRef>
-          <a:fontRef idx="minor">
-            <a:schemeClr val="lt1"/>
-          </a:fontRef>
-        </p:style>
-        <p:txBody>
-          <a:bodyPr lIns="0" tIns="35100" rIns="0" rtlCol="0" anchor="ctr"/>
-          <a:lstStyle/>
-          <a:p>
-            <a:pPr algn="ctr" defTabSz="685800" eaLnBrk="0" fontAlgn="base" hangingPunct="0">
-              <a:spcBef>
-                <a:spcPct val="0"/>
-              </a:spcBef>
-              <a:spcAft>
-                <a:spcPct val="0"/>
-              </a:spcAft>
-              <a:defRPr/>
-            </a:pPr>
-            <a:r>
-              <a:rPr lang="en-US" sz="1350">
-                <a:solidFill>
-                  <a:prstClr val="white"/>
-                </a:solidFill>
-                <a:latin typeface="Calibri"/>
-                <a:cs typeface="Calibri"/>
-              </a:rPr>
-              <a:t>Cortex-M33</a:t>
-            </a:r>
-            <a:br>
-              <a:rPr lang="en-US" sz="1350">
-                <a:solidFill>
-                  <a:prstClr val="white"/>
-                </a:solidFill>
-                <a:latin typeface="Calibri"/>
-                <a:cs typeface="Calibri"/>
-              </a:rPr>
-            </a:br>
-            <a:r>
-              <a:rPr lang="en-US" sz="825">
-                <a:solidFill>
-                  <a:prstClr val="white"/>
-                </a:solidFill>
-                <a:latin typeface="Calibri"/>
-                <a:cs typeface="Calibri"/>
-              </a:rPr>
-              <a:t>with </a:t>
-            </a:r>
-            <a:r>
-              <a:rPr lang="en-US" sz="825" err="1">
-                <a:solidFill>
-                  <a:prstClr val="white"/>
-                </a:solidFill>
-                <a:latin typeface="Calibri"/>
-                <a:cs typeface="Calibri"/>
-              </a:rPr>
-              <a:t>TrustZone</a:t>
-            </a:r>
-            <a:endParaRPr lang="en-US" sz="1350">
-              <a:solidFill>
-                <a:prstClr val="white"/>
-              </a:solidFill>
-              <a:latin typeface="Calibri"/>
-              <a:cs typeface="Calibri"/>
-            </a:endParaRPr>
-          </a:p>
-        </p:txBody>
-      </p:sp>
-      <p:cxnSp>
-        <p:nvCxnSpPr>
-          <p:cNvPr id="54" name="Straight Connector 53">
-            <a:extLst>
-              <a:ext uri="{FF2B5EF4-FFF2-40B4-BE49-F238E27FC236}">
-                <a16:creationId xmlns:a16="http://schemas.microsoft.com/office/drawing/2014/main" id="{E78F3B8A-FA30-4E01-8875-1BF910243BF9}"/>
-              </a:ext>
-            </a:extLst>
-          </p:cNvPr>
-          <p:cNvCxnSpPr>
-            <a:cxnSpLocks/>
-            <a:endCxn id="157" idx="0"/>
-          </p:cNvCxnSpPr>
-          <p:nvPr/>
-        </p:nvCxnSpPr>
-        <p:spPr>
-          <a:xfrm>
-            <a:off x="1441688" y="2834358"/>
-            <a:ext cx="0" cy="697838"/>
-          </a:xfrm>
-          <a:prstGeom prst="line">
-            <a:avLst/>
-          </a:prstGeom>
-          <a:ln w="28575">
-            <a:solidFill>
-              <a:schemeClr val="accent6">
-                <a:lumMod val="75000"/>
-              </a:schemeClr>
-            </a:solidFill>
-            <a:headEnd type="none" w="med" len="med"/>
-            <a:tailEnd type="none" w="med" len="med"/>
-          </a:ln>
-          <a:effectLst/>
-        </p:spPr>
-        <p:style>
-          <a:lnRef idx="2">
-            <a:schemeClr val="accent1"/>
-          </a:lnRef>
-          <a:fillRef idx="0">
-            <a:schemeClr val="accent1"/>
-          </a:fillRef>
-          <a:effectRef idx="1">
-            <a:schemeClr val="accent1"/>
-          </a:effectRef>
-          <a:fontRef idx="minor">
-            <a:schemeClr val="tx1"/>
-          </a:fontRef>
-        </p:style>
-      </p:cxnSp>
-      <p:sp>
-        <p:nvSpPr>
-          <p:cNvPr id="157" name="Rectangle 156">
-            <a:extLst>
-              <a:ext uri="{FF2B5EF4-FFF2-40B4-BE49-F238E27FC236}">
-                <a16:creationId xmlns:a16="http://schemas.microsoft.com/office/drawing/2014/main" id="{58D6632A-56DA-4B2B-8850-AE8976D10A5A}"/>
-              </a:ext>
-            </a:extLst>
-          </p:cNvPr>
-          <p:cNvSpPr/>
-          <p:nvPr/>
-        </p:nvSpPr>
-        <p:spPr>
-          <a:xfrm>
-            <a:off x="1158188" y="3532196"/>
-            <a:ext cx="567000" cy="648000"/>
-          </a:xfrm>
-          <a:prstGeom prst="rect">
-            <a:avLst/>
-          </a:prstGeom>
-          <a:solidFill>
-            <a:schemeClr val="accent1">
-              <a:lumMod val="50000"/>
-            </a:schemeClr>
-          </a:solidFill>
-          <a:ln>
-            <a:noFill/>
-          </a:ln>
-          <a:effectLst/>
-        </p:spPr>
-        <p:style>
-          <a:lnRef idx="1">
-            <a:schemeClr val="accent1"/>
-          </a:lnRef>
-          <a:fillRef idx="3">
-            <a:schemeClr val="accent1"/>
-          </a:fillRef>
-          <a:effectRef idx="2">
-            <a:schemeClr val="accent1"/>
-          </a:effectRef>
-          <a:fontRef idx="minor">
-            <a:schemeClr val="lt1"/>
-          </a:fontRef>
-        </p:style>
-        <p:txBody>
-          <a:bodyPr lIns="0" rIns="0" rtlCol="0" anchor="t"/>
-          <a:lstStyle/>
-          <a:p>
-            <a:pPr algn="ctr" defTabSz="685800" eaLnBrk="0" fontAlgn="base" hangingPunct="0">
-              <a:lnSpc>
-                <a:spcPct val="80000"/>
-              </a:lnSpc>
-              <a:spcBef>
-                <a:spcPct val="0"/>
-              </a:spcBef>
-              <a:spcAft>
-                <a:spcPct val="0"/>
-              </a:spcAft>
-              <a:defRPr/>
-            </a:pPr>
-            <a:r>
-              <a:rPr lang="en-US" sz="1350">
-                <a:solidFill>
-                  <a:srgbClr val="E5ECEB"/>
-                </a:solidFill>
-                <a:latin typeface="Calibri"/>
-                <a:cs typeface="Calibri"/>
-              </a:rPr>
-              <a:t>Flash</a:t>
-            </a:r>
-          </a:p>
-        </p:txBody>
-      </p:sp>
-      <p:sp>
-        <p:nvSpPr>
-          <p:cNvPr id="89" name="Rectangle 88">
-            <a:extLst>
-              <a:ext uri="{FF2B5EF4-FFF2-40B4-BE49-F238E27FC236}">
-                <a16:creationId xmlns:a16="http://schemas.microsoft.com/office/drawing/2014/main" id="{FD73DAFF-0CCA-4A68-A5C6-0165452B3C2F}"/>
-              </a:ext>
-            </a:extLst>
-          </p:cNvPr>
-          <p:cNvSpPr/>
-          <p:nvPr/>
-        </p:nvSpPr>
-        <p:spPr>
-          <a:xfrm>
-            <a:off x="1158188" y="3013382"/>
-            <a:ext cx="567000" cy="270000"/>
-          </a:xfrm>
-          <a:prstGeom prst="rect">
-            <a:avLst/>
-          </a:prstGeom>
-          <a:solidFill>
-            <a:schemeClr val="accent1"/>
-          </a:solidFill>
-          <a:ln w="19050" cmpd="sng">
-            <a:noFill/>
-          </a:ln>
-          <a:effectLst/>
-        </p:spPr>
-        <p:style>
-          <a:lnRef idx="1">
-            <a:schemeClr val="accent1"/>
-          </a:lnRef>
-          <a:fillRef idx="3">
-            <a:schemeClr val="accent1"/>
-          </a:fillRef>
-          <a:effectRef idx="2">
-            <a:schemeClr val="accent1"/>
-          </a:effectRef>
-          <a:fontRef idx="minor">
-            <a:schemeClr val="lt1"/>
-          </a:fontRef>
-        </p:style>
-        <p:txBody>
-          <a:bodyPr wrap="none" lIns="0" tIns="35100" rIns="0" rtlCol="0" anchor="ctr"/>
-          <a:lstStyle/>
-          <a:p>
-            <a:pPr lvl="0" algn="ctr">
-              <a:lnSpc>
-                <a:spcPct val="80000"/>
-              </a:lnSpc>
-              <a:defRPr/>
-            </a:pPr>
-            <a:r>
-              <a:rPr lang="en-US" sz="1350">
-                <a:solidFill>
-                  <a:prstClr val="white"/>
-                </a:solidFill>
-                <a:cs typeface="Calibri"/>
-              </a:rPr>
-              <a:t>MPC</a:t>
-            </a:r>
-            <a:endParaRPr lang="en-US" sz="825">
-              <a:solidFill>
-                <a:prstClr val="white"/>
-              </a:solidFill>
-              <a:cs typeface="Calibri"/>
-            </a:endParaRPr>
-          </a:p>
-        </p:txBody>
-      </p:sp>
-      <p:cxnSp>
-        <p:nvCxnSpPr>
-          <p:cNvPr id="59" name="Straight Connector 58">
-            <a:extLst>
-              <a:ext uri="{FF2B5EF4-FFF2-40B4-BE49-F238E27FC236}">
-                <a16:creationId xmlns:a16="http://schemas.microsoft.com/office/drawing/2014/main" id="{E409B209-4870-4773-BEC5-87A8B7DAF816}"/>
-              </a:ext>
-            </a:extLst>
-          </p:cNvPr>
-          <p:cNvCxnSpPr>
-            <a:cxnSpLocks/>
-            <a:endCxn id="71" idx="3"/>
-          </p:cNvCxnSpPr>
-          <p:nvPr/>
-        </p:nvCxnSpPr>
-        <p:spPr>
-          <a:xfrm flipV="1">
-            <a:off x="3872001" y="2514144"/>
-            <a:ext cx="0" cy="265010"/>
-          </a:xfrm>
-          <a:prstGeom prst="line">
-            <a:avLst/>
-          </a:prstGeom>
-          <a:ln w="28575">
-            <a:solidFill>
-              <a:schemeClr val="accent6">
-                <a:lumMod val="75000"/>
-              </a:schemeClr>
-            </a:solidFill>
-            <a:headEnd type="none" w="med" len="med"/>
-            <a:tailEnd type="none" w="med" len="med"/>
-          </a:ln>
-          <a:effectLst/>
-        </p:spPr>
-        <p:style>
-          <a:lnRef idx="2">
-            <a:schemeClr val="accent1"/>
-          </a:lnRef>
-          <a:fillRef idx="0">
-            <a:schemeClr val="accent1"/>
-          </a:fillRef>
-          <a:effectRef idx="1">
-            <a:schemeClr val="accent1"/>
-          </a:effectRef>
-          <a:fontRef idx="minor">
-            <a:schemeClr val="tx1"/>
-          </a:fontRef>
-        </p:style>
-      </p:cxnSp>
-      <p:sp>
-        <p:nvSpPr>
-          <p:cNvPr id="71" name="Rectangle 70">
-            <a:extLst>
-              <a:ext uri="{FF2B5EF4-FFF2-40B4-BE49-F238E27FC236}">
-                <a16:creationId xmlns:a16="http://schemas.microsoft.com/office/drawing/2014/main" id="{69595332-5518-4EB7-9668-57846266BB2F}"/>
-              </a:ext>
-            </a:extLst>
-          </p:cNvPr>
-          <p:cNvSpPr/>
-          <p:nvPr/>
-        </p:nvSpPr>
-        <p:spPr>
-          <a:xfrm rot="5400000">
-            <a:off x="3737091" y="2067153"/>
-            <a:ext cx="269820" cy="624161"/>
-          </a:xfrm>
-          <a:prstGeom prst="rect">
-            <a:avLst/>
-          </a:prstGeom>
-          <a:solidFill>
-            <a:schemeClr val="accent1">
-              <a:lumMod val="50000"/>
-            </a:schemeClr>
-          </a:solidFill>
-          <a:ln>
-            <a:noFill/>
-          </a:ln>
-        </p:spPr>
-        <p:style>
-          <a:lnRef idx="2">
-            <a:schemeClr val="accent5">
-              <a:shade val="50000"/>
-            </a:schemeClr>
-          </a:lnRef>
-          <a:fillRef idx="1">
-            <a:schemeClr val="accent5"/>
-          </a:fillRef>
-          <a:effectRef idx="0">
-            <a:schemeClr val="accent5"/>
-          </a:effectRef>
-          <a:fontRef idx="minor">
-            <a:schemeClr val="lt1"/>
-          </a:fontRef>
-        </p:style>
-        <p:txBody>
-          <a:bodyPr vert="vert270" rtlCol="0" anchor="ctr"/>
-          <a:lstStyle/>
-          <a:p>
-            <a:pPr algn="ctr" defTabSz="685800" eaLnBrk="0" fontAlgn="base" hangingPunct="0">
-              <a:spcBef>
-                <a:spcPct val="0"/>
-              </a:spcBef>
-              <a:spcAft>
-                <a:spcPct val="0"/>
-              </a:spcAft>
-              <a:defRPr/>
-            </a:pPr>
-            <a:r>
-              <a:rPr lang="en-US" sz="1350">
-                <a:solidFill>
-                  <a:srgbClr val="E5ECEB"/>
-                </a:solidFill>
-                <a:latin typeface="Calibri"/>
-              </a:rPr>
-              <a:t>DMA</a:t>
-            </a:r>
-          </a:p>
-        </p:txBody>
-      </p:sp>
-      <p:cxnSp>
-        <p:nvCxnSpPr>
-          <p:cNvPr id="86" name="Straight Connector 85">
-            <a:extLst>
-              <a:ext uri="{FF2B5EF4-FFF2-40B4-BE49-F238E27FC236}">
-                <a16:creationId xmlns:a16="http://schemas.microsoft.com/office/drawing/2014/main" id="{817637A0-14C8-4158-9422-402475F80B37}"/>
-              </a:ext>
-            </a:extLst>
-          </p:cNvPr>
-          <p:cNvCxnSpPr>
-            <a:cxnSpLocks/>
-            <a:endCxn id="87" idx="2"/>
-          </p:cNvCxnSpPr>
-          <p:nvPr/>
-        </p:nvCxnSpPr>
-        <p:spPr>
-          <a:xfrm flipV="1">
-            <a:off x="2781198" y="2509334"/>
-            <a:ext cx="1" cy="269820"/>
-          </a:xfrm>
-          <a:prstGeom prst="line">
-            <a:avLst/>
-          </a:prstGeom>
-          <a:ln w="28575">
-            <a:solidFill>
-              <a:schemeClr val="accent6">
-                <a:lumMod val="75000"/>
-              </a:schemeClr>
-            </a:solidFill>
-            <a:headEnd type="none" w="med" len="med"/>
-            <a:tailEnd type="none" w="med" len="med"/>
-          </a:ln>
-          <a:effectLst/>
-        </p:spPr>
-        <p:style>
-          <a:lnRef idx="2">
-            <a:schemeClr val="accent1"/>
-          </a:lnRef>
-          <a:fillRef idx="0">
-            <a:schemeClr val="accent1"/>
-          </a:fillRef>
-          <a:effectRef idx="1">
-            <a:schemeClr val="accent1"/>
-          </a:effectRef>
-          <a:fontRef idx="minor">
-            <a:schemeClr val="tx1"/>
-          </a:fontRef>
-        </p:style>
-      </p:cxnSp>
-      <p:sp>
-        <p:nvSpPr>
-          <p:cNvPr id="87" name="Rectangle 86">
-            <a:extLst>
-              <a:ext uri="{FF2B5EF4-FFF2-40B4-BE49-F238E27FC236}">
-                <a16:creationId xmlns:a16="http://schemas.microsoft.com/office/drawing/2014/main" id="{86A0FC92-1CBD-4C39-9888-18EFE5683F43}"/>
-              </a:ext>
-            </a:extLst>
-          </p:cNvPr>
-          <p:cNvSpPr/>
-          <p:nvPr/>
-        </p:nvSpPr>
-        <p:spPr>
-          <a:xfrm>
-            <a:off x="2247699" y="1699334"/>
-            <a:ext cx="1066999" cy="810000"/>
-          </a:xfrm>
-          <a:prstGeom prst="rect">
-            <a:avLst/>
-          </a:prstGeom>
-          <a:solidFill>
-            <a:schemeClr val="accent1">
-              <a:lumMod val="50000"/>
-            </a:schemeClr>
-          </a:solidFill>
-          <a:ln>
-            <a:noFill/>
-          </a:ln>
-          <a:effectLst/>
-        </p:spPr>
-        <p:style>
-          <a:lnRef idx="1">
-            <a:schemeClr val="accent1"/>
-          </a:lnRef>
-          <a:fillRef idx="3">
-            <a:schemeClr val="accent1"/>
-          </a:fillRef>
-          <a:effectRef idx="2">
-            <a:schemeClr val="accent1"/>
-          </a:effectRef>
-          <a:fontRef idx="minor">
-            <a:schemeClr val="lt1"/>
-          </a:fontRef>
-        </p:style>
-        <p:txBody>
-          <a:bodyPr lIns="0" tIns="35100" rIns="0" rtlCol="0" anchor="ctr"/>
-          <a:lstStyle/>
-          <a:p>
-            <a:pPr algn="ctr" defTabSz="685800" eaLnBrk="0" fontAlgn="base" hangingPunct="0">
-              <a:spcBef>
-                <a:spcPct val="0"/>
-              </a:spcBef>
-              <a:spcAft>
-                <a:spcPct val="0"/>
-              </a:spcAft>
-              <a:defRPr/>
-            </a:pPr>
-            <a:r>
-              <a:rPr lang="en-US" sz="1350">
-                <a:solidFill>
-                  <a:prstClr val="white"/>
-                </a:solidFill>
-                <a:latin typeface="Calibri"/>
-                <a:cs typeface="Calibri"/>
-              </a:rPr>
-              <a:t>Cortex-M33</a:t>
-            </a:r>
-          </a:p>
-        </p:txBody>
-      </p:sp>
-      <p:cxnSp>
-        <p:nvCxnSpPr>
-          <p:cNvPr id="116" name="Straight Connector 115">
-            <a:extLst>
-              <a:ext uri="{FF2B5EF4-FFF2-40B4-BE49-F238E27FC236}">
-                <a16:creationId xmlns:a16="http://schemas.microsoft.com/office/drawing/2014/main" id="{F3C50130-2B40-40F4-9A50-EA7E93352924}"/>
-              </a:ext>
-            </a:extLst>
-          </p:cNvPr>
-          <p:cNvCxnSpPr>
-            <a:cxnSpLocks/>
-          </p:cNvCxnSpPr>
-          <p:nvPr/>
-        </p:nvCxnSpPr>
-        <p:spPr>
-          <a:xfrm flipH="1">
-            <a:off x="1892696" y="3402780"/>
-            <a:ext cx="0" cy="135000"/>
-          </a:xfrm>
-          <a:prstGeom prst="line">
-            <a:avLst/>
-          </a:prstGeom>
-          <a:ln w="28575">
-            <a:solidFill>
-              <a:schemeClr val="accent6">
-                <a:lumMod val="75000"/>
-              </a:schemeClr>
-            </a:solidFill>
-            <a:headEnd type="none" w="med" len="med"/>
-            <a:tailEnd type="none" w="med" len="med"/>
-          </a:ln>
-          <a:effectLst/>
-        </p:spPr>
-        <p:style>
-          <a:lnRef idx="2">
-            <a:schemeClr val="accent1"/>
-          </a:lnRef>
-          <a:fillRef idx="0">
-            <a:schemeClr val="accent1"/>
-          </a:fillRef>
-          <a:effectRef idx="1">
-            <a:schemeClr val="accent1"/>
-          </a:effectRef>
-          <a:fontRef idx="minor">
-            <a:schemeClr val="tx1"/>
-          </a:fontRef>
-        </p:style>
-      </p:cxnSp>
-      <p:cxnSp>
-        <p:nvCxnSpPr>
-          <p:cNvPr id="117" name="Straight Connector 116">
-            <a:extLst>
-              <a:ext uri="{FF2B5EF4-FFF2-40B4-BE49-F238E27FC236}">
-                <a16:creationId xmlns:a16="http://schemas.microsoft.com/office/drawing/2014/main" id="{DD53B0A0-2CC9-40BC-AACF-5607FEFF7A41}"/>
-              </a:ext>
-            </a:extLst>
-          </p:cNvPr>
-          <p:cNvCxnSpPr>
-            <a:cxnSpLocks/>
-          </p:cNvCxnSpPr>
-          <p:nvPr/>
-        </p:nvCxnSpPr>
-        <p:spPr>
-          <a:xfrm flipH="1">
-            <a:off x="2121588" y="3401195"/>
-            <a:ext cx="0" cy="135000"/>
-          </a:xfrm>
-          <a:prstGeom prst="line">
-            <a:avLst/>
-          </a:prstGeom>
-          <a:ln w="28575">
-            <a:solidFill>
-              <a:schemeClr val="accent6">
-                <a:lumMod val="75000"/>
-              </a:schemeClr>
-            </a:solidFill>
-            <a:headEnd type="none" w="med" len="med"/>
-            <a:tailEnd type="none" w="med" len="med"/>
-          </a:ln>
-          <a:effectLst/>
-        </p:spPr>
-        <p:style>
-          <a:lnRef idx="2">
-            <a:schemeClr val="accent1"/>
-          </a:lnRef>
-          <a:fillRef idx="0">
-            <a:schemeClr val="accent1"/>
-          </a:fillRef>
-          <a:effectRef idx="1">
-            <a:schemeClr val="accent1"/>
-          </a:effectRef>
-          <a:fontRef idx="minor">
-            <a:schemeClr val="tx1"/>
-          </a:fontRef>
-        </p:style>
-      </p:cxnSp>
-      <p:cxnSp>
-        <p:nvCxnSpPr>
-          <p:cNvPr id="118" name="Straight Connector 117">
-            <a:extLst>
-              <a:ext uri="{FF2B5EF4-FFF2-40B4-BE49-F238E27FC236}">
-                <a16:creationId xmlns:a16="http://schemas.microsoft.com/office/drawing/2014/main" id="{B63AB66D-ECA1-4CD3-95F0-15AA513BE1DD}"/>
-              </a:ext>
-            </a:extLst>
-          </p:cNvPr>
-          <p:cNvCxnSpPr>
-            <a:cxnSpLocks/>
-          </p:cNvCxnSpPr>
-          <p:nvPr/>
-        </p:nvCxnSpPr>
-        <p:spPr>
-          <a:xfrm flipH="1">
-            <a:off x="2338624" y="3401195"/>
-            <a:ext cx="0" cy="135000"/>
-          </a:xfrm>
-          <a:prstGeom prst="line">
-            <a:avLst/>
-          </a:prstGeom>
-          <a:ln w="28575">
-            <a:solidFill>
-              <a:schemeClr val="accent6">
-                <a:lumMod val="75000"/>
-              </a:schemeClr>
-            </a:solidFill>
-            <a:headEnd type="none" w="med" len="med"/>
-            <a:tailEnd type="none" w="med" len="med"/>
-          </a:ln>
-          <a:effectLst/>
-        </p:spPr>
-        <p:style>
-          <a:lnRef idx="2">
-            <a:schemeClr val="accent1"/>
-          </a:lnRef>
-          <a:fillRef idx="0">
-            <a:schemeClr val="accent1"/>
-          </a:fillRef>
-          <a:effectRef idx="1">
-            <a:schemeClr val="accent1"/>
-          </a:effectRef>
-          <a:fontRef idx="minor">
-            <a:schemeClr val="tx1"/>
-          </a:fontRef>
-        </p:style>
-      </p:cxnSp>
-      <p:cxnSp>
-        <p:nvCxnSpPr>
-          <p:cNvPr id="119" name="Straight Connector 118">
-            <a:extLst>
-              <a:ext uri="{FF2B5EF4-FFF2-40B4-BE49-F238E27FC236}">
-                <a16:creationId xmlns:a16="http://schemas.microsoft.com/office/drawing/2014/main" id="{B261D5D3-7764-4F12-848E-82062C6E793B}"/>
-              </a:ext>
-            </a:extLst>
-          </p:cNvPr>
-          <p:cNvCxnSpPr>
-            <a:cxnSpLocks/>
-          </p:cNvCxnSpPr>
-          <p:nvPr/>
-        </p:nvCxnSpPr>
-        <p:spPr>
-          <a:xfrm flipH="1">
-            <a:off x="2580020" y="3401195"/>
-            <a:ext cx="0" cy="135000"/>
-          </a:xfrm>
-          <a:prstGeom prst="line">
-            <a:avLst/>
-          </a:prstGeom>
-          <a:ln w="28575">
-            <a:solidFill>
-              <a:schemeClr val="accent6">
-                <a:lumMod val="75000"/>
-              </a:schemeClr>
-            </a:solidFill>
-            <a:headEnd type="none" w="med" len="med"/>
-            <a:tailEnd type="none" w="med" len="med"/>
-          </a:ln>
-          <a:effectLst/>
-        </p:spPr>
-        <p:style>
-          <a:lnRef idx="2">
-            <a:schemeClr val="accent1"/>
-          </a:lnRef>
-          <a:fillRef idx="0">
-            <a:schemeClr val="accent1"/>
-          </a:fillRef>
-          <a:effectRef idx="1">
-            <a:schemeClr val="accent1"/>
-          </a:effectRef>
-          <a:fontRef idx="minor">
-            <a:schemeClr val="tx1"/>
-          </a:fontRef>
-        </p:style>
-      </p:cxnSp>
-      <p:cxnSp>
-        <p:nvCxnSpPr>
-          <p:cNvPr id="121" name="Straight Connector 120">
-            <a:extLst>
-              <a:ext uri="{FF2B5EF4-FFF2-40B4-BE49-F238E27FC236}">
-                <a16:creationId xmlns:a16="http://schemas.microsoft.com/office/drawing/2014/main" id="{D9EC0F83-4A3A-4122-81BB-AA6456B1124D}"/>
-              </a:ext>
-            </a:extLst>
-          </p:cNvPr>
-          <p:cNvCxnSpPr>
-            <a:cxnSpLocks/>
-            <a:endCxn id="109" idx="0"/>
-          </p:cNvCxnSpPr>
-          <p:nvPr/>
-        </p:nvCxnSpPr>
-        <p:spPr>
-          <a:xfrm>
-            <a:off x="3026271" y="2834359"/>
-            <a:ext cx="0" cy="701837"/>
-          </a:xfrm>
-          <a:prstGeom prst="line">
-            <a:avLst/>
-          </a:prstGeom>
-          <a:ln w="28575">
-            <a:solidFill>
-              <a:schemeClr val="accent6">
-                <a:lumMod val="75000"/>
-              </a:schemeClr>
-            </a:solidFill>
-            <a:headEnd type="none" w="med" len="med"/>
-            <a:tailEnd type="none" w="med" len="med"/>
-          </a:ln>
-          <a:effectLst/>
-        </p:spPr>
-        <p:style>
-          <a:lnRef idx="2">
-            <a:schemeClr val="accent1"/>
-          </a:lnRef>
-          <a:fillRef idx="0">
-            <a:schemeClr val="accent1"/>
-          </a:fillRef>
-          <a:effectRef idx="1">
-            <a:schemeClr val="accent1"/>
-          </a:effectRef>
-          <a:fontRef idx="minor">
-            <a:schemeClr val="tx1"/>
-          </a:fontRef>
-        </p:style>
-      </p:cxnSp>
-      <p:cxnSp>
-        <p:nvCxnSpPr>
-          <p:cNvPr id="122" name="Straight Connector 121">
-            <a:extLst>
-              <a:ext uri="{FF2B5EF4-FFF2-40B4-BE49-F238E27FC236}">
-                <a16:creationId xmlns:a16="http://schemas.microsoft.com/office/drawing/2014/main" id="{86EFAE34-E646-471C-A5F9-3D720C5B6CD6}"/>
-              </a:ext>
-            </a:extLst>
-          </p:cNvPr>
-          <p:cNvCxnSpPr>
-            <a:cxnSpLocks/>
-          </p:cNvCxnSpPr>
-          <p:nvPr/>
-        </p:nvCxnSpPr>
-        <p:spPr>
-          <a:xfrm flipH="1">
-            <a:off x="2797055" y="3401195"/>
-            <a:ext cx="0" cy="135000"/>
-          </a:xfrm>
-          <a:prstGeom prst="line">
-            <a:avLst/>
-          </a:prstGeom>
-          <a:ln w="28575">
-            <a:solidFill>
-              <a:schemeClr val="accent6">
-                <a:lumMod val="75000"/>
-              </a:schemeClr>
-            </a:solidFill>
-            <a:headEnd type="none" w="med" len="med"/>
-            <a:tailEnd type="none" w="med" len="med"/>
-          </a:ln>
-          <a:effectLst/>
-        </p:spPr>
-        <p:style>
-          <a:lnRef idx="2">
-            <a:schemeClr val="accent1"/>
-          </a:lnRef>
-          <a:fillRef idx="0">
-            <a:schemeClr val="accent1"/>
-          </a:fillRef>
-          <a:effectRef idx="1">
-            <a:schemeClr val="accent1"/>
-          </a:effectRef>
-          <a:fontRef idx="minor">
-            <a:schemeClr val="tx1"/>
-          </a:fontRef>
-        </p:style>
-      </p:cxnSp>
-      <p:cxnSp>
-        <p:nvCxnSpPr>
-          <p:cNvPr id="123" name="Straight Connector 122">
-            <a:extLst>
-              <a:ext uri="{FF2B5EF4-FFF2-40B4-BE49-F238E27FC236}">
-                <a16:creationId xmlns:a16="http://schemas.microsoft.com/office/drawing/2014/main" id="{9E323476-6765-4B31-8A04-F6C990255499}"/>
-              </a:ext>
-            </a:extLst>
-          </p:cNvPr>
-          <p:cNvCxnSpPr>
-            <a:cxnSpLocks/>
-          </p:cNvCxnSpPr>
-          <p:nvPr/>
-        </p:nvCxnSpPr>
-        <p:spPr>
-          <a:xfrm flipH="1">
-            <a:off x="3255487" y="3405983"/>
-            <a:ext cx="0" cy="135000"/>
-          </a:xfrm>
-          <a:prstGeom prst="line">
-            <a:avLst/>
-          </a:prstGeom>
-          <a:ln w="28575">
-            <a:solidFill>
-              <a:schemeClr val="accent6">
-                <a:lumMod val="75000"/>
-              </a:schemeClr>
-            </a:solidFill>
-            <a:headEnd type="none" w="med" len="med"/>
-            <a:tailEnd type="none" w="med" len="med"/>
-          </a:ln>
-          <a:effectLst/>
-        </p:spPr>
-        <p:style>
-          <a:lnRef idx="2">
-            <a:schemeClr val="accent1"/>
-          </a:lnRef>
-          <a:fillRef idx="0">
-            <a:schemeClr val="accent1"/>
-          </a:fillRef>
-          <a:effectRef idx="1">
-            <a:schemeClr val="accent1"/>
-          </a:effectRef>
-          <a:fontRef idx="minor">
-            <a:schemeClr val="tx1"/>
-          </a:fontRef>
-        </p:style>
-      </p:cxnSp>
-      <p:cxnSp>
-        <p:nvCxnSpPr>
-          <p:cNvPr id="124" name="Straight Connector 123">
-            <a:extLst>
-              <a:ext uri="{FF2B5EF4-FFF2-40B4-BE49-F238E27FC236}">
-                <a16:creationId xmlns:a16="http://schemas.microsoft.com/office/drawing/2014/main" id="{2D45E323-5524-44CF-8940-0C4DBDBCE797}"/>
-              </a:ext>
-            </a:extLst>
-          </p:cNvPr>
-          <p:cNvCxnSpPr>
-            <a:cxnSpLocks/>
-          </p:cNvCxnSpPr>
-          <p:nvPr/>
-        </p:nvCxnSpPr>
-        <p:spPr>
-          <a:xfrm flipH="1">
-            <a:off x="3496883" y="3405983"/>
-            <a:ext cx="0" cy="135000"/>
-          </a:xfrm>
-          <a:prstGeom prst="line">
-            <a:avLst/>
-          </a:prstGeom>
-          <a:ln w="28575">
-            <a:solidFill>
-              <a:schemeClr val="accent6">
-                <a:lumMod val="75000"/>
-              </a:schemeClr>
-            </a:solidFill>
-            <a:headEnd type="none" w="med" len="med"/>
-            <a:tailEnd type="none" w="med" len="med"/>
-          </a:ln>
-          <a:effectLst/>
-        </p:spPr>
-        <p:style>
-          <a:lnRef idx="2">
-            <a:schemeClr val="accent1"/>
-          </a:lnRef>
-          <a:fillRef idx="0">
-            <a:schemeClr val="accent1"/>
-          </a:fillRef>
-          <a:effectRef idx="1">
-            <a:schemeClr val="accent1"/>
-          </a:effectRef>
-          <a:fontRef idx="minor">
-            <a:schemeClr val="tx1"/>
-          </a:fontRef>
-        </p:style>
-      </p:cxnSp>
-      <p:cxnSp>
-        <p:nvCxnSpPr>
-          <p:cNvPr id="125" name="Straight Connector 124">
-            <a:extLst>
-              <a:ext uri="{FF2B5EF4-FFF2-40B4-BE49-F238E27FC236}">
-                <a16:creationId xmlns:a16="http://schemas.microsoft.com/office/drawing/2014/main" id="{46385D88-B164-450C-8731-CD0EC4C81892}"/>
-              </a:ext>
-            </a:extLst>
-          </p:cNvPr>
-          <p:cNvCxnSpPr>
-            <a:cxnSpLocks/>
-          </p:cNvCxnSpPr>
-          <p:nvPr/>
-        </p:nvCxnSpPr>
-        <p:spPr>
-          <a:xfrm flipH="1">
-            <a:off x="3711080" y="3405983"/>
-            <a:ext cx="0" cy="135000"/>
-          </a:xfrm>
-          <a:prstGeom prst="line">
-            <a:avLst/>
-          </a:prstGeom>
-          <a:ln w="28575">
-            <a:solidFill>
-              <a:schemeClr val="accent6">
-                <a:lumMod val="75000"/>
-              </a:schemeClr>
-            </a:solidFill>
-            <a:headEnd type="none" w="med" len="med"/>
-            <a:tailEnd type="none" w="med" len="med"/>
-          </a:ln>
-          <a:effectLst/>
-        </p:spPr>
-        <p:style>
-          <a:lnRef idx="2">
-            <a:schemeClr val="accent1"/>
-          </a:lnRef>
-          <a:fillRef idx="0">
-            <a:schemeClr val="accent1"/>
-          </a:fillRef>
-          <a:effectRef idx="1">
-            <a:schemeClr val="accent1"/>
-          </a:effectRef>
-          <a:fontRef idx="minor">
-            <a:schemeClr val="tx1"/>
-          </a:fontRef>
-        </p:style>
-      </p:cxnSp>
-      <p:cxnSp>
-        <p:nvCxnSpPr>
-          <p:cNvPr id="126" name="Straight Connector 125">
-            <a:extLst>
-              <a:ext uri="{FF2B5EF4-FFF2-40B4-BE49-F238E27FC236}">
-                <a16:creationId xmlns:a16="http://schemas.microsoft.com/office/drawing/2014/main" id="{D3F88047-938B-477F-AAFF-BF174266D1F3}"/>
-              </a:ext>
-            </a:extLst>
-          </p:cNvPr>
-          <p:cNvCxnSpPr>
-            <a:cxnSpLocks/>
-          </p:cNvCxnSpPr>
-          <p:nvPr/>
-        </p:nvCxnSpPr>
-        <p:spPr>
-          <a:xfrm flipH="1">
-            <a:off x="3943134" y="3405983"/>
-            <a:ext cx="0" cy="135000"/>
-          </a:xfrm>
-          <a:prstGeom prst="line">
-            <a:avLst/>
-          </a:prstGeom>
-          <a:ln w="28575">
-            <a:solidFill>
-              <a:schemeClr val="accent6">
-                <a:lumMod val="75000"/>
-              </a:schemeClr>
-            </a:solidFill>
-            <a:headEnd type="none" w="med" len="med"/>
-            <a:tailEnd type="none" w="med" len="med"/>
-          </a:ln>
-          <a:effectLst/>
-        </p:spPr>
-        <p:style>
-          <a:lnRef idx="2">
-            <a:schemeClr val="accent1"/>
-          </a:lnRef>
-          <a:fillRef idx="0">
-            <a:schemeClr val="accent1"/>
-          </a:fillRef>
-          <a:effectRef idx="1">
-            <a:schemeClr val="accent1"/>
-          </a:effectRef>
-          <a:fontRef idx="minor">
-            <a:schemeClr val="tx1"/>
-          </a:fontRef>
-        </p:style>
-      </p:cxnSp>
-      <p:cxnSp>
-        <p:nvCxnSpPr>
-          <p:cNvPr id="127" name="Straight Connector 126">
-            <a:extLst>
-              <a:ext uri="{FF2B5EF4-FFF2-40B4-BE49-F238E27FC236}">
-                <a16:creationId xmlns:a16="http://schemas.microsoft.com/office/drawing/2014/main" id="{C9CE477D-3DD4-48AC-ABF0-255D485FE9E7}"/>
-              </a:ext>
-            </a:extLst>
-          </p:cNvPr>
-          <p:cNvCxnSpPr>
-            <a:cxnSpLocks/>
-          </p:cNvCxnSpPr>
-          <p:nvPr/>
-        </p:nvCxnSpPr>
-        <p:spPr>
-          <a:xfrm flipH="1">
-            <a:off x="4161632" y="3405983"/>
-            <a:ext cx="0" cy="135000"/>
-          </a:xfrm>
-          <a:prstGeom prst="line">
-            <a:avLst/>
-          </a:prstGeom>
-          <a:ln w="28575">
-            <a:solidFill>
-              <a:schemeClr val="accent6">
-                <a:lumMod val="75000"/>
-              </a:schemeClr>
-            </a:solidFill>
-            <a:headEnd type="none" w="med" len="med"/>
-            <a:tailEnd type="none" w="med" len="med"/>
-          </a:ln>
-          <a:effectLst/>
-        </p:spPr>
-        <p:style>
-          <a:lnRef idx="2">
-            <a:schemeClr val="accent1"/>
-          </a:lnRef>
-          <a:fillRef idx="0">
-            <a:schemeClr val="accent1"/>
-          </a:fillRef>
-          <a:effectRef idx="1">
-            <a:schemeClr val="accent1"/>
-          </a:effectRef>
-          <a:fontRef idx="minor">
-            <a:schemeClr val="tx1"/>
-          </a:fontRef>
-        </p:style>
-      </p:cxnSp>
-      <p:cxnSp>
-        <p:nvCxnSpPr>
-          <p:cNvPr id="129" name="Straight Connector 128">
-            <a:extLst>
-              <a:ext uri="{FF2B5EF4-FFF2-40B4-BE49-F238E27FC236}">
-                <a16:creationId xmlns:a16="http://schemas.microsoft.com/office/drawing/2014/main" id="{D5894E20-5955-4DA3-80B3-BA380810736F}"/>
-              </a:ext>
-            </a:extLst>
-          </p:cNvPr>
-          <p:cNvCxnSpPr>
-            <a:cxnSpLocks/>
-          </p:cNvCxnSpPr>
-          <p:nvPr/>
-        </p:nvCxnSpPr>
-        <p:spPr>
-          <a:xfrm flipH="1">
-            <a:off x="1883251" y="3405983"/>
-            <a:ext cx="2289100" cy="0"/>
-          </a:xfrm>
-          <a:prstGeom prst="line">
-            <a:avLst/>
-          </a:prstGeom>
-          <a:ln w="28575">
-            <a:solidFill>
-              <a:schemeClr val="accent6">
-                <a:lumMod val="75000"/>
-              </a:schemeClr>
-            </a:solidFill>
-            <a:headEnd type="none" w="med" len="med"/>
-            <a:tailEnd type="none" w="med" len="med"/>
-          </a:ln>
-          <a:effectLst/>
-        </p:spPr>
-        <p:style>
-          <a:lnRef idx="2">
-            <a:schemeClr val="accent1"/>
-          </a:lnRef>
-          <a:fillRef idx="0">
-            <a:schemeClr val="accent1"/>
-          </a:fillRef>
-          <a:effectRef idx="1">
-            <a:schemeClr val="accent1"/>
-          </a:effectRef>
-          <a:fontRef idx="minor">
-            <a:schemeClr val="tx1"/>
-          </a:fontRef>
-        </p:style>
-      </p:cxnSp>
-      <p:sp>
-        <p:nvSpPr>
-          <p:cNvPr id="105" name="Rectangle 104">
-            <a:extLst>
-              <a:ext uri="{FF2B5EF4-FFF2-40B4-BE49-F238E27FC236}">
-                <a16:creationId xmlns:a16="http://schemas.microsoft.com/office/drawing/2014/main" id="{1475108E-4D4F-41A0-B63F-53E20D3A7A38}"/>
-              </a:ext>
-            </a:extLst>
-          </p:cNvPr>
-          <p:cNvSpPr/>
-          <p:nvPr/>
-        </p:nvSpPr>
-        <p:spPr>
-          <a:xfrm>
-            <a:off x="1785692" y="3536195"/>
-            <a:ext cx="189000" cy="648000"/>
-          </a:xfrm>
-          <a:prstGeom prst="rect">
-            <a:avLst/>
-          </a:prstGeom>
-          <a:solidFill>
-            <a:schemeClr val="accent1">
-              <a:lumMod val="50000"/>
-            </a:schemeClr>
-          </a:solidFill>
-          <a:ln>
-            <a:noFill/>
-          </a:ln>
-        </p:spPr>
-        <p:style>
-          <a:lnRef idx="2">
-            <a:schemeClr val="accent5">
-              <a:shade val="50000"/>
-            </a:schemeClr>
-          </a:lnRef>
-          <a:fillRef idx="1">
-            <a:schemeClr val="accent5"/>
-          </a:fillRef>
-          <a:effectRef idx="0">
-            <a:schemeClr val="accent5"/>
-          </a:effectRef>
-          <a:fontRef idx="minor">
-            <a:schemeClr val="lt1"/>
-          </a:fontRef>
-        </p:style>
-        <p:txBody>
-          <a:bodyPr vert="vert270" rtlCol="0" anchor="ctr"/>
-          <a:lstStyle/>
-          <a:p>
-            <a:pPr algn="ctr" defTabSz="685800" eaLnBrk="0" fontAlgn="base" hangingPunct="0">
-              <a:spcBef>
-                <a:spcPct val="0"/>
-              </a:spcBef>
-              <a:spcAft>
-                <a:spcPct val="0"/>
-              </a:spcAft>
-              <a:defRPr/>
-            </a:pPr>
-            <a:r>
-              <a:rPr lang="en-US" sz="1050">
-                <a:solidFill>
-                  <a:srgbClr val="E5ECEB"/>
-                </a:solidFill>
-                <a:latin typeface="Calibri"/>
-              </a:rPr>
-              <a:t>USB</a:t>
-            </a:r>
-          </a:p>
-        </p:txBody>
-      </p:sp>
-      <p:sp>
-        <p:nvSpPr>
-          <p:cNvPr id="106" name="Rectangle 105">
-            <a:extLst>
-              <a:ext uri="{FF2B5EF4-FFF2-40B4-BE49-F238E27FC236}">
-                <a16:creationId xmlns:a16="http://schemas.microsoft.com/office/drawing/2014/main" id="{3DECB84A-A5E0-4C8B-A8B6-6B0415B9D45C}"/>
-              </a:ext>
-            </a:extLst>
-          </p:cNvPr>
-          <p:cNvSpPr/>
-          <p:nvPr/>
-        </p:nvSpPr>
-        <p:spPr>
-          <a:xfrm>
-            <a:off x="2014908" y="3536195"/>
-            <a:ext cx="189000" cy="648000"/>
-          </a:xfrm>
-          <a:prstGeom prst="rect">
-            <a:avLst/>
-          </a:prstGeom>
-          <a:solidFill>
-            <a:schemeClr val="accent1">
-              <a:lumMod val="50000"/>
-            </a:schemeClr>
-          </a:solidFill>
-          <a:ln>
-            <a:noFill/>
-          </a:ln>
-        </p:spPr>
-        <p:style>
-          <a:lnRef idx="2">
-            <a:schemeClr val="accent5">
-              <a:shade val="50000"/>
-            </a:schemeClr>
-          </a:lnRef>
-          <a:fillRef idx="1">
-            <a:schemeClr val="accent5"/>
-          </a:fillRef>
-          <a:effectRef idx="0">
-            <a:schemeClr val="accent5"/>
-          </a:effectRef>
-          <a:fontRef idx="minor">
-            <a:schemeClr val="lt1"/>
-          </a:fontRef>
-        </p:style>
-        <p:txBody>
-          <a:bodyPr vert="vert270" rtlCol="0" anchor="ctr"/>
-          <a:lstStyle/>
-          <a:p>
-            <a:pPr algn="ctr" defTabSz="685800" eaLnBrk="0" fontAlgn="base" hangingPunct="0">
-              <a:spcBef>
-                <a:spcPct val="0"/>
-              </a:spcBef>
-              <a:spcAft>
-                <a:spcPct val="0"/>
-              </a:spcAft>
-              <a:defRPr/>
-            </a:pPr>
-            <a:r>
-              <a:rPr lang="en-US" sz="1050">
-                <a:solidFill>
-                  <a:srgbClr val="E5ECEB"/>
-                </a:solidFill>
-                <a:latin typeface="Calibri"/>
-              </a:rPr>
-              <a:t>SDIO</a:t>
-            </a:r>
-          </a:p>
-        </p:txBody>
-      </p:sp>
-      <p:sp>
-        <p:nvSpPr>
-          <p:cNvPr id="107" name="Rectangle 106">
-            <a:extLst>
-              <a:ext uri="{FF2B5EF4-FFF2-40B4-BE49-F238E27FC236}">
-                <a16:creationId xmlns:a16="http://schemas.microsoft.com/office/drawing/2014/main" id="{766D56E4-6E41-43F2-9E59-6568A491CC01}"/>
-              </a:ext>
-            </a:extLst>
-          </p:cNvPr>
-          <p:cNvSpPr/>
-          <p:nvPr/>
-        </p:nvSpPr>
-        <p:spPr>
-          <a:xfrm>
-            <a:off x="2473340" y="3536195"/>
-            <a:ext cx="189000" cy="648000"/>
-          </a:xfrm>
-          <a:prstGeom prst="rect">
-            <a:avLst/>
-          </a:prstGeom>
-          <a:solidFill>
-            <a:schemeClr val="accent1">
-              <a:lumMod val="50000"/>
-            </a:schemeClr>
-          </a:solidFill>
-          <a:ln>
-            <a:noFill/>
-          </a:ln>
-        </p:spPr>
-        <p:style>
-          <a:lnRef idx="2">
-            <a:schemeClr val="accent5">
-              <a:shade val="50000"/>
-            </a:schemeClr>
-          </a:lnRef>
-          <a:fillRef idx="1">
-            <a:schemeClr val="accent5"/>
-          </a:fillRef>
-          <a:effectRef idx="0">
-            <a:schemeClr val="accent5"/>
-          </a:effectRef>
-          <a:fontRef idx="minor">
-            <a:schemeClr val="lt1"/>
-          </a:fontRef>
-        </p:style>
-        <p:txBody>
-          <a:bodyPr vert="vert270" rtlCol="0" anchor="ctr"/>
-          <a:lstStyle/>
-          <a:p>
-            <a:pPr algn="ctr" defTabSz="685800" eaLnBrk="0" fontAlgn="base" hangingPunct="0">
-              <a:spcBef>
-                <a:spcPct val="0"/>
-              </a:spcBef>
-              <a:spcAft>
-                <a:spcPct val="0"/>
-              </a:spcAft>
-              <a:defRPr/>
-            </a:pPr>
-            <a:r>
-              <a:rPr lang="en-US" sz="1050">
-                <a:solidFill>
-                  <a:srgbClr val="E5ECEB"/>
-                </a:solidFill>
-                <a:latin typeface="Calibri"/>
-              </a:rPr>
-              <a:t>AES</a:t>
-            </a:r>
-          </a:p>
-        </p:txBody>
-      </p:sp>
-      <p:sp>
-        <p:nvSpPr>
-          <p:cNvPr id="108" name="Rectangle 107">
-            <a:extLst>
-              <a:ext uri="{FF2B5EF4-FFF2-40B4-BE49-F238E27FC236}">
-                <a16:creationId xmlns:a16="http://schemas.microsoft.com/office/drawing/2014/main" id="{F7AF2A67-F687-4448-9166-71CD4BDF2681}"/>
-              </a:ext>
-            </a:extLst>
-          </p:cNvPr>
-          <p:cNvSpPr/>
-          <p:nvPr/>
-        </p:nvSpPr>
-        <p:spPr>
-          <a:xfrm>
-            <a:off x="2702555" y="3536195"/>
-            <a:ext cx="189000" cy="648000"/>
-          </a:xfrm>
-          <a:prstGeom prst="rect">
-            <a:avLst/>
-          </a:prstGeom>
-          <a:solidFill>
-            <a:schemeClr val="accent1">
-              <a:lumMod val="50000"/>
-            </a:schemeClr>
-          </a:solidFill>
-          <a:ln>
-            <a:noFill/>
-          </a:ln>
-        </p:spPr>
-        <p:style>
-          <a:lnRef idx="2">
-            <a:schemeClr val="accent5">
-              <a:shade val="50000"/>
-            </a:schemeClr>
-          </a:lnRef>
-          <a:fillRef idx="1">
-            <a:schemeClr val="accent5"/>
-          </a:fillRef>
-          <a:effectRef idx="0">
-            <a:schemeClr val="accent5"/>
-          </a:effectRef>
-          <a:fontRef idx="minor">
-            <a:schemeClr val="lt1"/>
-          </a:fontRef>
-        </p:style>
-        <p:txBody>
-          <a:bodyPr vert="vert270" rtlCol="0" anchor="ctr"/>
-          <a:lstStyle/>
-          <a:p>
-            <a:pPr algn="ctr" defTabSz="685800" eaLnBrk="0" fontAlgn="base" hangingPunct="0">
-              <a:spcBef>
-                <a:spcPct val="0"/>
-              </a:spcBef>
-              <a:spcAft>
-                <a:spcPct val="0"/>
-              </a:spcAft>
-              <a:defRPr/>
-            </a:pPr>
-            <a:r>
-              <a:rPr lang="en-US" sz="1050">
-                <a:solidFill>
-                  <a:srgbClr val="E5ECEB"/>
-                </a:solidFill>
-                <a:latin typeface="Calibri"/>
-              </a:rPr>
-              <a:t>TRNG</a:t>
-            </a:r>
-          </a:p>
-        </p:txBody>
-      </p:sp>
-      <p:sp>
-        <p:nvSpPr>
-          <p:cNvPr id="109" name="Rectangle 108">
-            <a:extLst>
-              <a:ext uri="{FF2B5EF4-FFF2-40B4-BE49-F238E27FC236}">
-                <a16:creationId xmlns:a16="http://schemas.microsoft.com/office/drawing/2014/main" id="{CB0E9968-7917-47DA-A3CE-590306CD1EA4}"/>
-              </a:ext>
-            </a:extLst>
-          </p:cNvPr>
-          <p:cNvSpPr/>
-          <p:nvPr/>
-        </p:nvSpPr>
-        <p:spPr>
-          <a:xfrm>
-            <a:off x="2931771" y="3536195"/>
-            <a:ext cx="189000" cy="648000"/>
-          </a:xfrm>
-          <a:prstGeom prst="rect">
-            <a:avLst/>
-          </a:prstGeom>
-          <a:solidFill>
-            <a:schemeClr val="accent1">
-              <a:lumMod val="50000"/>
-            </a:schemeClr>
-          </a:solidFill>
-          <a:ln>
-            <a:noFill/>
-          </a:ln>
-        </p:spPr>
-        <p:style>
-          <a:lnRef idx="2">
-            <a:schemeClr val="accent5">
-              <a:shade val="50000"/>
-            </a:schemeClr>
-          </a:lnRef>
-          <a:fillRef idx="1">
-            <a:schemeClr val="accent5"/>
-          </a:fillRef>
-          <a:effectRef idx="0">
-            <a:schemeClr val="accent5"/>
-          </a:effectRef>
-          <a:fontRef idx="minor">
-            <a:schemeClr val="lt1"/>
-          </a:fontRef>
-        </p:style>
-        <p:txBody>
-          <a:bodyPr vert="vert270" rtlCol="0" anchor="ctr"/>
-          <a:lstStyle/>
-          <a:p>
-            <a:pPr algn="ctr" defTabSz="685800" eaLnBrk="0" fontAlgn="base" hangingPunct="0">
-              <a:spcBef>
-                <a:spcPct val="0"/>
-              </a:spcBef>
-              <a:spcAft>
-                <a:spcPct val="0"/>
-              </a:spcAft>
-              <a:defRPr/>
-            </a:pPr>
-            <a:r>
-              <a:rPr lang="en-US" sz="1050">
-                <a:solidFill>
-                  <a:srgbClr val="E5ECEB"/>
-                </a:solidFill>
-                <a:latin typeface="Calibri"/>
-              </a:rPr>
-              <a:t>USART</a:t>
-            </a:r>
-          </a:p>
-        </p:txBody>
-      </p:sp>
-      <p:sp>
-        <p:nvSpPr>
-          <p:cNvPr id="110" name="Rectangle 109">
-            <a:extLst>
-              <a:ext uri="{FF2B5EF4-FFF2-40B4-BE49-F238E27FC236}">
-                <a16:creationId xmlns:a16="http://schemas.microsoft.com/office/drawing/2014/main" id="{73A3AB5C-FA27-4A87-8222-48CAAEE98CD2}"/>
-              </a:ext>
-            </a:extLst>
-          </p:cNvPr>
-          <p:cNvSpPr/>
-          <p:nvPr/>
-        </p:nvSpPr>
-        <p:spPr>
-          <a:xfrm>
-            <a:off x="3848634" y="3536195"/>
-            <a:ext cx="189000" cy="648000"/>
-          </a:xfrm>
-          <a:prstGeom prst="rect">
-            <a:avLst/>
-          </a:prstGeom>
-          <a:solidFill>
-            <a:schemeClr val="accent1">
-              <a:lumMod val="50000"/>
-            </a:schemeClr>
-          </a:solidFill>
-          <a:ln>
-            <a:noFill/>
-          </a:ln>
-        </p:spPr>
-        <p:style>
-          <a:lnRef idx="2">
-            <a:schemeClr val="accent5">
-              <a:shade val="50000"/>
-            </a:schemeClr>
-          </a:lnRef>
-          <a:fillRef idx="1">
-            <a:schemeClr val="accent5"/>
-          </a:fillRef>
-          <a:effectRef idx="0">
-            <a:schemeClr val="accent5"/>
-          </a:effectRef>
-          <a:fontRef idx="minor">
-            <a:schemeClr val="lt1"/>
-          </a:fontRef>
-        </p:style>
-        <p:txBody>
-          <a:bodyPr vert="vert270" rtlCol="0" anchor="ctr"/>
-          <a:lstStyle/>
-          <a:p>
-            <a:pPr algn="ctr" defTabSz="685800" eaLnBrk="0" fontAlgn="base" hangingPunct="0">
-              <a:spcBef>
-                <a:spcPct val="0"/>
-              </a:spcBef>
-              <a:spcAft>
-                <a:spcPct val="0"/>
-              </a:spcAft>
-              <a:defRPr/>
-            </a:pPr>
-            <a:r>
-              <a:rPr lang="en-US" sz="1050">
-                <a:solidFill>
-                  <a:srgbClr val="E5ECEB"/>
-                </a:solidFill>
-                <a:latin typeface="Calibri"/>
-              </a:rPr>
-              <a:t>GPIO</a:t>
-            </a:r>
-          </a:p>
-        </p:txBody>
-      </p:sp>
-      <p:sp>
-        <p:nvSpPr>
-          <p:cNvPr id="111" name="Rectangle 110">
-            <a:extLst>
-              <a:ext uri="{FF2B5EF4-FFF2-40B4-BE49-F238E27FC236}">
-                <a16:creationId xmlns:a16="http://schemas.microsoft.com/office/drawing/2014/main" id="{B15D26A7-82E6-4F56-8B8F-E9CC6783EE7E}"/>
-              </a:ext>
-            </a:extLst>
-          </p:cNvPr>
-          <p:cNvSpPr/>
-          <p:nvPr/>
-        </p:nvSpPr>
-        <p:spPr>
-          <a:xfrm>
-            <a:off x="3619418" y="3536195"/>
-            <a:ext cx="189000" cy="648000"/>
-          </a:xfrm>
-          <a:prstGeom prst="rect">
-            <a:avLst/>
-          </a:prstGeom>
-          <a:solidFill>
-            <a:schemeClr val="accent1">
-              <a:lumMod val="50000"/>
-            </a:schemeClr>
-          </a:solidFill>
-          <a:ln>
-            <a:noFill/>
-          </a:ln>
-        </p:spPr>
-        <p:style>
-          <a:lnRef idx="2">
-            <a:schemeClr val="accent5">
-              <a:shade val="50000"/>
-            </a:schemeClr>
-          </a:lnRef>
-          <a:fillRef idx="1">
-            <a:schemeClr val="accent5"/>
-          </a:fillRef>
-          <a:effectRef idx="0">
-            <a:schemeClr val="accent5"/>
-          </a:effectRef>
-          <a:fontRef idx="minor">
-            <a:schemeClr val="lt1"/>
-          </a:fontRef>
-        </p:style>
-        <p:txBody>
-          <a:bodyPr vert="vert270" rtlCol="0" anchor="ctr"/>
-          <a:lstStyle/>
-          <a:p>
-            <a:pPr algn="ctr" defTabSz="685800" eaLnBrk="0" fontAlgn="base" hangingPunct="0">
-              <a:spcBef>
-                <a:spcPct val="0"/>
-              </a:spcBef>
-              <a:spcAft>
-                <a:spcPct val="0"/>
-              </a:spcAft>
-              <a:defRPr/>
-            </a:pPr>
-            <a:r>
-              <a:rPr lang="en-US" sz="1050">
-                <a:solidFill>
-                  <a:srgbClr val="E5ECEB"/>
-                </a:solidFill>
-                <a:latin typeface="Calibri"/>
-              </a:rPr>
-              <a:t>PWM</a:t>
-            </a:r>
-          </a:p>
-        </p:txBody>
-      </p:sp>
-      <p:sp>
-        <p:nvSpPr>
-          <p:cNvPr id="112" name="Rectangle 111">
-            <a:extLst>
-              <a:ext uri="{FF2B5EF4-FFF2-40B4-BE49-F238E27FC236}">
-                <a16:creationId xmlns:a16="http://schemas.microsoft.com/office/drawing/2014/main" id="{F8FD7740-EAA4-4043-AA59-5FC4AD2AA408}"/>
-              </a:ext>
-            </a:extLst>
-          </p:cNvPr>
-          <p:cNvSpPr/>
-          <p:nvPr/>
-        </p:nvSpPr>
-        <p:spPr>
-          <a:xfrm>
-            <a:off x="3160987" y="3536195"/>
-            <a:ext cx="189000" cy="648000"/>
-          </a:xfrm>
-          <a:prstGeom prst="rect">
-            <a:avLst/>
-          </a:prstGeom>
-          <a:solidFill>
-            <a:schemeClr val="accent1">
-              <a:lumMod val="50000"/>
-            </a:schemeClr>
-          </a:solidFill>
-          <a:ln>
-            <a:noFill/>
-          </a:ln>
-        </p:spPr>
-        <p:style>
-          <a:lnRef idx="2">
-            <a:schemeClr val="accent5">
-              <a:shade val="50000"/>
-            </a:schemeClr>
-          </a:lnRef>
-          <a:fillRef idx="1">
-            <a:schemeClr val="accent5"/>
-          </a:fillRef>
-          <a:effectRef idx="0">
-            <a:schemeClr val="accent5"/>
-          </a:effectRef>
-          <a:fontRef idx="minor">
-            <a:schemeClr val="lt1"/>
-          </a:fontRef>
-        </p:style>
-        <p:txBody>
-          <a:bodyPr vert="vert270" rtlCol="0" anchor="ctr"/>
-          <a:lstStyle/>
-          <a:p>
-            <a:pPr algn="ctr" defTabSz="685800" eaLnBrk="0" fontAlgn="base" hangingPunct="0">
-              <a:spcBef>
-                <a:spcPct val="0"/>
-              </a:spcBef>
-              <a:spcAft>
-                <a:spcPct val="0"/>
-              </a:spcAft>
-              <a:defRPr/>
-            </a:pPr>
-            <a:r>
-              <a:rPr lang="en-US" sz="1050">
-                <a:solidFill>
-                  <a:srgbClr val="E5ECEB"/>
-                </a:solidFill>
-                <a:latin typeface="Calibri"/>
-              </a:rPr>
-              <a:t>I2S</a:t>
-            </a:r>
-          </a:p>
-        </p:txBody>
-      </p:sp>
-      <p:sp>
-        <p:nvSpPr>
-          <p:cNvPr id="113" name="Rectangle 112">
-            <a:extLst>
-              <a:ext uri="{FF2B5EF4-FFF2-40B4-BE49-F238E27FC236}">
-                <a16:creationId xmlns:a16="http://schemas.microsoft.com/office/drawing/2014/main" id="{BC282828-01BE-49A0-BCEC-23CF870DD53B}"/>
-              </a:ext>
-            </a:extLst>
-          </p:cNvPr>
-          <p:cNvSpPr/>
-          <p:nvPr/>
-        </p:nvSpPr>
-        <p:spPr>
-          <a:xfrm>
-            <a:off x="4077851" y="3536195"/>
-            <a:ext cx="189000" cy="648000"/>
-          </a:xfrm>
-          <a:prstGeom prst="rect">
-            <a:avLst/>
-          </a:prstGeom>
-          <a:solidFill>
-            <a:schemeClr val="accent1">
-              <a:lumMod val="50000"/>
-            </a:schemeClr>
-          </a:solidFill>
-          <a:ln>
-            <a:noFill/>
-          </a:ln>
-        </p:spPr>
-        <p:style>
-          <a:lnRef idx="2">
-            <a:schemeClr val="accent5">
-              <a:shade val="50000"/>
-            </a:schemeClr>
-          </a:lnRef>
-          <a:fillRef idx="1">
-            <a:schemeClr val="accent5"/>
-          </a:fillRef>
-          <a:effectRef idx="0">
-            <a:schemeClr val="accent5"/>
-          </a:effectRef>
-          <a:fontRef idx="minor">
-            <a:schemeClr val="lt1"/>
-          </a:fontRef>
-        </p:style>
-        <p:txBody>
-          <a:bodyPr vert="vert270" rtlCol="0" anchor="ctr"/>
-          <a:lstStyle/>
-          <a:p>
-            <a:pPr algn="ctr" defTabSz="685800" eaLnBrk="0" fontAlgn="base" hangingPunct="0">
-              <a:spcBef>
-                <a:spcPct val="0"/>
-              </a:spcBef>
-              <a:spcAft>
-                <a:spcPct val="0"/>
-              </a:spcAft>
-              <a:defRPr/>
-            </a:pPr>
-            <a:r>
-              <a:rPr lang="en-US" sz="1050">
-                <a:solidFill>
-                  <a:srgbClr val="E5ECEB"/>
-                </a:solidFill>
-                <a:latin typeface="Calibri"/>
-              </a:rPr>
-              <a:t>RTC</a:t>
-            </a:r>
-          </a:p>
-        </p:txBody>
-      </p:sp>
-      <p:sp>
-        <p:nvSpPr>
-          <p:cNvPr id="114" name="Rectangle 113">
-            <a:extLst>
-              <a:ext uri="{FF2B5EF4-FFF2-40B4-BE49-F238E27FC236}">
-                <a16:creationId xmlns:a16="http://schemas.microsoft.com/office/drawing/2014/main" id="{5B3ECD33-822D-4B5D-ACBA-25A825CAE793}"/>
-              </a:ext>
-            </a:extLst>
-          </p:cNvPr>
-          <p:cNvSpPr/>
-          <p:nvPr/>
-        </p:nvSpPr>
-        <p:spPr>
-          <a:xfrm>
-            <a:off x="3390203" y="3536195"/>
-            <a:ext cx="189000" cy="648000"/>
-          </a:xfrm>
-          <a:prstGeom prst="rect">
-            <a:avLst/>
-          </a:prstGeom>
-          <a:solidFill>
-            <a:schemeClr val="accent1">
-              <a:lumMod val="50000"/>
-            </a:schemeClr>
-          </a:solidFill>
-          <a:ln>
-            <a:noFill/>
-          </a:ln>
-        </p:spPr>
-        <p:style>
-          <a:lnRef idx="2">
-            <a:schemeClr val="accent5">
-              <a:shade val="50000"/>
-            </a:schemeClr>
-          </a:lnRef>
-          <a:fillRef idx="1">
-            <a:schemeClr val="accent5"/>
-          </a:fillRef>
-          <a:effectRef idx="0">
-            <a:schemeClr val="accent5"/>
-          </a:effectRef>
-          <a:fontRef idx="minor">
-            <a:schemeClr val="lt1"/>
-          </a:fontRef>
-        </p:style>
-        <p:txBody>
-          <a:bodyPr vert="vert270" lIns="135000" rtlCol="0" anchor="ctr" anchorCtr="1"/>
-          <a:lstStyle/>
-          <a:p>
-            <a:pPr algn="ctr" defTabSz="685800" eaLnBrk="0" fontAlgn="base" hangingPunct="0">
-              <a:lnSpc>
-                <a:spcPct val="50000"/>
-              </a:lnSpc>
-              <a:spcBef>
-                <a:spcPct val="0"/>
-              </a:spcBef>
-              <a:spcAft>
-                <a:spcPct val="0"/>
-              </a:spcAft>
-              <a:defRPr/>
-            </a:pPr>
-            <a:r>
-              <a:rPr lang="en-US" sz="1050">
-                <a:solidFill>
-                  <a:srgbClr val="E5ECEB"/>
-                </a:solidFill>
-                <a:latin typeface="Calibri"/>
-              </a:rPr>
-              <a:t>I2C</a:t>
-            </a:r>
-          </a:p>
-        </p:txBody>
-      </p:sp>
-      <p:sp>
-        <p:nvSpPr>
-          <p:cNvPr id="115" name="Rectangle 114">
-            <a:extLst>
-              <a:ext uri="{FF2B5EF4-FFF2-40B4-BE49-F238E27FC236}">
-                <a16:creationId xmlns:a16="http://schemas.microsoft.com/office/drawing/2014/main" id="{CA25B370-65CD-4CCB-8E1C-B21D4FCBB442}"/>
-              </a:ext>
-            </a:extLst>
-          </p:cNvPr>
-          <p:cNvSpPr/>
-          <p:nvPr/>
-        </p:nvSpPr>
-        <p:spPr>
-          <a:xfrm>
-            <a:off x="2244124" y="3536195"/>
-            <a:ext cx="189000" cy="648000"/>
-          </a:xfrm>
-          <a:prstGeom prst="rect">
-            <a:avLst/>
-          </a:prstGeom>
-          <a:solidFill>
-            <a:schemeClr val="accent1">
-              <a:lumMod val="50000"/>
-            </a:schemeClr>
-          </a:solidFill>
-          <a:ln>
-            <a:noFill/>
-          </a:ln>
-        </p:spPr>
-        <p:style>
-          <a:lnRef idx="2">
-            <a:schemeClr val="accent5">
-              <a:shade val="50000"/>
-            </a:schemeClr>
-          </a:lnRef>
-          <a:fillRef idx="1">
-            <a:schemeClr val="accent5"/>
-          </a:fillRef>
-          <a:effectRef idx="0">
-            <a:schemeClr val="accent5"/>
-          </a:effectRef>
-          <a:fontRef idx="minor">
-            <a:schemeClr val="lt1"/>
-          </a:fontRef>
-        </p:style>
-        <p:txBody>
-          <a:bodyPr vert="vert270" rtlCol="0" anchor="ctr"/>
-          <a:lstStyle/>
-          <a:p>
-            <a:pPr algn="ctr" defTabSz="685800" eaLnBrk="0" fontAlgn="base" hangingPunct="0">
-              <a:spcBef>
-                <a:spcPct val="0"/>
-              </a:spcBef>
-              <a:spcAft>
-                <a:spcPct val="0"/>
-              </a:spcAft>
-              <a:defRPr/>
-            </a:pPr>
-            <a:r>
-              <a:rPr lang="en-US" sz="1050">
-                <a:solidFill>
-                  <a:srgbClr val="E5ECEB"/>
-                </a:solidFill>
-                <a:latin typeface="Calibri"/>
-              </a:rPr>
-              <a:t>SPI</a:t>
-            </a:r>
-          </a:p>
-        </p:txBody>
-      </p:sp>
-      <p:sp>
-        <p:nvSpPr>
-          <p:cNvPr id="130" name="Rectangle 129">
-            <a:extLst>
-              <a:ext uri="{FF2B5EF4-FFF2-40B4-BE49-F238E27FC236}">
-                <a16:creationId xmlns:a16="http://schemas.microsoft.com/office/drawing/2014/main" id="{2CCFCA0E-24C3-41ED-B4FC-13EBDCA51AFB}"/>
-              </a:ext>
-            </a:extLst>
-          </p:cNvPr>
-          <p:cNvSpPr/>
-          <p:nvPr/>
-        </p:nvSpPr>
-        <p:spPr>
-          <a:xfrm>
-            <a:off x="4729092" y="1408127"/>
-            <a:ext cx="4020541" cy="2867477"/>
-          </a:xfrm>
-          <a:prstGeom prst="rect">
-            <a:avLst/>
-          </a:prstGeom>
-          <a:solidFill>
-            <a:schemeClr val="bg2"/>
-          </a:solidFill>
-          <a:ln w="28575">
-            <a:solidFill>
-              <a:schemeClr val="accent1">
-                <a:lumMod val="50000"/>
-              </a:schemeClr>
-            </a:solidFill>
-          </a:ln>
-        </p:spPr>
-        <p:style>
-          <a:lnRef idx="2">
-            <a:schemeClr val="accent1">
-              <a:shade val="50000"/>
-            </a:schemeClr>
-          </a:lnRef>
-          <a:fillRef idx="1">
-            <a:schemeClr val="accent1"/>
-          </a:fillRef>
-          <a:effectRef idx="0">
-            <a:schemeClr val="accent1"/>
-          </a:effectRef>
-          <a:fontRef idx="minor">
-            <a:schemeClr val="lt1"/>
-          </a:fontRef>
-        </p:style>
-        <p:txBody>
-          <a:bodyPr rtlCol="0" anchor="t"/>
-          <a:lstStyle/>
-          <a:p>
-            <a:pPr algn="r"/>
-            <a:endParaRPr lang="en-GB" sz="1500" b="1">
-              <a:solidFill>
-                <a:srgbClr val="FF0000"/>
-              </a:solidFill>
-            </a:endParaRPr>
-          </a:p>
-        </p:txBody>
-      </p:sp>
-      <p:sp>
-        <p:nvSpPr>
-          <p:cNvPr id="132" name="Rectangle 131">
-            <a:extLst>
-              <a:ext uri="{FF2B5EF4-FFF2-40B4-BE49-F238E27FC236}">
-                <a16:creationId xmlns:a16="http://schemas.microsoft.com/office/drawing/2014/main" id="{316CC465-4D36-4EA4-ADB2-EC62D1C6BABB}"/>
-              </a:ext>
-            </a:extLst>
-          </p:cNvPr>
-          <p:cNvSpPr/>
-          <p:nvPr/>
-        </p:nvSpPr>
-        <p:spPr>
-          <a:xfrm>
-            <a:off x="4895229" y="3527385"/>
-            <a:ext cx="567000" cy="652810"/>
-          </a:xfrm>
-          <a:prstGeom prst="rect">
-            <a:avLst/>
-          </a:prstGeom>
-          <a:solidFill>
-            <a:schemeClr val="accent1">
-              <a:lumMod val="50000"/>
-            </a:schemeClr>
-          </a:solidFill>
-          <a:ln>
-            <a:noFill/>
-          </a:ln>
-          <a:effectLst/>
-        </p:spPr>
-        <p:style>
-          <a:lnRef idx="1">
-            <a:schemeClr val="accent1"/>
-          </a:lnRef>
-          <a:fillRef idx="3">
-            <a:schemeClr val="accent1"/>
-          </a:fillRef>
-          <a:effectRef idx="2">
-            <a:schemeClr val="accent1"/>
-          </a:effectRef>
-          <a:fontRef idx="minor">
-            <a:schemeClr val="lt1"/>
-          </a:fontRef>
-        </p:style>
-        <p:txBody>
-          <a:bodyPr lIns="0" rIns="0" rtlCol="0" anchor="t"/>
-          <a:lstStyle/>
-          <a:p>
-            <a:pPr algn="ctr" defTabSz="685800" eaLnBrk="0" fontAlgn="base" hangingPunct="0">
-              <a:lnSpc>
-                <a:spcPct val="80000"/>
-              </a:lnSpc>
-              <a:spcBef>
-                <a:spcPct val="0"/>
-              </a:spcBef>
-              <a:spcAft>
-                <a:spcPct val="0"/>
-              </a:spcAft>
-              <a:defRPr/>
-            </a:pPr>
-            <a:r>
-              <a:rPr lang="en-US" sz="1350">
-                <a:solidFill>
-                  <a:srgbClr val="E5ECEB"/>
-                </a:solidFill>
-                <a:latin typeface="Calibri"/>
-                <a:cs typeface="Calibri"/>
-              </a:rPr>
-              <a:t>SRAM</a:t>
-            </a:r>
-          </a:p>
-        </p:txBody>
-      </p:sp>
-      <p:cxnSp>
-        <p:nvCxnSpPr>
-          <p:cNvPr id="133" name="Straight Connector 132">
-            <a:extLst>
-              <a:ext uri="{FF2B5EF4-FFF2-40B4-BE49-F238E27FC236}">
-                <a16:creationId xmlns:a16="http://schemas.microsoft.com/office/drawing/2014/main" id="{2AFF8EAC-D7C2-42C5-B39E-079AD7CC94B8}"/>
-              </a:ext>
-            </a:extLst>
-          </p:cNvPr>
-          <p:cNvCxnSpPr>
-            <a:cxnSpLocks/>
-            <a:endCxn id="132" idx="0"/>
-          </p:cNvCxnSpPr>
-          <p:nvPr/>
-        </p:nvCxnSpPr>
-        <p:spPr>
-          <a:xfrm flipH="1">
-            <a:off x="5178729" y="2752578"/>
-            <a:ext cx="0" cy="774808"/>
-          </a:xfrm>
-          <a:prstGeom prst="line">
-            <a:avLst/>
-          </a:prstGeom>
-          <a:ln w="28575">
-            <a:solidFill>
-              <a:schemeClr val="accent6">
-                <a:lumMod val="75000"/>
-              </a:schemeClr>
-            </a:solidFill>
-            <a:headEnd type="none" w="med" len="med"/>
-            <a:tailEnd type="none" w="med" len="med"/>
-          </a:ln>
-          <a:effectLst/>
-        </p:spPr>
-        <p:style>
-          <a:lnRef idx="2">
-            <a:schemeClr val="accent1"/>
-          </a:lnRef>
-          <a:fillRef idx="0">
-            <a:schemeClr val="accent1"/>
-          </a:fillRef>
-          <a:effectRef idx="1">
-            <a:schemeClr val="accent1"/>
-          </a:effectRef>
-          <a:fontRef idx="minor">
-            <a:schemeClr val="tx1"/>
-          </a:fontRef>
-        </p:style>
-      </p:cxnSp>
-      <p:sp>
-        <p:nvSpPr>
-          <p:cNvPr id="134" name="Rectangle 133">
-            <a:extLst>
-              <a:ext uri="{FF2B5EF4-FFF2-40B4-BE49-F238E27FC236}">
-                <a16:creationId xmlns:a16="http://schemas.microsoft.com/office/drawing/2014/main" id="{324E2AF5-9A46-4ED9-8CAA-5E2BA213F0A2}"/>
-              </a:ext>
-            </a:extLst>
-          </p:cNvPr>
-          <p:cNvSpPr/>
-          <p:nvPr/>
-        </p:nvSpPr>
-        <p:spPr>
-          <a:xfrm>
-            <a:off x="4895229" y="3013382"/>
-            <a:ext cx="567000" cy="270000"/>
-          </a:xfrm>
-          <a:prstGeom prst="rect">
-            <a:avLst/>
-          </a:prstGeom>
-          <a:solidFill>
-            <a:schemeClr val="accent1"/>
-          </a:solidFill>
-          <a:ln w="19050" cmpd="sng">
-            <a:noFill/>
-          </a:ln>
-          <a:effectLst/>
-        </p:spPr>
-        <p:style>
-          <a:lnRef idx="1">
-            <a:schemeClr val="accent1"/>
-          </a:lnRef>
-          <a:fillRef idx="3">
-            <a:schemeClr val="accent1"/>
-          </a:fillRef>
-          <a:effectRef idx="2">
-            <a:schemeClr val="accent1"/>
-          </a:effectRef>
-          <a:fontRef idx="minor">
-            <a:schemeClr val="lt1"/>
-          </a:fontRef>
-        </p:style>
-        <p:txBody>
-          <a:bodyPr wrap="none" lIns="0" tIns="35100" rIns="0" rtlCol="0" anchor="ctr"/>
-          <a:lstStyle/>
-          <a:p>
-            <a:pPr algn="ctr" defTabSz="685800" eaLnBrk="0" fontAlgn="base" hangingPunct="0">
-              <a:lnSpc>
-                <a:spcPct val="80000"/>
-              </a:lnSpc>
-              <a:spcBef>
-                <a:spcPct val="0"/>
-              </a:spcBef>
-              <a:spcAft>
-                <a:spcPct val="0"/>
-              </a:spcAft>
-              <a:defRPr/>
-            </a:pPr>
-            <a:r>
-              <a:rPr lang="en-US" sz="1350">
-                <a:solidFill>
-                  <a:prstClr val="white"/>
-                </a:solidFill>
-                <a:latin typeface="Calibri"/>
-                <a:cs typeface="Calibri"/>
-              </a:rPr>
-              <a:t>MPC</a:t>
-            </a:r>
-            <a:endParaRPr lang="en-US" sz="825">
-              <a:solidFill>
-                <a:prstClr val="white"/>
-              </a:solidFill>
-              <a:latin typeface="Calibri"/>
-              <a:cs typeface="Calibri"/>
-            </a:endParaRPr>
-          </a:p>
-        </p:txBody>
-      </p:sp>
-      <p:cxnSp>
-        <p:nvCxnSpPr>
-          <p:cNvPr id="138" name="Straight Connector 137">
-            <a:extLst>
-              <a:ext uri="{FF2B5EF4-FFF2-40B4-BE49-F238E27FC236}">
-                <a16:creationId xmlns:a16="http://schemas.microsoft.com/office/drawing/2014/main" id="{6CBADFF3-B5B6-48E0-B044-282DA93A919F}"/>
-              </a:ext>
-            </a:extLst>
-          </p:cNvPr>
-          <p:cNvCxnSpPr>
-            <a:cxnSpLocks/>
-            <a:endCxn id="139" idx="0"/>
-          </p:cNvCxnSpPr>
-          <p:nvPr/>
-        </p:nvCxnSpPr>
-        <p:spPr>
-          <a:xfrm flipH="1">
-            <a:off x="5811212" y="2834358"/>
-            <a:ext cx="0" cy="697838"/>
-          </a:xfrm>
-          <a:prstGeom prst="line">
-            <a:avLst/>
-          </a:prstGeom>
-          <a:ln w="28575">
-            <a:solidFill>
-              <a:schemeClr val="accent6">
-                <a:lumMod val="75000"/>
-              </a:schemeClr>
-            </a:solidFill>
-            <a:headEnd type="none" w="med" len="med"/>
-            <a:tailEnd type="none" w="med" len="med"/>
-          </a:ln>
-          <a:effectLst/>
-        </p:spPr>
-        <p:style>
-          <a:lnRef idx="2">
-            <a:schemeClr val="accent1"/>
-          </a:lnRef>
-          <a:fillRef idx="0">
-            <a:schemeClr val="accent1"/>
-          </a:fillRef>
-          <a:effectRef idx="1">
-            <a:schemeClr val="accent1"/>
-          </a:effectRef>
-          <a:fontRef idx="minor">
-            <a:schemeClr val="tx1"/>
-          </a:fontRef>
-        </p:style>
-      </p:cxnSp>
-      <p:sp>
-        <p:nvSpPr>
-          <p:cNvPr id="139" name="Rectangle 138">
-            <a:extLst>
-              <a:ext uri="{FF2B5EF4-FFF2-40B4-BE49-F238E27FC236}">
-                <a16:creationId xmlns:a16="http://schemas.microsoft.com/office/drawing/2014/main" id="{DD1FA50B-E26E-4F75-A6BF-9AD753FFE1DA}"/>
-              </a:ext>
-            </a:extLst>
-          </p:cNvPr>
-          <p:cNvSpPr/>
-          <p:nvPr/>
-        </p:nvSpPr>
-        <p:spPr>
-          <a:xfrm>
-            <a:off x="5527712" y="3532196"/>
-            <a:ext cx="567000" cy="648000"/>
-          </a:xfrm>
-          <a:prstGeom prst="rect">
-            <a:avLst/>
-          </a:prstGeom>
-          <a:solidFill>
-            <a:schemeClr val="accent1">
-              <a:lumMod val="50000"/>
-            </a:schemeClr>
-          </a:solidFill>
-          <a:ln>
-            <a:noFill/>
-          </a:ln>
-          <a:effectLst/>
-        </p:spPr>
-        <p:style>
-          <a:lnRef idx="1">
-            <a:schemeClr val="accent1"/>
-          </a:lnRef>
-          <a:fillRef idx="3">
-            <a:schemeClr val="accent1"/>
-          </a:fillRef>
-          <a:effectRef idx="2">
-            <a:schemeClr val="accent1"/>
-          </a:effectRef>
-          <a:fontRef idx="minor">
-            <a:schemeClr val="lt1"/>
-          </a:fontRef>
-        </p:style>
-        <p:txBody>
-          <a:bodyPr lIns="0" rIns="0" rtlCol="0" anchor="t"/>
-          <a:lstStyle/>
-          <a:p>
-            <a:pPr algn="ctr" defTabSz="685800" eaLnBrk="0" fontAlgn="base" hangingPunct="0">
-              <a:lnSpc>
-                <a:spcPct val="80000"/>
-              </a:lnSpc>
-              <a:spcBef>
-                <a:spcPct val="0"/>
-              </a:spcBef>
-              <a:spcAft>
-                <a:spcPct val="0"/>
-              </a:spcAft>
-              <a:defRPr/>
-            </a:pPr>
-            <a:r>
-              <a:rPr lang="en-US" sz="1350">
-                <a:solidFill>
-                  <a:srgbClr val="E5ECEB"/>
-                </a:solidFill>
-                <a:latin typeface="Calibri"/>
-                <a:cs typeface="Calibri"/>
-              </a:rPr>
-              <a:t>Flash</a:t>
-            </a:r>
-          </a:p>
-        </p:txBody>
-      </p:sp>
-      <p:sp>
-        <p:nvSpPr>
-          <p:cNvPr id="140" name="Rectangle 139">
-            <a:extLst>
-              <a:ext uri="{FF2B5EF4-FFF2-40B4-BE49-F238E27FC236}">
-                <a16:creationId xmlns:a16="http://schemas.microsoft.com/office/drawing/2014/main" id="{469261ED-A28E-4484-A6AD-5FEC582260BA}"/>
-              </a:ext>
-            </a:extLst>
-          </p:cNvPr>
-          <p:cNvSpPr/>
-          <p:nvPr/>
-        </p:nvSpPr>
-        <p:spPr>
-          <a:xfrm>
-            <a:off x="5527712" y="3013382"/>
-            <a:ext cx="567000" cy="270000"/>
-          </a:xfrm>
-          <a:prstGeom prst="rect">
-            <a:avLst/>
-          </a:prstGeom>
-          <a:solidFill>
-            <a:schemeClr val="accent1"/>
-          </a:solidFill>
-          <a:ln w="19050" cmpd="sng">
-            <a:noFill/>
-          </a:ln>
-          <a:effectLst/>
-        </p:spPr>
-        <p:style>
-          <a:lnRef idx="1">
-            <a:schemeClr val="accent1"/>
-          </a:lnRef>
-          <a:fillRef idx="3">
-            <a:schemeClr val="accent1"/>
-          </a:fillRef>
-          <a:effectRef idx="2">
-            <a:schemeClr val="accent1"/>
-          </a:effectRef>
-          <a:fontRef idx="minor">
-            <a:schemeClr val="lt1"/>
-          </a:fontRef>
-        </p:style>
-        <p:txBody>
-          <a:bodyPr wrap="none" lIns="0" tIns="35100" rIns="0" rtlCol="0" anchor="ctr"/>
-          <a:lstStyle/>
-          <a:p>
-            <a:pPr lvl="0" algn="ctr">
-              <a:lnSpc>
-                <a:spcPct val="80000"/>
-              </a:lnSpc>
-              <a:defRPr/>
-            </a:pPr>
-            <a:r>
-              <a:rPr lang="en-US" sz="1350">
-                <a:solidFill>
-                  <a:prstClr val="white"/>
-                </a:solidFill>
-                <a:cs typeface="Calibri"/>
-              </a:rPr>
-              <a:t>MPC</a:t>
-            </a:r>
-            <a:endParaRPr lang="en-US" sz="825">
-              <a:solidFill>
-                <a:prstClr val="white"/>
-              </a:solidFill>
-              <a:cs typeface="Calibri"/>
-            </a:endParaRPr>
-          </a:p>
-        </p:txBody>
-      </p:sp>
-      <p:cxnSp>
-        <p:nvCxnSpPr>
-          <p:cNvPr id="149" name="Straight Connector 148">
-            <a:extLst>
-              <a:ext uri="{FF2B5EF4-FFF2-40B4-BE49-F238E27FC236}">
-                <a16:creationId xmlns:a16="http://schemas.microsoft.com/office/drawing/2014/main" id="{3E1325DA-CE89-4328-B9B6-16BCBB4F132E}"/>
-              </a:ext>
-            </a:extLst>
-          </p:cNvPr>
-          <p:cNvCxnSpPr>
-            <a:cxnSpLocks/>
-          </p:cNvCxnSpPr>
-          <p:nvPr/>
-        </p:nvCxnSpPr>
-        <p:spPr>
-          <a:xfrm flipH="1">
-            <a:off x="6491111" y="3401195"/>
-            <a:ext cx="0" cy="135000"/>
-          </a:xfrm>
-          <a:prstGeom prst="line">
-            <a:avLst/>
-          </a:prstGeom>
-          <a:ln w="28575">
-            <a:solidFill>
-              <a:schemeClr val="accent6">
-                <a:lumMod val="75000"/>
-              </a:schemeClr>
-            </a:solidFill>
-            <a:headEnd type="none" w="med" len="med"/>
-            <a:tailEnd type="none" w="med" len="med"/>
-          </a:ln>
-          <a:effectLst/>
-        </p:spPr>
-        <p:style>
-          <a:lnRef idx="2">
-            <a:schemeClr val="accent1"/>
-          </a:lnRef>
-          <a:fillRef idx="0">
-            <a:schemeClr val="accent1"/>
-          </a:fillRef>
-          <a:effectRef idx="1">
-            <a:schemeClr val="accent1"/>
-          </a:effectRef>
-          <a:fontRef idx="minor">
-            <a:schemeClr val="tx1"/>
-          </a:fontRef>
-        </p:style>
-      </p:cxnSp>
-      <p:cxnSp>
-        <p:nvCxnSpPr>
-          <p:cNvPr id="152" name="Straight Connector 151">
-            <a:extLst>
-              <a:ext uri="{FF2B5EF4-FFF2-40B4-BE49-F238E27FC236}">
-                <a16:creationId xmlns:a16="http://schemas.microsoft.com/office/drawing/2014/main" id="{91D912CA-4025-4089-988A-6B625CD3D9C1}"/>
-              </a:ext>
-            </a:extLst>
-          </p:cNvPr>
-          <p:cNvCxnSpPr>
-            <a:cxnSpLocks/>
-            <a:endCxn id="165" idx="0"/>
-          </p:cNvCxnSpPr>
-          <p:nvPr/>
-        </p:nvCxnSpPr>
-        <p:spPr>
-          <a:xfrm>
-            <a:off x="7395794" y="2834359"/>
-            <a:ext cx="0" cy="701837"/>
-          </a:xfrm>
-          <a:prstGeom prst="line">
-            <a:avLst/>
-          </a:prstGeom>
-          <a:ln w="28575">
-            <a:solidFill>
-              <a:schemeClr val="accent6">
-                <a:lumMod val="75000"/>
-              </a:schemeClr>
-            </a:solidFill>
-            <a:headEnd type="none" w="med" len="med"/>
-            <a:tailEnd type="none" w="med" len="med"/>
-          </a:ln>
-          <a:effectLst/>
-        </p:spPr>
-        <p:style>
-          <a:lnRef idx="2">
-            <a:schemeClr val="accent1"/>
-          </a:lnRef>
-          <a:fillRef idx="0">
-            <a:schemeClr val="accent1"/>
-          </a:fillRef>
-          <a:effectRef idx="1">
-            <a:schemeClr val="accent1"/>
-          </a:effectRef>
-          <a:fontRef idx="minor">
-            <a:schemeClr val="tx1"/>
-          </a:fontRef>
-        </p:style>
-      </p:cxnSp>
-      <p:cxnSp>
-        <p:nvCxnSpPr>
-          <p:cNvPr id="158" name="Straight Connector 157">
-            <a:extLst>
-              <a:ext uri="{FF2B5EF4-FFF2-40B4-BE49-F238E27FC236}">
-                <a16:creationId xmlns:a16="http://schemas.microsoft.com/office/drawing/2014/main" id="{E95E01EE-1905-4A8A-BD12-B2BA4192FD24}"/>
-              </a:ext>
-            </a:extLst>
-          </p:cNvPr>
-          <p:cNvCxnSpPr>
-            <a:cxnSpLocks/>
-          </p:cNvCxnSpPr>
-          <p:nvPr/>
-        </p:nvCxnSpPr>
-        <p:spPr>
-          <a:xfrm flipH="1">
-            <a:off x="8312657" y="3405983"/>
-            <a:ext cx="0" cy="135000"/>
-          </a:xfrm>
-          <a:prstGeom prst="line">
-            <a:avLst/>
-          </a:prstGeom>
-          <a:ln w="28575">
-            <a:solidFill>
-              <a:schemeClr val="accent6">
-                <a:lumMod val="75000"/>
-              </a:schemeClr>
-            </a:solidFill>
-            <a:headEnd type="none" w="med" len="med"/>
-            <a:tailEnd type="none" w="med" len="med"/>
-          </a:ln>
-          <a:effectLst/>
-        </p:spPr>
-        <p:style>
-          <a:lnRef idx="2">
-            <a:schemeClr val="accent1"/>
-          </a:lnRef>
-          <a:fillRef idx="0">
-            <a:schemeClr val="accent1"/>
-          </a:fillRef>
-          <a:effectRef idx="1">
-            <a:schemeClr val="accent1"/>
-          </a:effectRef>
-          <a:fontRef idx="minor">
-            <a:schemeClr val="tx1"/>
-          </a:fontRef>
-        </p:style>
-      </p:cxnSp>
-      <p:cxnSp>
-        <p:nvCxnSpPr>
-          <p:cNvPr id="159" name="Straight Connector 158">
-            <a:extLst>
-              <a:ext uri="{FF2B5EF4-FFF2-40B4-BE49-F238E27FC236}">
-                <a16:creationId xmlns:a16="http://schemas.microsoft.com/office/drawing/2014/main" id="{C21FDA0B-5664-4C51-820F-DF5916ABF027}"/>
-              </a:ext>
-            </a:extLst>
-          </p:cNvPr>
-          <p:cNvCxnSpPr>
-            <a:cxnSpLocks/>
-          </p:cNvCxnSpPr>
-          <p:nvPr/>
-        </p:nvCxnSpPr>
-        <p:spPr>
-          <a:xfrm flipH="1">
-            <a:off x="8531155" y="3405983"/>
-            <a:ext cx="0" cy="135000"/>
-          </a:xfrm>
-          <a:prstGeom prst="line">
-            <a:avLst/>
-          </a:prstGeom>
-          <a:ln w="28575">
-            <a:solidFill>
-              <a:schemeClr val="accent6">
-                <a:lumMod val="75000"/>
-              </a:schemeClr>
-            </a:solidFill>
-            <a:headEnd type="none" w="med" len="med"/>
-            <a:tailEnd type="none" w="med" len="med"/>
-          </a:ln>
-          <a:effectLst/>
-        </p:spPr>
-        <p:style>
-          <a:lnRef idx="2">
-            <a:schemeClr val="accent1"/>
-          </a:lnRef>
-          <a:fillRef idx="0">
-            <a:schemeClr val="accent1"/>
-          </a:fillRef>
-          <a:effectRef idx="1">
-            <a:schemeClr val="accent1"/>
-          </a:effectRef>
-          <a:fontRef idx="minor">
-            <a:schemeClr val="tx1"/>
-          </a:fontRef>
-        </p:style>
-      </p:cxnSp>
-      <p:cxnSp>
-        <p:nvCxnSpPr>
-          <p:cNvPr id="160" name="Straight Connector 159">
-            <a:extLst>
-              <a:ext uri="{FF2B5EF4-FFF2-40B4-BE49-F238E27FC236}">
-                <a16:creationId xmlns:a16="http://schemas.microsoft.com/office/drawing/2014/main" id="{297D7055-4A2E-42C5-B230-608B59AB4087}"/>
-              </a:ext>
-            </a:extLst>
-          </p:cNvPr>
-          <p:cNvCxnSpPr>
-            <a:cxnSpLocks/>
-          </p:cNvCxnSpPr>
-          <p:nvPr/>
-        </p:nvCxnSpPr>
-        <p:spPr>
-          <a:xfrm flipH="1">
-            <a:off x="6491112" y="3405983"/>
-            <a:ext cx="2050763" cy="0"/>
-          </a:xfrm>
-          <a:prstGeom prst="line">
-            <a:avLst/>
-          </a:prstGeom>
-          <a:ln w="28575">
-            <a:solidFill>
-              <a:schemeClr val="accent6">
-                <a:lumMod val="75000"/>
-              </a:schemeClr>
-            </a:solidFill>
-            <a:headEnd type="none" w="med" len="med"/>
-            <a:tailEnd type="none" w="med" len="med"/>
-          </a:ln>
-          <a:effectLst/>
-        </p:spPr>
-        <p:style>
-          <a:lnRef idx="2">
-            <a:schemeClr val="accent1"/>
-          </a:lnRef>
-          <a:fillRef idx="0">
-            <a:schemeClr val="accent1"/>
-          </a:fillRef>
-          <a:effectRef idx="1">
-            <a:schemeClr val="accent1"/>
-          </a:effectRef>
-          <a:fontRef idx="minor">
-            <a:schemeClr val="tx1"/>
-          </a:fontRef>
-        </p:style>
-      </p:cxnSp>
-      <p:sp>
-        <p:nvSpPr>
-          <p:cNvPr id="162" name="Rectangle 161">
-            <a:extLst>
-              <a:ext uri="{FF2B5EF4-FFF2-40B4-BE49-F238E27FC236}">
-                <a16:creationId xmlns:a16="http://schemas.microsoft.com/office/drawing/2014/main" id="{28E23E16-A4FB-41F0-999C-3BDF11EE757D}"/>
-              </a:ext>
-            </a:extLst>
-          </p:cNvPr>
-          <p:cNvSpPr/>
-          <p:nvPr/>
-        </p:nvSpPr>
-        <p:spPr>
-          <a:xfrm>
-            <a:off x="6384431" y="3536195"/>
-            <a:ext cx="189000" cy="648000"/>
-          </a:xfrm>
-          <a:prstGeom prst="rect">
-            <a:avLst/>
-          </a:prstGeom>
-          <a:solidFill>
-            <a:schemeClr val="accent1">
-              <a:lumMod val="50000"/>
-            </a:schemeClr>
-          </a:solidFill>
-          <a:ln>
-            <a:noFill/>
-          </a:ln>
-        </p:spPr>
-        <p:style>
-          <a:lnRef idx="2">
-            <a:schemeClr val="accent5">
-              <a:shade val="50000"/>
-            </a:schemeClr>
-          </a:lnRef>
-          <a:fillRef idx="1">
-            <a:schemeClr val="accent5"/>
-          </a:fillRef>
-          <a:effectRef idx="0">
-            <a:schemeClr val="accent5"/>
-          </a:effectRef>
-          <a:fontRef idx="minor">
-            <a:schemeClr val="lt1"/>
-          </a:fontRef>
-        </p:style>
-        <p:txBody>
-          <a:bodyPr vert="vert270" rtlCol="0" anchor="ctr"/>
-          <a:lstStyle/>
-          <a:p>
-            <a:pPr algn="ctr" defTabSz="685800" eaLnBrk="0" fontAlgn="base" hangingPunct="0">
-              <a:spcBef>
-                <a:spcPct val="0"/>
-              </a:spcBef>
-              <a:spcAft>
-                <a:spcPct val="0"/>
-              </a:spcAft>
-              <a:defRPr/>
-            </a:pPr>
-            <a:r>
-              <a:rPr lang="en-US" sz="1050">
-                <a:solidFill>
-                  <a:srgbClr val="E5ECEB"/>
-                </a:solidFill>
-                <a:latin typeface="Calibri"/>
-              </a:rPr>
-              <a:t>SDIO</a:t>
-            </a:r>
-          </a:p>
-        </p:txBody>
-      </p:sp>
-      <p:sp>
-        <p:nvSpPr>
-          <p:cNvPr id="165" name="Rectangle 164">
-            <a:extLst>
-              <a:ext uri="{FF2B5EF4-FFF2-40B4-BE49-F238E27FC236}">
-                <a16:creationId xmlns:a16="http://schemas.microsoft.com/office/drawing/2014/main" id="{50028E1C-4A01-482A-B88C-8DC8943E83C2}"/>
-              </a:ext>
-            </a:extLst>
-          </p:cNvPr>
-          <p:cNvSpPr/>
-          <p:nvPr/>
-        </p:nvSpPr>
-        <p:spPr>
-          <a:xfrm>
-            <a:off x="7301294" y="3536195"/>
-            <a:ext cx="189000" cy="648000"/>
-          </a:xfrm>
-          <a:prstGeom prst="rect">
-            <a:avLst/>
-          </a:prstGeom>
-          <a:solidFill>
-            <a:schemeClr val="accent1">
-              <a:lumMod val="50000"/>
-            </a:schemeClr>
-          </a:solidFill>
-          <a:ln>
-            <a:noFill/>
-          </a:ln>
-        </p:spPr>
-        <p:style>
-          <a:lnRef idx="2">
-            <a:schemeClr val="accent5">
-              <a:shade val="50000"/>
-            </a:schemeClr>
-          </a:lnRef>
-          <a:fillRef idx="1">
-            <a:schemeClr val="accent5"/>
-          </a:fillRef>
-          <a:effectRef idx="0">
-            <a:schemeClr val="accent5"/>
-          </a:effectRef>
-          <a:fontRef idx="minor">
-            <a:schemeClr val="lt1"/>
-          </a:fontRef>
-        </p:style>
-        <p:txBody>
-          <a:bodyPr vert="vert270" rtlCol="0" anchor="ctr"/>
-          <a:lstStyle/>
-          <a:p>
-            <a:pPr algn="ctr" defTabSz="685800" eaLnBrk="0" fontAlgn="base" hangingPunct="0">
-              <a:spcBef>
-                <a:spcPct val="0"/>
-              </a:spcBef>
-              <a:spcAft>
-                <a:spcPct val="0"/>
-              </a:spcAft>
-              <a:defRPr/>
-            </a:pPr>
-            <a:r>
-              <a:rPr lang="en-US" sz="1050">
-                <a:solidFill>
-                  <a:srgbClr val="E5ECEB"/>
-                </a:solidFill>
-                <a:latin typeface="Calibri"/>
-              </a:rPr>
-              <a:t>USART</a:t>
-            </a:r>
-          </a:p>
-        </p:txBody>
-      </p:sp>
-      <p:sp>
-        <p:nvSpPr>
-          <p:cNvPr id="166" name="Rectangle 165">
-            <a:extLst>
-              <a:ext uri="{FF2B5EF4-FFF2-40B4-BE49-F238E27FC236}">
-                <a16:creationId xmlns:a16="http://schemas.microsoft.com/office/drawing/2014/main" id="{D4258A0C-AB40-4A00-A98C-577A4B865FFD}"/>
-              </a:ext>
-            </a:extLst>
-          </p:cNvPr>
-          <p:cNvSpPr/>
-          <p:nvPr/>
-        </p:nvSpPr>
-        <p:spPr>
-          <a:xfrm>
-            <a:off x="8218157" y="3536195"/>
-            <a:ext cx="189000" cy="648000"/>
-          </a:xfrm>
-          <a:prstGeom prst="rect">
-            <a:avLst/>
-          </a:prstGeom>
-          <a:solidFill>
-            <a:schemeClr val="accent1">
-              <a:lumMod val="50000"/>
-            </a:schemeClr>
-          </a:solidFill>
-          <a:ln>
-            <a:noFill/>
-          </a:ln>
-        </p:spPr>
-        <p:style>
-          <a:lnRef idx="2">
-            <a:schemeClr val="accent5">
-              <a:shade val="50000"/>
-            </a:schemeClr>
-          </a:lnRef>
-          <a:fillRef idx="1">
-            <a:schemeClr val="accent5"/>
-          </a:fillRef>
-          <a:effectRef idx="0">
-            <a:schemeClr val="accent5"/>
-          </a:effectRef>
-          <a:fontRef idx="minor">
-            <a:schemeClr val="lt1"/>
-          </a:fontRef>
-        </p:style>
-        <p:txBody>
-          <a:bodyPr vert="vert270" rtlCol="0" anchor="ctr"/>
-          <a:lstStyle/>
-          <a:p>
-            <a:pPr algn="ctr" defTabSz="685800" eaLnBrk="0" fontAlgn="base" hangingPunct="0">
-              <a:spcBef>
-                <a:spcPct val="0"/>
-              </a:spcBef>
-              <a:spcAft>
-                <a:spcPct val="0"/>
-              </a:spcAft>
-              <a:defRPr/>
-            </a:pPr>
-            <a:r>
-              <a:rPr lang="en-US" sz="1050">
-                <a:solidFill>
-                  <a:srgbClr val="E5ECEB"/>
-                </a:solidFill>
-                <a:latin typeface="Calibri"/>
-              </a:rPr>
-              <a:t>GPIO</a:t>
-            </a:r>
-          </a:p>
-        </p:txBody>
-      </p:sp>
-      <p:sp>
-        <p:nvSpPr>
-          <p:cNvPr id="169" name="Rectangle 168">
-            <a:extLst>
-              <a:ext uri="{FF2B5EF4-FFF2-40B4-BE49-F238E27FC236}">
-                <a16:creationId xmlns:a16="http://schemas.microsoft.com/office/drawing/2014/main" id="{B805E546-80FF-4200-80C8-C6580A137E78}"/>
-              </a:ext>
-            </a:extLst>
-          </p:cNvPr>
-          <p:cNvSpPr/>
-          <p:nvPr/>
-        </p:nvSpPr>
-        <p:spPr>
-          <a:xfrm>
-            <a:off x="8447374" y="3536195"/>
-            <a:ext cx="189000" cy="648000"/>
-          </a:xfrm>
-          <a:prstGeom prst="rect">
-            <a:avLst/>
-          </a:prstGeom>
-          <a:solidFill>
-            <a:schemeClr val="accent1">
-              <a:lumMod val="50000"/>
-            </a:schemeClr>
-          </a:solidFill>
-          <a:ln>
-            <a:noFill/>
-          </a:ln>
-        </p:spPr>
-        <p:style>
-          <a:lnRef idx="2">
-            <a:schemeClr val="accent5">
-              <a:shade val="50000"/>
-            </a:schemeClr>
-          </a:lnRef>
-          <a:fillRef idx="1">
-            <a:schemeClr val="accent5"/>
-          </a:fillRef>
-          <a:effectRef idx="0">
-            <a:schemeClr val="accent5"/>
-          </a:effectRef>
-          <a:fontRef idx="minor">
-            <a:schemeClr val="lt1"/>
-          </a:fontRef>
-        </p:style>
-        <p:txBody>
-          <a:bodyPr vert="vert270" rtlCol="0" anchor="ctr"/>
-          <a:lstStyle/>
-          <a:p>
-            <a:pPr algn="ctr" defTabSz="685800" eaLnBrk="0" fontAlgn="base" hangingPunct="0">
-              <a:spcBef>
-                <a:spcPct val="0"/>
-              </a:spcBef>
-              <a:spcAft>
-                <a:spcPct val="0"/>
-              </a:spcAft>
-              <a:defRPr/>
-            </a:pPr>
-            <a:r>
-              <a:rPr lang="en-US" sz="1050">
-                <a:solidFill>
-                  <a:srgbClr val="E5ECEB"/>
-                </a:solidFill>
-                <a:latin typeface="Calibri"/>
-              </a:rPr>
-              <a:t>RTC</a:t>
-            </a:r>
-          </a:p>
-        </p:txBody>
-      </p:sp>
-      <p:sp>
-        <p:nvSpPr>
-          <p:cNvPr id="27" name="Rectangle 26">
-            <a:extLst>
-              <a:ext uri="{FF2B5EF4-FFF2-40B4-BE49-F238E27FC236}">
-                <a16:creationId xmlns:a16="http://schemas.microsoft.com/office/drawing/2014/main" id="{FDA7B3BA-4396-4E0C-A97C-8EE175E521EB}"/>
-              </a:ext>
-            </a:extLst>
-          </p:cNvPr>
-          <p:cNvSpPr/>
-          <p:nvPr/>
-        </p:nvSpPr>
-        <p:spPr>
-          <a:xfrm>
-            <a:off x="4895229" y="3771388"/>
-            <a:ext cx="567000" cy="408807"/>
-          </a:xfrm>
-          <a:prstGeom prst="rect">
-            <a:avLst/>
-          </a:prstGeom>
-          <a:solidFill>
-            <a:srgbClr val="7D868C"/>
-          </a:solidFill>
-          <a:ln>
-            <a:noFill/>
-          </a:ln>
-        </p:spPr>
-        <p:style>
-          <a:lnRef idx="2">
-            <a:schemeClr val="accent1">
-              <a:shade val="50000"/>
-            </a:schemeClr>
-          </a:lnRef>
-          <a:fillRef idx="1">
-            <a:schemeClr val="accent1"/>
-          </a:fillRef>
-          <a:effectRef idx="0">
-            <a:schemeClr val="accent1"/>
-          </a:effectRef>
-          <a:fontRef idx="minor">
-            <a:schemeClr val="lt1"/>
-          </a:fontRef>
-        </p:style>
-        <p:txBody>
-          <a:bodyPr rtlCol="0" anchor="ctr"/>
-          <a:lstStyle/>
-          <a:p>
-            <a:pPr algn="ctr"/>
-            <a:endParaRPr lang="en-US" sz="1200"/>
-          </a:p>
-        </p:txBody>
-      </p:sp>
-      <p:sp>
-        <p:nvSpPr>
-          <p:cNvPr id="172" name="Rectangle 171">
-            <a:extLst>
-              <a:ext uri="{FF2B5EF4-FFF2-40B4-BE49-F238E27FC236}">
-                <a16:creationId xmlns:a16="http://schemas.microsoft.com/office/drawing/2014/main" id="{4DF3E6BE-F994-4104-81FA-129E4DD2DED3}"/>
-              </a:ext>
-            </a:extLst>
-          </p:cNvPr>
-          <p:cNvSpPr/>
-          <p:nvPr/>
-        </p:nvSpPr>
-        <p:spPr>
-          <a:xfrm>
-            <a:off x="5529163" y="3953692"/>
-            <a:ext cx="565549" cy="230504"/>
-          </a:xfrm>
-          <a:prstGeom prst="rect">
-            <a:avLst/>
-          </a:prstGeom>
-          <a:solidFill>
-            <a:srgbClr val="7D868C"/>
-          </a:solidFill>
-          <a:ln>
-            <a:noFill/>
-          </a:ln>
-        </p:spPr>
-        <p:style>
-          <a:lnRef idx="2">
-            <a:schemeClr val="accent1">
-              <a:shade val="50000"/>
-            </a:schemeClr>
-          </a:lnRef>
-          <a:fillRef idx="1">
-            <a:schemeClr val="accent1"/>
-          </a:fillRef>
-          <a:effectRef idx="0">
-            <a:schemeClr val="accent1"/>
-          </a:effectRef>
-          <a:fontRef idx="minor">
-            <a:schemeClr val="lt1"/>
-          </a:fontRef>
-        </p:style>
-        <p:txBody>
-          <a:bodyPr rtlCol="0" anchor="ctr"/>
-          <a:lstStyle/>
-          <a:p>
-            <a:pPr algn="ctr"/>
-            <a:endParaRPr lang="en-US" sz="1200"/>
-          </a:p>
-        </p:txBody>
-      </p:sp>
-      <p:sp>
-        <p:nvSpPr>
-          <p:cNvPr id="21" name="Rectangle 20"/>
-          <p:cNvSpPr/>
-          <p:nvPr/>
-        </p:nvSpPr>
-        <p:spPr>
-          <a:xfrm>
-            <a:off x="525706" y="2672644"/>
-            <a:ext cx="3739130" cy="209262"/>
-          </a:xfrm>
-          <a:prstGeom prst="rect">
-            <a:avLst/>
-          </a:prstGeom>
-          <a:solidFill>
-            <a:schemeClr val="accent6"/>
-          </a:solidFill>
-          <a:ln>
-            <a:noFill/>
-          </a:ln>
-          <a:effectLst/>
-        </p:spPr>
-        <p:style>
-          <a:lnRef idx="1">
-            <a:schemeClr val="accent1"/>
-          </a:lnRef>
-          <a:fillRef idx="3">
-            <a:schemeClr val="accent1"/>
-          </a:fillRef>
-          <a:effectRef idx="2">
-            <a:schemeClr val="accent1"/>
-          </a:effectRef>
-          <a:fontRef idx="minor">
-            <a:schemeClr val="lt1"/>
-          </a:fontRef>
-        </p:style>
-        <p:txBody>
-          <a:bodyPr rtlCol="0" anchor="ctr"/>
-          <a:lstStyle/>
-          <a:p>
-            <a:pPr algn="ctr" defTabSz="685800" eaLnBrk="0" fontAlgn="base" hangingPunct="0">
-              <a:spcBef>
-                <a:spcPct val="0"/>
-              </a:spcBef>
-              <a:spcAft>
-                <a:spcPct val="0"/>
-              </a:spcAft>
-              <a:defRPr/>
-            </a:pPr>
-            <a:r>
-              <a:rPr lang="en-US" sz="825">
-                <a:solidFill>
-                  <a:prstClr val="white"/>
-                </a:solidFill>
-                <a:latin typeface="Calibri"/>
-                <a:cs typeface="Calibri"/>
-              </a:rPr>
-              <a:t>Multi-layer AHB5 interconnect</a:t>
-            </a:r>
-          </a:p>
-        </p:txBody>
-      </p:sp>
-      <p:sp>
-        <p:nvSpPr>
-          <p:cNvPr id="104" name="Rectangle 103">
-            <a:extLst>
-              <a:ext uri="{FF2B5EF4-FFF2-40B4-BE49-F238E27FC236}">
-                <a16:creationId xmlns:a16="http://schemas.microsoft.com/office/drawing/2014/main" id="{3246EF98-A602-4A95-A4BF-6597EE6E78B4}"/>
-              </a:ext>
-            </a:extLst>
-          </p:cNvPr>
-          <p:cNvSpPr/>
-          <p:nvPr/>
-        </p:nvSpPr>
-        <p:spPr>
-          <a:xfrm>
-            <a:off x="2702555" y="3014612"/>
-            <a:ext cx="648000" cy="270000"/>
-          </a:xfrm>
-          <a:prstGeom prst="rect">
-            <a:avLst/>
-          </a:prstGeom>
-          <a:solidFill>
-            <a:schemeClr val="accent1"/>
-          </a:solidFill>
-          <a:ln w="19050" cmpd="sng">
-            <a:noFill/>
-          </a:ln>
-          <a:effectLst/>
-        </p:spPr>
-        <p:style>
-          <a:lnRef idx="1">
-            <a:schemeClr val="accent1"/>
-          </a:lnRef>
-          <a:fillRef idx="3">
-            <a:schemeClr val="accent1"/>
-          </a:fillRef>
-          <a:effectRef idx="2">
-            <a:schemeClr val="accent1"/>
-          </a:effectRef>
-          <a:fontRef idx="minor">
-            <a:schemeClr val="lt1"/>
-          </a:fontRef>
-        </p:style>
-        <p:txBody>
-          <a:bodyPr wrap="none" lIns="0" tIns="35100" rIns="0" rtlCol="0" anchor="ctr"/>
-          <a:lstStyle/>
-          <a:p>
-            <a:pPr lvl="0" algn="ctr">
-              <a:lnSpc>
-                <a:spcPct val="80000"/>
-              </a:lnSpc>
-              <a:defRPr/>
-            </a:pPr>
-            <a:r>
-              <a:rPr lang="en-US" sz="1350">
-                <a:solidFill>
-                  <a:prstClr val="white"/>
-                </a:solidFill>
-                <a:cs typeface="Calibri"/>
-              </a:rPr>
-              <a:t>PPC</a:t>
-            </a:r>
-            <a:endParaRPr lang="en-US" sz="825">
-              <a:solidFill>
-                <a:prstClr val="white"/>
-              </a:solidFill>
-              <a:cs typeface="Calibri"/>
-            </a:endParaRPr>
-          </a:p>
-        </p:txBody>
-      </p:sp>
-      <p:sp>
-        <p:nvSpPr>
-          <p:cNvPr id="147" name="Rectangle 146">
-            <a:extLst>
-              <a:ext uri="{FF2B5EF4-FFF2-40B4-BE49-F238E27FC236}">
-                <a16:creationId xmlns:a16="http://schemas.microsoft.com/office/drawing/2014/main" id="{63967DBB-C209-4CB1-BB8A-C7F1C4E8B679}"/>
-              </a:ext>
-            </a:extLst>
-          </p:cNvPr>
-          <p:cNvSpPr/>
-          <p:nvPr/>
-        </p:nvSpPr>
-        <p:spPr>
-          <a:xfrm>
-            <a:off x="7072079" y="3014612"/>
-            <a:ext cx="648000" cy="270000"/>
-          </a:xfrm>
-          <a:prstGeom prst="rect">
-            <a:avLst/>
-          </a:prstGeom>
-          <a:solidFill>
-            <a:schemeClr val="accent1"/>
-          </a:solidFill>
-          <a:ln w="19050" cmpd="sng">
-            <a:noFill/>
-          </a:ln>
-          <a:effectLst/>
-        </p:spPr>
-        <p:style>
-          <a:lnRef idx="1">
-            <a:schemeClr val="accent1"/>
-          </a:lnRef>
-          <a:fillRef idx="3">
-            <a:schemeClr val="accent1"/>
-          </a:fillRef>
-          <a:effectRef idx="2">
-            <a:schemeClr val="accent1"/>
-          </a:effectRef>
-          <a:fontRef idx="minor">
-            <a:schemeClr val="lt1"/>
-          </a:fontRef>
-        </p:style>
-        <p:txBody>
-          <a:bodyPr wrap="none" lIns="0" tIns="35100" rIns="0" rtlCol="0" anchor="ctr"/>
-          <a:lstStyle/>
-          <a:p>
-            <a:pPr lvl="0" algn="ctr">
-              <a:lnSpc>
-                <a:spcPct val="80000"/>
-              </a:lnSpc>
-              <a:defRPr/>
-            </a:pPr>
-            <a:r>
-              <a:rPr lang="en-US" sz="1350">
-                <a:solidFill>
-                  <a:prstClr val="white"/>
-                </a:solidFill>
-                <a:cs typeface="Calibri"/>
-              </a:rPr>
-              <a:t>PPC</a:t>
-            </a:r>
-            <a:endParaRPr lang="en-US" sz="825">
-              <a:solidFill>
-                <a:prstClr val="white"/>
-              </a:solidFill>
-              <a:cs typeface="Calibri"/>
-            </a:endParaRPr>
-          </a:p>
-        </p:txBody>
-      </p:sp>
-      <p:sp>
-        <p:nvSpPr>
-          <p:cNvPr id="128" name="Rectangle 127">
-            <a:extLst>
-              <a:ext uri="{FF2B5EF4-FFF2-40B4-BE49-F238E27FC236}">
-                <a16:creationId xmlns:a16="http://schemas.microsoft.com/office/drawing/2014/main" id="{93C67C50-A9A6-40D4-9870-D1B0C3C14DA7}"/>
-              </a:ext>
-            </a:extLst>
-          </p:cNvPr>
-          <p:cNvSpPr/>
-          <p:nvPr/>
-        </p:nvSpPr>
-        <p:spPr>
-          <a:xfrm rot="16200000">
-            <a:off x="5807665" y="1963764"/>
-            <a:ext cx="810000" cy="270000"/>
-          </a:xfrm>
-          <a:prstGeom prst="rect">
-            <a:avLst/>
-          </a:prstGeom>
-          <a:solidFill>
-            <a:schemeClr val="accent1"/>
-          </a:solidFill>
-          <a:ln w="19050" cmpd="sng">
-            <a:noFill/>
-          </a:ln>
-          <a:effectLst/>
-        </p:spPr>
-        <p:style>
-          <a:lnRef idx="1">
-            <a:schemeClr val="accent1"/>
-          </a:lnRef>
-          <a:fillRef idx="3">
-            <a:schemeClr val="accent1"/>
-          </a:fillRef>
-          <a:effectRef idx="2">
-            <a:schemeClr val="accent1"/>
-          </a:effectRef>
-          <a:fontRef idx="minor">
-            <a:schemeClr val="lt1"/>
-          </a:fontRef>
-        </p:style>
-        <p:txBody>
-          <a:bodyPr lIns="0" tIns="35100" rIns="0" bIns="35100" rtlCol="0" anchor="ctr"/>
-          <a:lstStyle/>
-          <a:p>
-            <a:pPr algn="ctr" defTabSz="685800" eaLnBrk="0" fontAlgn="base" hangingPunct="0">
-              <a:lnSpc>
-                <a:spcPct val="80000"/>
-              </a:lnSpc>
-              <a:spcBef>
-                <a:spcPct val="0"/>
-              </a:spcBef>
-              <a:spcAft>
-                <a:spcPct val="0"/>
-              </a:spcAft>
-              <a:defRPr/>
-            </a:pPr>
-            <a:r>
-              <a:rPr lang="en-US" sz="1350">
-                <a:solidFill>
-                  <a:prstClr val="white"/>
-                </a:solidFill>
-                <a:latin typeface="Calibri"/>
-                <a:cs typeface="Calibri"/>
-              </a:rPr>
-              <a:t>SAU</a:t>
-            </a:r>
-          </a:p>
-        </p:txBody>
-      </p:sp>
-      <p:cxnSp>
-        <p:nvCxnSpPr>
-          <p:cNvPr id="131" name="Straight Connector 130">
-            <a:extLst>
-              <a:ext uri="{FF2B5EF4-FFF2-40B4-BE49-F238E27FC236}">
-                <a16:creationId xmlns:a16="http://schemas.microsoft.com/office/drawing/2014/main" id="{C9F11EB3-3F7D-4890-9F0A-3194E41850DF}"/>
-              </a:ext>
-            </a:extLst>
-          </p:cNvPr>
-          <p:cNvCxnSpPr>
-            <a:cxnSpLocks/>
-          </p:cNvCxnSpPr>
-          <p:nvPr/>
-        </p:nvCxnSpPr>
-        <p:spPr>
-          <a:xfrm flipV="1">
-            <a:off x="5421301" y="2301487"/>
-            <a:ext cx="0" cy="472097"/>
-          </a:xfrm>
-          <a:prstGeom prst="line">
-            <a:avLst/>
-          </a:prstGeom>
-          <a:ln w="28575">
-            <a:solidFill>
-              <a:schemeClr val="accent6">
-                <a:lumMod val="75000"/>
-              </a:schemeClr>
-            </a:solidFill>
-            <a:headEnd type="none" w="med" len="med"/>
-            <a:tailEnd type="none" w="med" len="med"/>
-          </a:ln>
-          <a:effectLst/>
-        </p:spPr>
-        <p:style>
-          <a:lnRef idx="2">
-            <a:schemeClr val="accent1"/>
-          </a:lnRef>
-          <a:fillRef idx="0">
-            <a:schemeClr val="accent1"/>
-          </a:fillRef>
-          <a:effectRef idx="1">
-            <a:schemeClr val="accent1"/>
-          </a:effectRef>
-          <a:fontRef idx="minor">
-            <a:schemeClr val="tx1"/>
-          </a:fontRef>
-        </p:style>
-      </p:cxnSp>
-      <p:cxnSp>
-        <p:nvCxnSpPr>
-          <p:cNvPr id="135" name="Straight Connector 134">
-            <a:extLst>
-              <a:ext uri="{FF2B5EF4-FFF2-40B4-BE49-F238E27FC236}">
-                <a16:creationId xmlns:a16="http://schemas.microsoft.com/office/drawing/2014/main" id="{9D0A5BBB-10A9-48E1-944F-A987BAF61A2A}"/>
-              </a:ext>
-            </a:extLst>
-          </p:cNvPr>
-          <p:cNvCxnSpPr>
-            <a:cxnSpLocks/>
-            <a:stCxn id="128" idx="0"/>
-            <a:endCxn id="136" idx="3"/>
-          </p:cNvCxnSpPr>
-          <p:nvPr/>
-        </p:nvCxnSpPr>
-        <p:spPr>
-          <a:xfrm flipH="1">
-            <a:off x="5938667" y="2098764"/>
-            <a:ext cx="138998" cy="0"/>
-          </a:xfrm>
-          <a:prstGeom prst="line">
-            <a:avLst/>
-          </a:prstGeom>
-          <a:ln w="28575">
-            <a:solidFill>
-              <a:schemeClr val="accent6">
-                <a:lumMod val="75000"/>
-              </a:schemeClr>
-            </a:solidFill>
-            <a:headEnd type="none" w="med" len="med"/>
-            <a:tailEnd type="none" w="med" len="med"/>
-          </a:ln>
-          <a:effectLst/>
-        </p:spPr>
-        <p:style>
-          <a:lnRef idx="2">
-            <a:schemeClr val="accent1"/>
-          </a:lnRef>
-          <a:fillRef idx="0">
-            <a:schemeClr val="accent1"/>
-          </a:fillRef>
-          <a:effectRef idx="1">
-            <a:schemeClr val="accent1"/>
-          </a:effectRef>
-          <a:fontRef idx="minor">
-            <a:schemeClr val="tx1"/>
-          </a:fontRef>
-        </p:style>
-      </p:cxnSp>
-      <p:sp>
-        <p:nvSpPr>
-          <p:cNvPr id="136" name="Rectangle 135">
-            <a:extLst>
-              <a:ext uri="{FF2B5EF4-FFF2-40B4-BE49-F238E27FC236}">
-                <a16:creationId xmlns:a16="http://schemas.microsoft.com/office/drawing/2014/main" id="{5F1BD543-B390-45CD-A409-85C395ED0495}"/>
-              </a:ext>
-            </a:extLst>
-          </p:cNvPr>
-          <p:cNvSpPr/>
-          <p:nvPr/>
-        </p:nvSpPr>
-        <p:spPr>
-          <a:xfrm>
-            <a:off x="4895230" y="1693764"/>
-            <a:ext cx="1043438" cy="810000"/>
-          </a:xfrm>
-          <a:prstGeom prst="rect">
-            <a:avLst/>
-          </a:prstGeom>
-          <a:solidFill>
-            <a:schemeClr val="accent1">
-              <a:lumMod val="50000"/>
-            </a:schemeClr>
-          </a:solidFill>
-          <a:ln>
-            <a:noFill/>
-          </a:ln>
-          <a:effectLst/>
-        </p:spPr>
-        <p:style>
-          <a:lnRef idx="1">
-            <a:schemeClr val="accent1"/>
-          </a:lnRef>
-          <a:fillRef idx="3">
-            <a:schemeClr val="accent1"/>
-          </a:fillRef>
-          <a:effectRef idx="2">
-            <a:schemeClr val="accent1"/>
-          </a:effectRef>
-          <a:fontRef idx="minor">
-            <a:schemeClr val="lt1"/>
-          </a:fontRef>
-        </p:style>
-        <p:txBody>
-          <a:bodyPr lIns="0" tIns="35100" rIns="0" rtlCol="0" anchor="ctr"/>
-          <a:lstStyle/>
-          <a:p>
-            <a:pPr algn="ctr" defTabSz="685800" eaLnBrk="0" fontAlgn="base" hangingPunct="0">
-              <a:spcBef>
-                <a:spcPct val="0"/>
-              </a:spcBef>
-              <a:spcAft>
-                <a:spcPct val="0"/>
-              </a:spcAft>
-              <a:defRPr/>
-            </a:pPr>
-            <a:r>
-              <a:rPr lang="en-US" sz="1350">
-                <a:solidFill>
-                  <a:prstClr val="white"/>
-                </a:solidFill>
-                <a:latin typeface="Calibri"/>
-                <a:cs typeface="Calibri"/>
-              </a:rPr>
-              <a:t>Cortex-M33</a:t>
-            </a:r>
-            <a:br>
-              <a:rPr lang="en-US" sz="1350">
-                <a:solidFill>
-                  <a:prstClr val="white"/>
-                </a:solidFill>
-                <a:latin typeface="Calibri"/>
-                <a:cs typeface="Calibri"/>
-              </a:rPr>
-            </a:br>
-            <a:r>
-              <a:rPr lang="en-US" sz="825">
-                <a:solidFill>
-                  <a:prstClr val="white"/>
-                </a:solidFill>
-                <a:latin typeface="Calibri"/>
-                <a:cs typeface="Calibri"/>
-              </a:rPr>
-              <a:t>with </a:t>
-            </a:r>
-            <a:r>
-              <a:rPr lang="en-US" sz="825" err="1">
-                <a:solidFill>
-                  <a:prstClr val="white"/>
-                </a:solidFill>
-                <a:latin typeface="Calibri"/>
-                <a:cs typeface="Calibri"/>
-              </a:rPr>
-              <a:t>TrustZone</a:t>
-            </a:r>
-            <a:endParaRPr lang="en-US" sz="1350">
-              <a:solidFill>
-                <a:prstClr val="white"/>
-              </a:solidFill>
-              <a:latin typeface="Calibri"/>
-              <a:cs typeface="Calibri"/>
-            </a:endParaRPr>
-          </a:p>
-        </p:txBody>
-      </p:sp>
-      <p:cxnSp>
-        <p:nvCxnSpPr>
-          <p:cNvPr id="137" name="Straight Connector 136">
-            <a:extLst>
-              <a:ext uri="{FF2B5EF4-FFF2-40B4-BE49-F238E27FC236}">
-                <a16:creationId xmlns:a16="http://schemas.microsoft.com/office/drawing/2014/main" id="{4502DD98-7DEA-4437-A8D8-DFAE06585CCD}"/>
-              </a:ext>
-            </a:extLst>
-          </p:cNvPr>
-          <p:cNvCxnSpPr>
-            <a:cxnSpLocks/>
-            <a:endCxn id="151" idx="3"/>
-          </p:cNvCxnSpPr>
-          <p:nvPr/>
-        </p:nvCxnSpPr>
-        <p:spPr>
-          <a:xfrm flipV="1">
-            <a:off x="8241525" y="2508574"/>
-            <a:ext cx="0" cy="265010"/>
-          </a:xfrm>
-          <a:prstGeom prst="line">
-            <a:avLst/>
-          </a:prstGeom>
-          <a:ln w="28575">
-            <a:solidFill>
-              <a:schemeClr val="accent6">
-                <a:lumMod val="75000"/>
-              </a:schemeClr>
-            </a:solidFill>
-            <a:headEnd type="none" w="med" len="med"/>
-            <a:tailEnd type="none" w="med" len="med"/>
-          </a:ln>
-          <a:effectLst/>
-        </p:spPr>
-        <p:style>
-          <a:lnRef idx="2">
-            <a:schemeClr val="accent1"/>
-          </a:lnRef>
-          <a:fillRef idx="0">
-            <a:schemeClr val="accent1"/>
-          </a:fillRef>
-          <a:effectRef idx="1">
-            <a:schemeClr val="accent1"/>
-          </a:effectRef>
-          <a:fontRef idx="minor">
-            <a:schemeClr val="tx1"/>
-          </a:fontRef>
-        </p:style>
-      </p:cxnSp>
-      <p:sp>
-        <p:nvSpPr>
-          <p:cNvPr id="151" name="Rectangle 150">
-            <a:extLst>
-              <a:ext uri="{FF2B5EF4-FFF2-40B4-BE49-F238E27FC236}">
-                <a16:creationId xmlns:a16="http://schemas.microsoft.com/office/drawing/2014/main" id="{019FB20E-0DDD-498B-9C09-48B93ED13313}"/>
-              </a:ext>
-            </a:extLst>
-          </p:cNvPr>
-          <p:cNvSpPr/>
-          <p:nvPr/>
-        </p:nvSpPr>
-        <p:spPr>
-          <a:xfrm rot="5400000">
-            <a:off x="8106615" y="2061583"/>
-            <a:ext cx="269820" cy="624161"/>
-          </a:xfrm>
-          <a:prstGeom prst="rect">
-            <a:avLst/>
-          </a:prstGeom>
-          <a:solidFill>
-            <a:schemeClr val="accent1">
-              <a:lumMod val="50000"/>
-            </a:schemeClr>
-          </a:solidFill>
-          <a:ln>
-            <a:noFill/>
-          </a:ln>
-        </p:spPr>
-        <p:style>
-          <a:lnRef idx="2">
-            <a:schemeClr val="accent5">
-              <a:shade val="50000"/>
-            </a:schemeClr>
-          </a:lnRef>
-          <a:fillRef idx="1">
-            <a:schemeClr val="accent5"/>
-          </a:fillRef>
-          <a:effectRef idx="0">
-            <a:schemeClr val="accent5"/>
-          </a:effectRef>
-          <a:fontRef idx="minor">
-            <a:schemeClr val="lt1"/>
-          </a:fontRef>
-        </p:style>
-        <p:txBody>
-          <a:bodyPr vert="vert270" rtlCol="0" anchor="ctr"/>
-          <a:lstStyle/>
-          <a:p>
-            <a:pPr algn="ctr" defTabSz="685800" eaLnBrk="0" fontAlgn="base" hangingPunct="0">
-              <a:spcBef>
-                <a:spcPct val="0"/>
-              </a:spcBef>
-              <a:spcAft>
-                <a:spcPct val="0"/>
-              </a:spcAft>
-              <a:defRPr/>
-            </a:pPr>
-            <a:r>
-              <a:rPr lang="en-US" sz="1350">
-                <a:solidFill>
-                  <a:srgbClr val="E5ECEB"/>
-                </a:solidFill>
-                <a:latin typeface="Calibri"/>
-              </a:rPr>
-              <a:t>DMA</a:t>
-            </a:r>
-          </a:p>
-        </p:txBody>
-      </p:sp>
-      <p:sp>
-        <p:nvSpPr>
-          <p:cNvPr id="146" name="Rectangle 145">
-            <a:extLst>
-              <a:ext uri="{FF2B5EF4-FFF2-40B4-BE49-F238E27FC236}">
-                <a16:creationId xmlns:a16="http://schemas.microsoft.com/office/drawing/2014/main" id="{D5FFBF58-30CF-4E2E-AA40-529956654684}"/>
-              </a:ext>
-            </a:extLst>
-          </p:cNvPr>
-          <p:cNvSpPr/>
-          <p:nvPr/>
-        </p:nvSpPr>
-        <p:spPr>
-          <a:xfrm>
-            <a:off x="4895229" y="2672644"/>
-            <a:ext cx="3739130" cy="209262"/>
-          </a:xfrm>
-          <a:prstGeom prst="rect">
-            <a:avLst/>
-          </a:prstGeom>
-          <a:solidFill>
-            <a:schemeClr val="accent6"/>
-          </a:solidFill>
-          <a:ln>
-            <a:noFill/>
-          </a:ln>
-          <a:effectLst/>
-        </p:spPr>
-        <p:style>
-          <a:lnRef idx="1">
-            <a:schemeClr val="accent1"/>
-          </a:lnRef>
-          <a:fillRef idx="3">
-            <a:schemeClr val="accent1"/>
-          </a:fillRef>
-          <a:effectRef idx="2">
-            <a:schemeClr val="accent1"/>
-          </a:effectRef>
-          <a:fontRef idx="minor">
-            <a:schemeClr val="lt1"/>
-          </a:fontRef>
-        </p:style>
-        <p:txBody>
-          <a:bodyPr rtlCol="0" anchor="ctr"/>
-          <a:lstStyle/>
-          <a:p>
-            <a:pPr algn="ctr" defTabSz="685800" eaLnBrk="0" fontAlgn="base" hangingPunct="0">
-              <a:spcBef>
-                <a:spcPct val="0"/>
-              </a:spcBef>
-              <a:spcAft>
-                <a:spcPct val="0"/>
-              </a:spcAft>
-              <a:defRPr/>
-            </a:pPr>
-            <a:r>
-              <a:rPr lang="en-US" sz="825">
-                <a:solidFill>
-                  <a:prstClr val="white"/>
-                </a:solidFill>
-                <a:latin typeface="Calibri"/>
-                <a:cs typeface="Calibri"/>
-              </a:rPr>
-              <a:t>Multi-layer AHB5 interconnect</a:t>
-            </a:r>
-          </a:p>
-        </p:txBody>
-      </p:sp>
-      <p:cxnSp>
-        <p:nvCxnSpPr>
-          <p:cNvPr id="168" name="Straight Connector 167">
-            <a:extLst>
-              <a:ext uri="{FF2B5EF4-FFF2-40B4-BE49-F238E27FC236}">
-                <a16:creationId xmlns:a16="http://schemas.microsoft.com/office/drawing/2014/main" id="{5E9F9A28-389C-4BF9-BF0D-28BCF5D703F6}"/>
-              </a:ext>
-            </a:extLst>
-          </p:cNvPr>
-          <p:cNvCxnSpPr>
-            <a:cxnSpLocks/>
-          </p:cNvCxnSpPr>
-          <p:nvPr/>
-        </p:nvCxnSpPr>
-        <p:spPr>
-          <a:xfrm flipH="1">
-            <a:off x="6947868" y="3402780"/>
-            <a:ext cx="0" cy="135000"/>
-          </a:xfrm>
-          <a:prstGeom prst="line">
-            <a:avLst/>
-          </a:prstGeom>
-          <a:ln w="28575">
-            <a:solidFill>
-              <a:schemeClr val="accent6">
-                <a:lumMod val="75000"/>
-              </a:schemeClr>
-            </a:solidFill>
-            <a:headEnd type="none" w="med" len="med"/>
-            <a:tailEnd type="none" w="med" len="med"/>
-          </a:ln>
-          <a:effectLst/>
-        </p:spPr>
-        <p:style>
-          <a:lnRef idx="2">
-            <a:schemeClr val="accent1"/>
-          </a:lnRef>
-          <a:fillRef idx="0">
-            <a:schemeClr val="accent1"/>
-          </a:fillRef>
-          <a:effectRef idx="1">
-            <a:schemeClr val="accent1"/>
-          </a:effectRef>
-          <a:fontRef idx="minor">
-            <a:schemeClr val="tx1"/>
-          </a:fontRef>
-        </p:style>
-      </p:cxnSp>
-      <p:cxnSp>
-        <p:nvCxnSpPr>
-          <p:cNvPr id="170" name="Straight Connector 169">
-            <a:extLst>
-              <a:ext uri="{FF2B5EF4-FFF2-40B4-BE49-F238E27FC236}">
-                <a16:creationId xmlns:a16="http://schemas.microsoft.com/office/drawing/2014/main" id="{24FEF964-AF34-4725-A9F3-AE97EE387A19}"/>
-              </a:ext>
-            </a:extLst>
-          </p:cNvPr>
-          <p:cNvCxnSpPr>
-            <a:cxnSpLocks/>
-          </p:cNvCxnSpPr>
-          <p:nvPr/>
-        </p:nvCxnSpPr>
-        <p:spPr>
-          <a:xfrm flipH="1">
-            <a:off x="7164904" y="3402780"/>
-            <a:ext cx="0" cy="135000"/>
-          </a:xfrm>
-          <a:prstGeom prst="line">
-            <a:avLst/>
-          </a:prstGeom>
-          <a:ln w="28575">
-            <a:solidFill>
-              <a:schemeClr val="accent6">
-                <a:lumMod val="75000"/>
-              </a:schemeClr>
-            </a:solidFill>
-            <a:headEnd type="none" w="med" len="med"/>
-            <a:tailEnd type="none" w="med" len="med"/>
-          </a:ln>
-          <a:effectLst/>
-        </p:spPr>
-        <p:style>
-          <a:lnRef idx="2">
-            <a:schemeClr val="accent1"/>
-          </a:lnRef>
-          <a:fillRef idx="0">
-            <a:schemeClr val="accent1"/>
-          </a:fillRef>
-          <a:effectRef idx="1">
-            <a:schemeClr val="accent1"/>
-          </a:effectRef>
-          <a:fontRef idx="minor">
-            <a:schemeClr val="tx1"/>
-          </a:fontRef>
-        </p:style>
-      </p:cxnSp>
-      <p:sp>
-        <p:nvSpPr>
-          <p:cNvPr id="173" name="Rectangle 172">
-            <a:extLst>
-              <a:ext uri="{FF2B5EF4-FFF2-40B4-BE49-F238E27FC236}">
-                <a16:creationId xmlns:a16="http://schemas.microsoft.com/office/drawing/2014/main" id="{8DBC1592-9636-4F97-A412-F392E16632DE}"/>
-              </a:ext>
-            </a:extLst>
-          </p:cNvPr>
-          <p:cNvSpPr/>
-          <p:nvPr/>
-        </p:nvSpPr>
-        <p:spPr>
-          <a:xfrm>
-            <a:off x="6841188" y="3537780"/>
-            <a:ext cx="189000" cy="648000"/>
-          </a:xfrm>
-          <a:prstGeom prst="rect">
-            <a:avLst/>
-          </a:prstGeom>
-          <a:solidFill>
-            <a:schemeClr val="accent1">
-              <a:lumMod val="50000"/>
-            </a:schemeClr>
-          </a:solidFill>
-          <a:ln>
-            <a:noFill/>
-          </a:ln>
-        </p:spPr>
-        <p:style>
-          <a:lnRef idx="2">
-            <a:schemeClr val="accent5">
-              <a:shade val="50000"/>
-            </a:schemeClr>
-          </a:lnRef>
-          <a:fillRef idx="1">
-            <a:schemeClr val="accent5"/>
-          </a:fillRef>
-          <a:effectRef idx="0">
-            <a:schemeClr val="accent5"/>
-          </a:effectRef>
-          <a:fontRef idx="minor">
-            <a:schemeClr val="lt1"/>
-          </a:fontRef>
-        </p:style>
-        <p:txBody>
-          <a:bodyPr vert="vert270" rtlCol="0" anchor="ctr"/>
-          <a:lstStyle/>
-          <a:p>
-            <a:pPr algn="ctr" defTabSz="685800" eaLnBrk="0" fontAlgn="base" hangingPunct="0">
-              <a:spcBef>
-                <a:spcPct val="0"/>
-              </a:spcBef>
-              <a:spcAft>
-                <a:spcPct val="0"/>
-              </a:spcAft>
-              <a:defRPr/>
-            </a:pPr>
-            <a:r>
-              <a:rPr lang="en-US" sz="1050">
-                <a:solidFill>
-                  <a:srgbClr val="E5ECEB"/>
-                </a:solidFill>
-                <a:latin typeface="Calibri"/>
-              </a:rPr>
-              <a:t>AES</a:t>
-            </a:r>
-          </a:p>
-        </p:txBody>
-      </p:sp>
-      <p:sp>
-        <p:nvSpPr>
-          <p:cNvPr id="174" name="Rectangle 173">
-            <a:extLst>
-              <a:ext uri="{FF2B5EF4-FFF2-40B4-BE49-F238E27FC236}">
-                <a16:creationId xmlns:a16="http://schemas.microsoft.com/office/drawing/2014/main" id="{AC2B220C-C1D2-445F-B73E-4707CE220FF0}"/>
-              </a:ext>
-            </a:extLst>
-          </p:cNvPr>
-          <p:cNvSpPr/>
-          <p:nvPr/>
-        </p:nvSpPr>
-        <p:spPr>
-          <a:xfrm>
-            <a:off x="7070404" y="3537780"/>
-            <a:ext cx="189000" cy="648000"/>
-          </a:xfrm>
-          <a:prstGeom prst="rect">
-            <a:avLst/>
-          </a:prstGeom>
-          <a:solidFill>
-            <a:schemeClr val="accent1">
-              <a:lumMod val="50000"/>
-            </a:schemeClr>
-          </a:solidFill>
-          <a:ln>
-            <a:noFill/>
-          </a:ln>
-        </p:spPr>
-        <p:style>
-          <a:lnRef idx="2">
-            <a:schemeClr val="accent5">
-              <a:shade val="50000"/>
-            </a:schemeClr>
-          </a:lnRef>
-          <a:fillRef idx="1">
-            <a:schemeClr val="accent5"/>
-          </a:fillRef>
-          <a:effectRef idx="0">
-            <a:schemeClr val="accent5"/>
-          </a:effectRef>
-          <a:fontRef idx="minor">
-            <a:schemeClr val="lt1"/>
-          </a:fontRef>
-        </p:style>
-        <p:txBody>
-          <a:bodyPr vert="vert270" rtlCol="0" anchor="ctr"/>
-          <a:lstStyle/>
-          <a:p>
-            <a:pPr algn="ctr" defTabSz="685800" eaLnBrk="0" fontAlgn="base" hangingPunct="0">
-              <a:spcBef>
-                <a:spcPct val="0"/>
-              </a:spcBef>
-              <a:spcAft>
-                <a:spcPct val="0"/>
-              </a:spcAft>
-              <a:defRPr/>
-            </a:pPr>
-            <a:r>
-              <a:rPr lang="en-US" sz="1050">
-                <a:solidFill>
-                  <a:srgbClr val="E5ECEB"/>
-                </a:solidFill>
-                <a:latin typeface="Calibri"/>
-              </a:rPr>
-              <a:t>TRNG</a:t>
-            </a:r>
-          </a:p>
-        </p:txBody>
-      </p:sp>
-      <p:sp>
-        <p:nvSpPr>
-          <p:cNvPr id="175" name="Text Placeholder 12">
-            <a:extLst>
-              <a:ext uri="{FF2B5EF4-FFF2-40B4-BE49-F238E27FC236}">
-                <a16:creationId xmlns:a16="http://schemas.microsoft.com/office/drawing/2014/main" id="{359B5ADF-9F72-4AFD-9E45-F2CAEC2D7D01}"/>
-              </a:ext>
-            </a:extLst>
-          </p:cNvPr>
-          <p:cNvSpPr txBox="1">
-            <a:spLocks/>
-          </p:cNvSpPr>
-          <p:nvPr/>
-        </p:nvSpPr>
-        <p:spPr>
-          <a:xfrm>
-            <a:off x="359569" y="4428590"/>
-            <a:ext cx="8424863" cy="336803"/>
-          </a:xfrm>
-          <a:prstGeom prst="rect">
-            <a:avLst/>
-          </a:prstGeom>
-        </p:spPr>
-        <p:txBody>
-          <a:bodyPr vert="horz" lIns="0" tIns="0" rIns="0" bIns="0" rtlCol="0" anchor="t">
-            <a:noAutofit/>
-          </a:bodyPr>
-          <a:lstStyle>
-            <a:lvl1pPr marL="342900" indent="-342900" algn="l" rtl="0" eaLnBrk="1" fontAlgn="base" hangingPunct="1">
-              <a:lnSpc>
-                <a:spcPct val="100000"/>
-              </a:lnSpc>
-              <a:spcBef>
-                <a:spcPts val="600"/>
-              </a:spcBef>
-              <a:spcAft>
-                <a:spcPts val="0"/>
-              </a:spcAft>
-              <a:buClr>
-                <a:schemeClr val="accent1"/>
-              </a:buClr>
-              <a:buFont typeface="Arial" charset="0"/>
-              <a:buChar char="•"/>
-              <a:defRPr sz="2400" kern="1200">
-                <a:solidFill>
-                  <a:schemeClr val="tx2"/>
-                </a:solidFill>
-                <a:latin typeface="+mn-lt"/>
-                <a:ea typeface="ＭＳ Ｐゴシック" charset="0"/>
-                <a:cs typeface="ＭＳ Ｐゴシック" charset="0"/>
-              </a:defRPr>
-            </a:lvl1pPr>
-            <a:lvl2pPr marL="672783" indent="-166688" algn="l" rtl="0" eaLnBrk="1" fontAlgn="base" hangingPunct="1">
-              <a:lnSpc>
-                <a:spcPct val="100000"/>
-              </a:lnSpc>
-              <a:spcBef>
-                <a:spcPts val="0"/>
-              </a:spcBef>
-              <a:spcAft>
-                <a:spcPts val="0"/>
-              </a:spcAft>
-              <a:buClr>
-                <a:schemeClr val="accent1"/>
-              </a:buClr>
-              <a:buSzPct val="80000"/>
-              <a:buFont typeface="Arial" charset="0"/>
-              <a:buChar char="•"/>
-              <a:defRPr sz="2000" kern="1200">
-                <a:solidFill>
-                  <a:schemeClr val="tx2"/>
-                </a:solidFill>
-                <a:latin typeface="+mn-lt"/>
-                <a:ea typeface="ＭＳ Ｐゴシック" charset="0"/>
-                <a:cs typeface="+mn-cs"/>
-              </a:defRPr>
-            </a:lvl2pPr>
-            <a:lvl3pPr marL="947103" indent="-166688" algn="l" rtl="0" eaLnBrk="1" fontAlgn="base" hangingPunct="1">
-              <a:lnSpc>
-                <a:spcPct val="100000"/>
-              </a:lnSpc>
-              <a:spcBef>
-                <a:spcPts val="0"/>
-              </a:spcBef>
-              <a:spcAft>
-                <a:spcPts val="0"/>
-              </a:spcAft>
-              <a:buClr>
-                <a:schemeClr val="accent1"/>
-              </a:buClr>
-              <a:buSzPct val="80000"/>
-              <a:buFont typeface="Calibri" charset="0"/>
-              <a:buChar char="–"/>
-              <a:defRPr sz="1800" kern="1200">
-                <a:solidFill>
-                  <a:schemeClr val="tx2"/>
-                </a:solidFill>
-                <a:latin typeface="+mn-lt"/>
-                <a:ea typeface="ＭＳ Ｐゴシック" charset="0"/>
-                <a:cs typeface="+mn-cs"/>
-              </a:defRPr>
-            </a:lvl3pPr>
-            <a:lvl4pPr marL="1293178" indent="-173038" algn="l" rtl="0" eaLnBrk="1" fontAlgn="base" hangingPunct="1">
-              <a:lnSpc>
-                <a:spcPct val="100000"/>
-              </a:lnSpc>
-              <a:spcBef>
-                <a:spcPts val="0"/>
-              </a:spcBef>
-              <a:spcAft>
-                <a:spcPts val="0"/>
-              </a:spcAft>
-              <a:buClr>
-                <a:schemeClr val="accent1"/>
-              </a:buClr>
-              <a:buSzPct val="80000"/>
-              <a:buFont typeface="Wingdings" charset="2"/>
-              <a:buChar char="§"/>
-              <a:defRPr sz="1800" kern="1200">
-                <a:solidFill>
-                  <a:schemeClr val="tx2"/>
-                </a:solidFill>
-                <a:latin typeface="+mn-lt"/>
-                <a:ea typeface="ＭＳ Ｐゴシック" charset="0"/>
-                <a:cs typeface="+mn-cs"/>
-              </a:defRPr>
-            </a:lvl4pPr>
-            <a:lvl5pPr marL="1518603" indent="-168275" algn="l" rtl="0" eaLnBrk="1" fontAlgn="base" hangingPunct="1">
-              <a:lnSpc>
-                <a:spcPct val="100000"/>
-              </a:lnSpc>
-              <a:spcBef>
-                <a:spcPts val="0"/>
-              </a:spcBef>
-              <a:spcAft>
-                <a:spcPts val="0"/>
-              </a:spcAft>
-              <a:buClr>
-                <a:schemeClr val="accent1"/>
-              </a:buClr>
-              <a:buSzPct val="80000"/>
-              <a:buFont typeface="Calibri" charset="0"/>
-              <a:buChar char="–"/>
-              <a:defRPr sz="1800" kern="1200">
-                <a:solidFill>
-                  <a:schemeClr val="tx2"/>
-                </a:solidFill>
-                <a:latin typeface="+mn-lt"/>
-                <a:ea typeface="ＭＳ Ｐゴシック" charset="0"/>
-                <a:cs typeface="+mn-cs"/>
-              </a:defRPr>
-            </a:lvl5pPr>
-            <a:lvl6pPr marL="1655064" indent="-164592" algn="l" defTabSz="914400" rtl="0" eaLnBrk="1" latinLnBrk="0" hangingPunct="1">
-              <a:lnSpc>
-                <a:spcPct val="100000"/>
-              </a:lnSpc>
-              <a:spcBef>
-                <a:spcPts val="0"/>
-              </a:spcBef>
-              <a:spcAft>
-                <a:spcPts val="0"/>
-              </a:spcAft>
-              <a:buClr>
-                <a:schemeClr val="accent1"/>
-              </a:buClr>
-              <a:buSzPct val="80000"/>
-              <a:buFont typeface="Wingdings" panose="05000000000000000000" pitchFamily="2" charset="2"/>
-              <a:buChar char="§"/>
-              <a:defRPr lang="en-US" sz="1600" kern="1200">
-                <a:solidFill>
-                  <a:schemeClr val="tx2"/>
-                </a:solidFill>
-                <a:latin typeface="+mn-lt"/>
-                <a:ea typeface="+mn-ea"/>
-                <a:cs typeface="+mn-cs"/>
-              </a:defRPr>
-            </a:lvl6pPr>
-            <a:lvl7pPr marL="1883664" indent="-164592" algn="l" defTabSz="914400" rtl="0" eaLnBrk="1" latinLnBrk="0" hangingPunct="1">
-              <a:lnSpc>
-                <a:spcPct val="100000"/>
-              </a:lnSpc>
-              <a:spcBef>
-                <a:spcPts val="0"/>
-              </a:spcBef>
-              <a:spcAft>
-                <a:spcPts val="0"/>
-              </a:spcAft>
-              <a:buClr>
-                <a:schemeClr val="accent1"/>
-              </a:buClr>
-              <a:buSzPct val="80000"/>
-              <a:buFont typeface="Calibri" panose="020F0502020204030204" pitchFamily="34" charset="0"/>
-              <a:buChar char="–"/>
-              <a:defRPr lang="en-US" sz="1600" kern="1200">
-                <a:solidFill>
-                  <a:schemeClr val="tx2"/>
-                </a:solidFill>
-                <a:latin typeface="+mn-lt"/>
-                <a:ea typeface="+mn-ea"/>
-                <a:cs typeface="+mn-cs"/>
-              </a:defRPr>
-            </a:lvl7pPr>
-            <a:lvl8pPr marL="2112264" indent="-164592" algn="l" defTabSz="914400" rtl="0" eaLnBrk="1" latinLnBrk="0" hangingPunct="1">
-              <a:lnSpc>
-                <a:spcPct val="100000"/>
-              </a:lnSpc>
-              <a:spcBef>
-                <a:spcPts val="0"/>
-              </a:spcBef>
-              <a:spcAft>
-                <a:spcPts val="0"/>
-              </a:spcAft>
-              <a:buClr>
-                <a:schemeClr val="accent1"/>
-              </a:buClr>
-              <a:buSzPct val="80000"/>
-              <a:buFont typeface="Wingdings" panose="05000000000000000000" pitchFamily="2" charset="2"/>
-              <a:buChar char="§"/>
-              <a:defRPr lang="en-US" sz="1600" kern="1200">
-                <a:solidFill>
-                  <a:schemeClr val="tx2"/>
-                </a:solidFill>
-                <a:latin typeface="+mn-lt"/>
-                <a:ea typeface="+mn-ea"/>
-                <a:cs typeface="+mn-cs"/>
-              </a:defRPr>
-            </a:lvl8pPr>
-            <a:lvl9pPr marL="2340864" indent="-164592" algn="l" defTabSz="914400" rtl="0" eaLnBrk="1" latinLnBrk="0" hangingPunct="1">
-              <a:lnSpc>
-                <a:spcPct val="100000"/>
-              </a:lnSpc>
-              <a:spcBef>
-                <a:spcPts val="0"/>
-              </a:spcBef>
-              <a:spcAft>
-                <a:spcPts val="0"/>
-              </a:spcAft>
-              <a:buClr>
-                <a:schemeClr val="accent1"/>
-              </a:buClr>
-              <a:buSzPct val="80000"/>
-              <a:buFont typeface="Calibri" panose="020F0502020204030204" pitchFamily="34" charset="0"/>
-              <a:buChar char="–"/>
-              <a:defRPr lang="en-US" sz="1600" kern="1200">
-                <a:solidFill>
-                  <a:schemeClr val="tx2"/>
-                </a:solidFill>
-                <a:latin typeface="+mn-lt"/>
-                <a:ea typeface="+mn-ea"/>
-                <a:cs typeface="+mn-cs"/>
-              </a:defRPr>
-            </a:lvl9pPr>
-          </a:lstStyle>
-          <a:p>
-            <a:r>
-              <a:rPr lang="en-GB" sz="1500">
-                <a:ea typeface="ＭＳ Ｐゴシック"/>
-              </a:rPr>
-              <a:t>Step 2: create the partitions for secure and non-secure execution</a:t>
-            </a:r>
-            <a:endParaRPr lang="en-US" sz="1500">
-              <a:ea typeface="ＭＳ Ｐゴシック"/>
-            </a:endParaRPr>
-          </a:p>
-        </p:txBody>
-      </p:sp>
-      <p:sp>
-        <p:nvSpPr>
-          <p:cNvPr id="17" name="TextBox 16">
-            <a:extLst>
-              <a:ext uri="{FF2B5EF4-FFF2-40B4-BE49-F238E27FC236}">
-                <a16:creationId xmlns:a16="http://schemas.microsoft.com/office/drawing/2014/main" id="{1D9A4B6C-FE1A-4473-88F7-A1A28B1C6D14}"/>
-              </a:ext>
-            </a:extLst>
-          </p:cNvPr>
-          <p:cNvSpPr txBox="1"/>
-          <p:nvPr/>
-        </p:nvSpPr>
-        <p:spPr>
-          <a:xfrm>
-            <a:off x="525705" y="1463310"/>
-            <a:ext cx="3764466" cy="145424"/>
-          </a:xfrm>
-          <a:prstGeom prst="rect">
-            <a:avLst/>
-          </a:prstGeom>
-          <a:noFill/>
-        </p:spPr>
-        <p:txBody>
-          <a:bodyPr wrap="square" lIns="0" tIns="0" rIns="0" bIns="0" rtlCol="0">
-            <a:spAutoFit/>
-          </a:bodyPr>
-          <a:lstStyle/>
-          <a:p>
-            <a:pPr defTabSz="685800">
-              <a:lnSpc>
-                <a:spcPct val="90000"/>
-              </a:lnSpc>
-              <a:spcAft>
-                <a:spcPts val="450"/>
-              </a:spcAft>
-            </a:pPr>
-            <a:r>
-              <a:rPr lang="en-US" sz="1050">
-                <a:solidFill>
-                  <a:schemeClr val="tx2"/>
-                </a:solidFill>
-              </a:rPr>
-              <a:t>Complete view of a multi-processor system</a:t>
-            </a:r>
-            <a:endParaRPr lang="en-GB" sz="1050" err="1">
-              <a:solidFill>
-                <a:schemeClr val="tx2"/>
-              </a:solidFill>
-            </a:endParaRPr>
-          </a:p>
-        </p:txBody>
-      </p:sp>
-      <p:sp>
-        <p:nvSpPr>
-          <p:cNvPr id="177" name="TextBox 176">
-            <a:extLst>
-              <a:ext uri="{FF2B5EF4-FFF2-40B4-BE49-F238E27FC236}">
-                <a16:creationId xmlns:a16="http://schemas.microsoft.com/office/drawing/2014/main" id="{7F784A35-4F80-4A39-A9B6-D93D9F459289}"/>
-              </a:ext>
-            </a:extLst>
-          </p:cNvPr>
-          <p:cNvSpPr txBox="1"/>
-          <p:nvPr/>
-        </p:nvSpPr>
-        <p:spPr>
-          <a:xfrm>
-            <a:off x="4901962" y="1462139"/>
-            <a:ext cx="3371633" cy="145424"/>
-          </a:xfrm>
-          <a:prstGeom prst="rect">
-            <a:avLst/>
-          </a:prstGeom>
-          <a:noFill/>
-        </p:spPr>
-        <p:txBody>
-          <a:bodyPr wrap="square" lIns="0" tIns="0" rIns="0" bIns="0" rtlCol="0">
-            <a:spAutoFit/>
-          </a:bodyPr>
-          <a:lstStyle/>
-          <a:p>
-            <a:pPr defTabSz="685800">
-              <a:lnSpc>
-                <a:spcPct val="90000"/>
-              </a:lnSpc>
-              <a:spcAft>
-                <a:spcPts val="450"/>
-              </a:spcAft>
-            </a:pPr>
-            <a:r>
-              <a:rPr lang="en-US" sz="1050">
-                <a:solidFill>
-                  <a:schemeClr val="tx2"/>
-                </a:solidFill>
-              </a:rPr>
-              <a:t>System view of processor core #1</a:t>
-            </a:r>
-            <a:endParaRPr lang="en-GB" sz="1050" err="1">
-              <a:solidFill>
-                <a:schemeClr val="tx2"/>
-              </a:solidFill>
-            </a:endParaRPr>
-          </a:p>
-        </p:txBody>
-      </p:sp>
-      <p:sp>
-        <p:nvSpPr>
-          <p:cNvPr id="178" name="TextBox 177">
-            <a:extLst>
-              <a:ext uri="{FF2B5EF4-FFF2-40B4-BE49-F238E27FC236}">
-                <a16:creationId xmlns:a16="http://schemas.microsoft.com/office/drawing/2014/main" id="{D0BCBF70-8D93-4D51-B2B9-F54F217E6117}"/>
-              </a:ext>
-            </a:extLst>
-          </p:cNvPr>
-          <p:cNvSpPr txBox="1"/>
-          <p:nvPr/>
-        </p:nvSpPr>
-        <p:spPr>
-          <a:xfrm>
-            <a:off x="5035525" y="1200530"/>
-            <a:ext cx="3371633" cy="145424"/>
-          </a:xfrm>
-          <a:prstGeom prst="rect">
-            <a:avLst/>
-          </a:prstGeom>
-          <a:noFill/>
-        </p:spPr>
-        <p:txBody>
-          <a:bodyPr wrap="square" lIns="0" tIns="0" rIns="0" bIns="0" rtlCol="0">
-            <a:spAutoFit/>
-          </a:bodyPr>
-          <a:lstStyle/>
-          <a:p>
-            <a:pPr defTabSz="685800">
-              <a:lnSpc>
-                <a:spcPct val="90000"/>
-              </a:lnSpc>
-              <a:spcAft>
-                <a:spcPts val="450"/>
-              </a:spcAft>
-            </a:pPr>
-            <a:r>
-              <a:rPr lang="en-US" sz="1050">
-                <a:solidFill>
-                  <a:schemeClr val="tx2"/>
-                </a:solidFill>
-              </a:rPr>
-              <a:t>System view of processor core #2</a:t>
-            </a:r>
-            <a:endParaRPr lang="en-GB" sz="1500" err="1">
-              <a:solidFill>
-                <a:schemeClr val="tx2"/>
-              </a:solidFill>
-            </a:endParaRPr>
-          </a:p>
-        </p:txBody>
-      </p:sp>
-      <p:sp>
-        <p:nvSpPr>
-          <p:cNvPr id="18" name="TextBox 17">
-            <a:extLst>
-              <a:ext uri="{FF2B5EF4-FFF2-40B4-BE49-F238E27FC236}">
-                <a16:creationId xmlns:a16="http://schemas.microsoft.com/office/drawing/2014/main" id="{95DCA7CB-481B-476D-B9D1-3BF6BC8F3A3C}"/>
-              </a:ext>
-            </a:extLst>
-          </p:cNvPr>
-          <p:cNvSpPr txBox="1"/>
-          <p:nvPr/>
-        </p:nvSpPr>
-        <p:spPr>
-          <a:xfrm>
-            <a:off x="739697" y="1707203"/>
-            <a:ext cx="571743" cy="114262"/>
-          </a:xfrm>
-          <a:prstGeom prst="rect">
-            <a:avLst/>
-          </a:prstGeom>
-          <a:noFill/>
-        </p:spPr>
-        <p:txBody>
-          <a:bodyPr wrap="square" lIns="0" tIns="0" rIns="0" bIns="0" rtlCol="0">
-            <a:spAutoFit/>
-          </a:bodyPr>
-          <a:lstStyle/>
-          <a:p>
-            <a:pPr algn="ctr" defTabSz="685800">
-              <a:lnSpc>
-                <a:spcPct val="90000"/>
-              </a:lnSpc>
-              <a:spcAft>
-                <a:spcPts val="450"/>
-              </a:spcAft>
-            </a:pPr>
-            <a:r>
-              <a:rPr lang="en-US" sz="825">
-                <a:solidFill>
-                  <a:schemeClr val="bg1"/>
-                </a:solidFill>
-              </a:rPr>
-              <a:t>Core #1</a:t>
-            </a:r>
-            <a:endParaRPr lang="en-GB" sz="825" err="1">
-              <a:solidFill>
-                <a:schemeClr val="bg1"/>
-              </a:solidFill>
-            </a:endParaRPr>
-          </a:p>
-        </p:txBody>
-      </p:sp>
-      <p:sp>
-        <p:nvSpPr>
-          <p:cNvPr id="179" name="TextBox 178">
-            <a:extLst>
-              <a:ext uri="{FF2B5EF4-FFF2-40B4-BE49-F238E27FC236}">
-                <a16:creationId xmlns:a16="http://schemas.microsoft.com/office/drawing/2014/main" id="{43411498-FC06-4E53-9958-C8FDA9AC7EFB}"/>
-              </a:ext>
-            </a:extLst>
-          </p:cNvPr>
-          <p:cNvSpPr txBox="1"/>
-          <p:nvPr/>
-        </p:nvSpPr>
-        <p:spPr>
-          <a:xfrm>
-            <a:off x="2454528" y="1707203"/>
-            <a:ext cx="571743" cy="114262"/>
-          </a:xfrm>
-          <a:prstGeom prst="rect">
-            <a:avLst/>
-          </a:prstGeom>
-          <a:noFill/>
-        </p:spPr>
-        <p:txBody>
-          <a:bodyPr wrap="square" lIns="0" tIns="0" rIns="0" bIns="0" rtlCol="0">
-            <a:spAutoFit/>
-          </a:bodyPr>
-          <a:lstStyle/>
-          <a:p>
-            <a:pPr algn="ctr" defTabSz="685800">
-              <a:lnSpc>
-                <a:spcPct val="90000"/>
-              </a:lnSpc>
-              <a:spcAft>
-                <a:spcPts val="450"/>
-              </a:spcAft>
-            </a:pPr>
-            <a:r>
-              <a:rPr lang="en-US" sz="825">
-                <a:solidFill>
-                  <a:schemeClr val="bg1"/>
-                </a:solidFill>
-              </a:rPr>
-              <a:t>Core #2</a:t>
-            </a:r>
-            <a:endParaRPr lang="en-GB" sz="825" err="1">
-              <a:solidFill>
-                <a:schemeClr val="bg1"/>
-              </a:solidFill>
-            </a:endParaRPr>
-          </a:p>
-        </p:txBody>
-      </p:sp>
-      <p:sp>
-        <p:nvSpPr>
-          <p:cNvPr id="180" name="TextBox 179">
-            <a:extLst>
-              <a:ext uri="{FF2B5EF4-FFF2-40B4-BE49-F238E27FC236}">
-                <a16:creationId xmlns:a16="http://schemas.microsoft.com/office/drawing/2014/main" id="{F8E98B83-9DCF-46C7-A361-35A52DF7E993}"/>
-              </a:ext>
-            </a:extLst>
-          </p:cNvPr>
-          <p:cNvSpPr txBox="1"/>
-          <p:nvPr/>
-        </p:nvSpPr>
-        <p:spPr>
-          <a:xfrm>
-            <a:off x="5131076" y="1713568"/>
-            <a:ext cx="571743" cy="114262"/>
-          </a:xfrm>
-          <a:prstGeom prst="rect">
-            <a:avLst/>
-          </a:prstGeom>
-          <a:noFill/>
-        </p:spPr>
-        <p:txBody>
-          <a:bodyPr wrap="square" lIns="0" tIns="0" rIns="0" bIns="0" rtlCol="0">
-            <a:spAutoFit/>
-          </a:bodyPr>
-          <a:lstStyle/>
-          <a:p>
-            <a:pPr algn="ctr" defTabSz="685800">
-              <a:lnSpc>
-                <a:spcPct val="90000"/>
-              </a:lnSpc>
-              <a:spcAft>
-                <a:spcPts val="450"/>
-              </a:spcAft>
-            </a:pPr>
-            <a:r>
-              <a:rPr lang="en-US" sz="825">
-                <a:solidFill>
-                  <a:schemeClr val="bg1"/>
-                </a:solidFill>
-              </a:rPr>
-              <a:t>Core #1</a:t>
-            </a:r>
-            <a:endParaRPr lang="en-GB" sz="825" err="1">
-              <a:solidFill>
-                <a:schemeClr val="bg1"/>
-              </a:solidFill>
-            </a:endParaRPr>
-          </a:p>
-        </p:txBody>
-      </p:sp>
-    </p:spTree>
-    <p:extLst>
-      <p:ext uri="{BB962C8B-B14F-4D97-AF65-F5344CB8AC3E}">
-        <p14:creationId xmlns:p14="http://schemas.microsoft.com/office/powerpoint/2010/main" val="1699400518"/>
-      </p:ext>
-    </p:extLst>
-  </p:cSld>
-  <p:clrMapOvr>
-    <a:masterClrMapping/>
-  </p:clrMapOvr>
-  <mc:AlternateContent xmlns:mc="http://schemas.openxmlformats.org/markup-compatibility/2006" xmlns:p14="http://schemas.microsoft.com/office/powerpoint/2010/main">
-    <mc:Choice Requires="p14">
-      <p:transition spd="med" p14:dur="700">
-        <p:fade/>
-      </p:transition>
-    </mc:Choice>
-    <mc:Fallback xmlns="">
-      <p:transition spd="med">
-        <p:fade/>
-      </p:transition>
-    </mc:Fallback>
-  </mc:AlternateContent>
-</p:sld>
-</file>
-
-<file path=ppt/slides/slide5.xml><?xml version="1.0" encoding="utf-8"?>
-<p:sld xmlns:a="http://schemas.openxmlformats.org/drawingml/2006/main" xmlns:r="http://schemas.openxmlformats.org/officeDocument/2006/relationships" xmlns:p="http://schemas.openxmlformats.org/presentationml/2006/main">
-  <p:cSld>
-    <p:spTree>
-      <p:nvGrpSpPr>
-        <p:cNvPr id="1" name=""/>
-        <p:cNvGrpSpPr/>
-        <p:nvPr/>
-      </p:nvGrpSpPr>
-      <p:grpSpPr>
-        <a:xfrm>
-          <a:off x="0" y="0"/>
-          <a:ext cx="0" cy="0"/>
-          <a:chOff x="0" y="0"/>
-          <a:chExt cx="0" cy="0"/>
-        </a:xfrm>
-      </p:grpSpPr>
-      <p:sp>
-        <p:nvSpPr>
           <p:cNvPr id="3" name="Pentagon 2"/>
           <p:cNvSpPr/>
           <p:nvPr/>
@@ -22659,7 +17282,7 @@
 </p:sld>
 </file>
 
-<file path=ppt/slides/slide6.xml><?xml version="1.0" encoding="utf-8"?>
+<file path=ppt/slides/slide5.xml><?xml version="1.0" encoding="utf-8"?>
 <p:sld xmlns:a="http://schemas.openxmlformats.org/drawingml/2006/main" xmlns:r="http://schemas.openxmlformats.org/officeDocument/2006/relationships" xmlns:p="http://schemas.openxmlformats.org/presentationml/2006/main">
   <p:cSld>
     <p:spTree>
@@ -23355,7 +17978,7 @@
 </p:sld>
 </file>
 
-<file path=ppt/slides/slide7.xml><?xml version="1.0" encoding="utf-8"?>
+<file path=ppt/slides/slide6.xml><?xml version="1.0" encoding="utf-8"?>
 <p:sld xmlns:a="http://schemas.openxmlformats.org/drawingml/2006/main" xmlns:r="http://schemas.openxmlformats.org/officeDocument/2006/relationships" xmlns:p="http://schemas.openxmlformats.org/presentationml/2006/main">
   <p:cSld>
     <p:spTree>
@@ -25213,7 +19836,7 @@
 </p:sld>
 </file>
 
-<file path=ppt/slides/slide8.xml><?xml version="1.0" encoding="utf-8"?>
+<file path=ppt/slides/slide7.xml><?xml version="1.0" encoding="utf-8"?>
 <p:sld xmlns:a="http://schemas.openxmlformats.org/drawingml/2006/main" xmlns:r="http://schemas.openxmlformats.org/officeDocument/2006/relationships" xmlns:p="http://schemas.openxmlformats.org/presentationml/2006/main">
   <p:cSld>
     <p:spTree>
@@ -26240,7 +20863,7 @@
 </p:sld>
 </file>
 
-<file path=ppt/slides/slide9.xml><?xml version="1.0" encoding="utf-8"?>
+<file path=ppt/slides/slide8.xml><?xml version="1.0" encoding="utf-8"?>
 <p:sld xmlns:a="http://schemas.openxmlformats.org/drawingml/2006/main" xmlns:r="http://schemas.openxmlformats.org/officeDocument/2006/relationships" xmlns:p="http://schemas.openxmlformats.org/presentationml/2006/main">
   <p:cSld>
     <p:spTree>
@@ -28383,6 +23006,15 @@
 </file>
 
 <file path=customXml/item1.xml><?xml version="1.0" encoding="utf-8"?>
+<?mso-contentType ?>
+<FormTemplates xmlns="http://schemas.microsoft.com/sharepoint/v3/contenttype/forms">
+  <Display>DocumentLibraryForm</Display>
+  <Edit>DocumentLibraryForm</Edit>
+  <New>DocumentLibraryForm</New>
+</FormTemplates>
+</file>
+
+<file path=customXml/item2.xml><?xml version="1.0" encoding="utf-8"?>
 <p:properties xmlns:p="http://schemas.microsoft.com/office/2006/metadata/properties" xmlns:xsi="http://www.w3.org/2001/XMLSchema-instance" xmlns:pc="http://schemas.microsoft.com/office/infopath/2007/PartnerControls">
   <documentManagement>
     <_dlc_DocId xmlns="f2ad5090-61a8-4b8c-ab70-68f4ff4d1933">ARM-ECM-0491503</_dlc_DocId>
@@ -28394,62 +23026,7 @@
 </p:properties>
 </file>
 
-<file path=customXml/item2.xml><?xml version="1.0" encoding="utf-8"?>
-<?mso-contentType ?>
-<FormTemplates xmlns="http://schemas.microsoft.com/sharepoint/v3/contenttype/forms">
-  <Display>DocumentLibraryForm</Display>
-  <Edit>DocumentLibraryForm</Edit>
-  <New>DocumentLibraryForm</New>
-</FormTemplates>
-</file>
-
 <file path=customXml/item3.xml><?xml version="1.0" encoding="utf-8"?>
-<?mso-contentType ?>
-<spe:Receivers xmlns:spe="http://schemas.microsoft.com/sharepoint/events">
-  <Receiver>
-    <Name>Document ID Generator</Name>
-    <Synchronization>Synchronous</Synchronization>
-    <Type>10001</Type>
-    <SequenceNumber>1000</SequenceNumber>
-    <Assembly>Microsoft.Office.DocumentManagement, Version=14.0.0.0, Culture=neutral, PublicKeyToken=71e9bce111e9429c</Assembly>
-    <Class>Microsoft.Office.DocumentManagement.Internal.DocIdHandler</Class>
-    <Data/>
-    <Filter/>
-  </Receiver>
-  <Receiver>
-    <Name>Document ID Generator</Name>
-    <Synchronization>Synchronous</Synchronization>
-    <Type>10002</Type>
-    <SequenceNumber>1001</SequenceNumber>
-    <Assembly>Microsoft.Office.DocumentManagement, Version=14.0.0.0, Culture=neutral, PublicKeyToken=71e9bce111e9429c</Assembly>
-    <Class>Microsoft.Office.DocumentManagement.Internal.DocIdHandler</Class>
-    <Data/>
-    <Filter/>
-  </Receiver>
-  <Receiver>
-    <Name>Document ID Generator</Name>
-    <Synchronization>Synchronous</Synchronization>
-    <Type>10004</Type>
-    <SequenceNumber>1002</SequenceNumber>
-    <Assembly>Microsoft.Office.DocumentManagement, Version=14.0.0.0, Culture=neutral, PublicKeyToken=71e9bce111e9429c</Assembly>
-    <Class>Microsoft.Office.DocumentManagement.Internal.DocIdHandler</Class>
-    <Data/>
-    <Filter/>
-  </Receiver>
-  <Receiver>
-    <Name>Document ID Generator</Name>
-    <Synchronization>Synchronous</Synchronization>
-    <Type>10006</Type>
-    <SequenceNumber>1003</SequenceNumber>
-    <Assembly>Microsoft.Office.DocumentManagement, Version=14.0.0.0, Culture=neutral, PublicKeyToken=71e9bce111e9429c</Assembly>
-    <Class>Microsoft.Office.DocumentManagement.Internal.DocIdHandler</Class>
-    <Data/>
-    <Filter/>
-  </Receiver>
-</spe:Receivers>
-</file>
-
-<file path=customXml/item4.xml><?xml version="1.0" encoding="utf-8"?>
 <ct:contentTypeSchema xmlns:ct="http://schemas.microsoft.com/office/2006/metadata/contentType" xmlns:ma="http://schemas.microsoft.com/office/2006/metadata/properties/metaAttributes" ct:_="" ma:_="" ma:contentTypeName="Document" ma:contentTypeID="0x0101005953A7A3657A61428D34982CE3100E9A" ma:contentTypeVersion="0" ma:contentTypeDescription="Create a new document." ma:contentTypeScope="" ma:versionID="9d7dbb0d33bb298decf17a3b04476177">
   <xsd:schema xmlns:xsd="http://www.w3.org/2001/XMLSchema" xmlns:xs="http://www.w3.org/2001/XMLSchema" xmlns:p="http://schemas.microsoft.com/office/2006/metadata/properties" xmlns:ns2="f2ad5090-61a8-4b8c-ab70-68f4ff4d1933" targetNamespace="http://schemas.microsoft.com/office/2006/metadata/properties" ma:root="true" ma:fieldsID="653440191449dc6dbdd54d77bba038f8" ns2:_="">
     <xsd:import namespace="f2ad5090-61a8-4b8c-ab70-68f4ff4d1933"/>
@@ -28594,7 +23171,61 @@
 </ct:contentTypeSchema>
 </file>
 
+<file path=customXml/item4.xml><?xml version="1.0" encoding="utf-8"?>
+<?mso-contentType ?>
+<spe:Receivers xmlns:spe="http://schemas.microsoft.com/sharepoint/events">
+  <Receiver>
+    <Name>Document ID Generator</Name>
+    <Synchronization>Synchronous</Synchronization>
+    <Type>10001</Type>
+    <SequenceNumber>1000</SequenceNumber>
+    <Assembly>Microsoft.Office.DocumentManagement, Version=14.0.0.0, Culture=neutral, PublicKeyToken=71e9bce111e9429c</Assembly>
+    <Class>Microsoft.Office.DocumentManagement.Internal.DocIdHandler</Class>
+    <Data/>
+    <Filter/>
+  </Receiver>
+  <Receiver>
+    <Name>Document ID Generator</Name>
+    <Synchronization>Synchronous</Synchronization>
+    <Type>10002</Type>
+    <SequenceNumber>1001</SequenceNumber>
+    <Assembly>Microsoft.Office.DocumentManagement, Version=14.0.0.0, Culture=neutral, PublicKeyToken=71e9bce111e9429c</Assembly>
+    <Class>Microsoft.Office.DocumentManagement.Internal.DocIdHandler</Class>
+    <Data/>
+    <Filter/>
+  </Receiver>
+  <Receiver>
+    <Name>Document ID Generator</Name>
+    <Synchronization>Synchronous</Synchronization>
+    <Type>10004</Type>
+    <SequenceNumber>1002</SequenceNumber>
+    <Assembly>Microsoft.Office.DocumentManagement, Version=14.0.0.0, Culture=neutral, PublicKeyToken=71e9bce111e9429c</Assembly>
+    <Class>Microsoft.Office.DocumentManagement.Internal.DocIdHandler</Class>
+    <Data/>
+    <Filter/>
+  </Receiver>
+  <Receiver>
+    <Name>Document ID Generator</Name>
+    <Synchronization>Synchronous</Synchronization>
+    <Type>10006</Type>
+    <SequenceNumber>1003</SequenceNumber>
+    <Assembly>Microsoft.Office.DocumentManagement, Version=14.0.0.0, Culture=neutral, PublicKeyToken=71e9bce111e9429c</Assembly>
+    <Class>Microsoft.Office.DocumentManagement.Internal.DocIdHandler</Class>
+    <Data/>
+    <Filter/>
+  </Receiver>
+</spe:Receivers>
+</file>
+
 <file path=customXml/itemProps1.xml><?xml version="1.0" encoding="utf-8"?>
+<ds:datastoreItem xmlns:ds="http://schemas.openxmlformats.org/officeDocument/2006/customXml" ds:itemID="{007E157F-F4C7-4050-8D49-55DB8D1A3AC8}">
+  <ds:schemaRefs>
+    <ds:schemaRef ds:uri="http://schemas.microsoft.com/sharepoint/v3/contenttype/forms"/>
+  </ds:schemaRefs>
+</ds:datastoreItem>
+</file>
+
+<file path=customXml/itemProps2.xml><?xml version="1.0" encoding="utf-8"?>
 <ds:datastoreItem xmlns:ds="http://schemas.openxmlformats.org/officeDocument/2006/customXml" ds:itemID="{659AFC57-EF78-4135-9503-D857AFA49F8B}">
   <ds:schemaRefs>
     <ds:schemaRef ds:uri="http://schemas.microsoft.com/office/2006/documentManagement/types"/>
@@ -28610,23 +23241,7 @@
 </ds:datastoreItem>
 </file>
 
-<file path=customXml/itemProps2.xml><?xml version="1.0" encoding="utf-8"?>
-<ds:datastoreItem xmlns:ds="http://schemas.openxmlformats.org/officeDocument/2006/customXml" ds:itemID="{007E157F-F4C7-4050-8D49-55DB8D1A3AC8}">
-  <ds:schemaRefs>
-    <ds:schemaRef ds:uri="http://schemas.microsoft.com/sharepoint/v3/contenttype/forms"/>
-  </ds:schemaRefs>
-</ds:datastoreItem>
-</file>
-
 <file path=customXml/itemProps3.xml><?xml version="1.0" encoding="utf-8"?>
-<ds:datastoreItem xmlns:ds="http://schemas.openxmlformats.org/officeDocument/2006/customXml" ds:itemID="{75E05AB7-3B6A-492F-8FD0-7267B59BB88B}">
-  <ds:schemaRefs>
-    <ds:schemaRef ds:uri="http://schemas.microsoft.com/sharepoint/events"/>
-  </ds:schemaRefs>
-</ds:datastoreItem>
-</file>
-
-<file path=customXml/itemProps4.xml><?xml version="1.0" encoding="utf-8"?>
 <ds:datastoreItem xmlns:ds="http://schemas.openxmlformats.org/officeDocument/2006/customXml" ds:itemID="{1CBA01FD-69E2-4D69-B064-01637DD45D7D}">
   <ds:schemaRefs>
     <ds:schemaRef ds:uri="http://schemas.microsoft.com/office/2006/metadata/contentType"/>
@@ -28642,4 +23257,12 @@
     <ds:schemaRef ds:uri="http://schemas.microsoft.com/internal/obd"/>
   </ds:schemaRefs>
 </ds:datastoreItem>
+</file>
+
+<file path=customXml/itemProps4.xml><?xml version="1.0" encoding="utf-8"?>
+<ds:datastoreItem xmlns:ds="http://schemas.openxmlformats.org/officeDocument/2006/customXml" ds:itemID="{75E05AB7-3B6A-492F-8FD0-7267B59BB88B}">
+  <ds:schemaRefs>
+    <ds:schemaRef ds:uri="http://schemas.microsoft.com/sharepoint/events"/>
+  </ds:schemaRefs>
+</ds:datastoreItem>
 </file>